--- a/PUM2/Aktualne/Wykłady/Wyklad1.pptx
+++ b/PUM2/Aktualne/Wykłady/Wyklad1.pptx
@@ -17272,98 +17272,6 @@
             </a:pPr>
             <a:r>
               <a:t>}</a:t>
-            </a:r>
-          </a:p>
-        </p:txBody>
-      </p:sp>
-      <p:sp>
-        <p:nvSpPr>
-          <p:cNvPr id="6" name="Panel menu jest obok głównej treści&#10;w strukturze">
-            <a:extLst>
-              <a:ext uri="{FF2B5EF4-FFF2-40B4-BE49-F238E27FC236}">
-                <a16:creationId xmlns:a16="http://schemas.microsoft.com/office/drawing/2014/main" id="{F6CA8757-309B-060D-5191-4154B6F3E206}"/>
-              </a:ext>
-            </a:extLst>
-          </p:cNvPr>
-          <p:cNvSpPr>
-            <a:spLocks noGrp="1"/>
-          </p:cNvSpPr>
-          <p:nvPr/>
-        </p:nvSpPr>
-        <p:spPr>
-          <a:xfrm>
-            <a:off x="1333500" y="5781675"/>
-            <a:ext cx="4648200" cy="790575"/>
-          </a:xfrm>
-          <a:prstGeom prst="rect">
-            <a:avLst/>
-          </a:prstGeom>
-          <a:noFill/>
-          <a:ln w="0">
-            <a:noFill/>
-          </a:ln>
-        </p:spPr>
-        <p:txBody>
-          <a:bodyPr wrap="square" lIns="0" tIns="0" rIns="0" bIns="0" anchor="t">
-            <a:noAutofit/>
-          </a:bodyPr>
-          <a:lstStyle/>
-          <a:p>
-            <a:pPr algn="l">
-              <a:spcBef>
-                <a:spcPts val="0"/>
-              </a:spcBef>
-              <a:spcAft>
-                <a:spcPts val="0"/>
-              </a:spcAft>
-              <a:defRPr sz="1650" b="0">
-                <a:solidFill>
-                  <a:srgbClr val="455661"/>
-                </a:solidFill>
-                <a:latin typeface="Calibri"/>
-                <a:ea typeface="Calibri"/>
-                <a:cs typeface="Calibri"/>
-              </a:defRPr>
-            </a:pPr>
-            <a:r>
-              <a:rPr sz="1650" b="0">
-                <a:solidFill>
-                  <a:srgbClr val="455661"/>
-                </a:solidFill>
-                <a:latin typeface="Calibri"/>
-                <a:ea typeface="Calibri"/>
-                <a:cs typeface="Calibri"/>
-              </a:rPr>
-              <a:t>Panel menu jest obok głównej treści</a:t>
-            </a:r>
-          </a:p>
-          <a:p>
-            <a:pPr algn="l">
-              <a:spcBef>
-                <a:spcPts val="0"/>
-              </a:spcBef>
-              <a:spcAft>
-                <a:spcPts val="0"/>
-              </a:spcAft>
-              <a:defRPr sz="1650" b="0">
-                <a:solidFill>
-                  <a:srgbClr val="455661"/>
-                </a:solidFill>
-                <a:latin typeface="Calibri"/>
-                <a:ea typeface="Calibri"/>
-                <a:cs typeface="Calibri"/>
-              </a:defRPr>
-            </a:pPr>
-            <a:r>
-              <a:rPr sz="1650" b="0">
-                <a:solidFill>
-                  <a:srgbClr val="455661"/>
-                </a:solidFill>
-                <a:latin typeface="Calibri"/>
-                <a:ea typeface="Calibri"/>
-                <a:cs typeface="Calibri"/>
-              </a:rPr>
-              <a:t>w strukturze ModalNavigationDrawer.</a:t>
             </a:r>
           </a:p>
         </p:txBody>

--- a/PUM2/Aktualne/Wykłady/Wyklad1.pptx
+++ b/PUM2/Aktualne/Wykłady/Wyklad1.pptx
@@ -5,10 +5,10 @@
     <p:sldMasterId id="2147483696" r:id="rId1"/>
   </p:sldMasterIdLst>
   <p:notesMasterIdLst>
-    <p:notesMasterId r:id="rId31"/>
+    <p:notesMasterId r:id="rId29"/>
   </p:notesMasterIdLst>
   <p:handoutMasterIdLst>
-    <p:handoutMasterId r:id="rId32"/>
+    <p:handoutMasterId r:id="rId30"/>
   </p:handoutMasterIdLst>
   <p:sldIdLst>
     <p:sldId id="346" r:id="rId2"/>
@@ -19,27 +19,25 @@
     <p:sldId id="542" r:id="rId7"/>
     <p:sldId id="543" r:id="rId8"/>
     <p:sldId id="506" r:id="rId9"/>
-    <p:sldId id="507" r:id="rId10"/>
-    <p:sldId id="544" r:id="rId11"/>
-    <p:sldId id="508" r:id="rId12"/>
-    <p:sldId id="545" r:id="rId13"/>
-    <p:sldId id="546" r:id="rId14"/>
-    <p:sldId id="547" r:id="rId15"/>
-    <p:sldId id="548" r:id="rId16"/>
-    <p:sldId id="549" r:id="rId17"/>
-    <p:sldId id="550" r:id="rId18"/>
-    <p:sldId id="551" r:id="rId19"/>
-    <p:sldId id="552" r:id="rId20"/>
-    <p:sldId id="553" r:id="rId21"/>
-    <p:sldId id="554" r:id="rId22"/>
-    <p:sldId id="555" r:id="rId23"/>
-    <p:sldId id="556" r:id="rId24"/>
-    <p:sldId id="557" r:id="rId25"/>
-    <p:sldId id="558" r:id="rId26"/>
-    <p:sldId id="559" r:id="rId27"/>
-    <p:sldId id="560" r:id="rId28"/>
-    <p:sldId id="561" r:id="rId29"/>
-    <p:sldId id="562" r:id="rId30"/>
+    <p:sldId id="544" r:id="rId10"/>
+    <p:sldId id="508" r:id="rId11"/>
+    <p:sldId id="545" r:id="rId12"/>
+    <p:sldId id="546" r:id="rId13"/>
+    <p:sldId id="547" r:id="rId14"/>
+    <p:sldId id="548" r:id="rId15"/>
+    <p:sldId id="549" r:id="rId16"/>
+    <p:sldId id="550" r:id="rId17"/>
+    <p:sldId id="551" r:id="rId18"/>
+    <p:sldId id="552" r:id="rId19"/>
+    <p:sldId id="553" r:id="rId20"/>
+    <p:sldId id="554" r:id="rId21"/>
+    <p:sldId id="555" r:id="rId22"/>
+    <p:sldId id="556" r:id="rId23"/>
+    <p:sldId id="557" r:id="rId24"/>
+    <p:sldId id="558" r:id="rId25"/>
+    <p:sldId id="559" r:id="rId26"/>
+    <p:sldId id="560" r:id="rId27"/>
+    <p:sldId id="561" r:id="rId28"/>
   </p:sldIdLst>
   <p:sldSz cx="9144000" cy="6858000" type="screen4x3"/>
   <p:notesSz cx="6858000" cy="9144000"/>
@@ -300,7 +298,7 @@
           <a:p>
             <a:fld id="{5113504E-0C99-2340-A5F6-DD6E1A87C372}" type="datetimeFigureOut">
               <a:rPr lang="pl-PL" smtClean="0"/>
-              <a:t>2.10.2026</a:t>
+              <a:t>7.10.2026</a:t>
             </a:fld>
             <a:endParaRPr lang="pl-PL"/>
           </a:p>
@@ -466,7 +464,7 @@
           <a:p>
             <a:fld id="{F78C933E-44E9-2D43-91B0-0D2BEEFA7EB9}" type="datetimeFigureOut">
               <a:rPr lang="pl-PL" smtClean="0"/>
-              <a:t>1.10.2026</a:t>
+              <a:t>6.10.2026</a:t>
             </a:fld>
             <a:endParaRPr lang="pl-PL"/>
           </a:p>
@@ -833,124 +831,6 @@
         <p:cNvPr id="1" name="">
           <a:extLst>
             <a:ext uri="{FF2B5EF4-FFF2-40B4-BE49-F238E27FC236}">
-              <a16:creationId xmlns:a16="http://schemas.microsoft.com/office/drawing/2014/main" id="{72745139-1751-52AF-C50C-E2523F518727}"/>
-            </a:ext>
-          </a:extLst>
-        </p:cNvPr>
-        <p:cNvGrpSpPr/>
-        <p:nvPr/>
-      </p:nvGrpSpPr>
-      <p:grpSpPr>
-        <a:xfrm>
-          <a:off x="0" y="0"/>
-          <a:ext cx="0" cy="0"/>
-          <a:chOff x="0" y="0"/>
-          <a:chExt cx="0" cy="0"/>
-        </a:xfrm>
-      </p:grpSpPr>
-      <p:sp>
-        <p:nvSpPr>
-          <p:cNvPr id="2" name="Slide Image Placeholder 1">
-            <a:extLst>
-              <a:ext uri="{FF2B5EF4-FFF2-40B4-BE49-F238E27FC236}">
-                <a16:creationId xmlns:a16="http://schemas.microsoft.com/office/drawing/2014/main" id="{3F0D4BA4-4321-BF41-A406-93BBF8BAB974}"/>
-              </a:ext>
-            </a:extLst>
-          </p:cNvPr>
-          <p:cNvSpPr>
-            <a:spLocks noGrp="1" noRot="1" noChangeAspect="1"/>
-          </p:cNvSpPr>
-          <p:nvPr>
-            <p:ph type="sldImg"/>
-          </p:nvPr>
-        </p:nvSpPr>
-        <p:spPr/>
-        <p:txBody>
-          <a:bodyPr/>
-          <a:lstStyle/>
-          <a:p>
-            <a:endParaRPr lang="pl-PL"/>
-          </a:p>
-        </p:txBody>
-      </p:sp>
-      <p:sp>
-        <p:nvSpPr>
-          <p:cNvPr id="3" name="Notes Placeholder 2">
-            <a:extLst>
-              <a:ext uri="{FF2B5EF4-FFF2-40B4-BE49-F238E27FC236}">
-                <a16:creationId xmlns:a16="http://schemas.microsoft.com/office/drawing/2014/main" id="{CBA1C51A-9BBC-D00A-E338-21AF6E31EA15}"/>
-              </a:ext>
-            </a:extLst>
-          </p:cNvPr>
-          <p:cNvSpPr>
-            <a:spLocks noGrp="1"/>
-          </p:cNvSpPr>
-          <p:nvPr>
-            <p:ph type="body" idx="1"/>
-          </p:nvPr>
-        </p:nvSpPr>
-        <p:spPr/>
-        <p:txBody>
-          <a:bodyPr/>
-          <a:lstStyle/>
-          <a:p>
-            <a:pPr rtl="0"/>
-            <a:endParaRPr lang="pl-PL" dirty="0">
-              <a:effectLst/>
-            </a:endParaRPr>
-          </a:p>
-        </p:txBody>
-      </p:sp>
-      <p:sp>
-        <p:nvSpPr>
-          <p:cNvPr id="4" name="Slide Number Placeholder 3">
-            <a:extLst>
-              <a:ext uri="{FF2B5EF4-FFF2-40B4-BE49-F238E27FC236}">
-                <a16:creationId xmlns:a16="http://schemas.microsoft.com/office/drawing/2014/main" id="{355A87FD-445E-5BB6-3FE2-C195976BBEC6}"/>
-              </a:ext>
-            </a:extLst>
-          </p:cNvPr>
-          <p:cNvSpPr>
-            <a:spLocks noGrp="1"/>
-          </p:cNvSpPr>
-          <p:nvPr>
-            <p:ph type="sldNum" sz="quarter" idx="10"/>
-          </p:nvPr>
-        </p:nvSpPr>
-        <p:spPr/>
-        <p:txBody>
-          <a:bodyPr/>
-          <a:lstStyle/>
-          <a:p>
-            <a:fld id="{79CE77F9-1A7F-B148-A0AA-5828300D10BC}" type="slidenum">
-              <a:rPr lang="pl-PL" smtClean="0"/>
-              <a:t>10</a:t>
-            </a:fld>
-            <a:endParaRPr lang="pl-PL"/>
-          </a:p>
-        </p:txBody>
-      </p:sp>
-    </p:spTree>
-    <p:extLst>
-      <p:ext uri="{BB962C8B-B14F-4D97-AF65-F5344CB8AC3E}">
-        <p14:creationId xmlns:p14="http://schemas.microsoft.com/office/powerpoint/2010/main" val="3934046284"/>
-      </p:ext>
-    </p:extLst>
-  </p:cSld>
-  <p:clrMapOvr>
-    <a:masterClrMapping/>
-  </p:clrMapOvr>
-</p:notes>
-</file>
-
-<file path=ppt/notesSlides/notesSlide11.xml><?xml version="1.0" encoding="utf-8"?>
-<p:notes xmlns:a="http://schemas.openxmlformats.org/drawingml/2006/main" xmlns:r="http://schemas.openxmlformats.org/officeDocument/2006/relationships" xmlns:p="http://schemas.openxmlformats.org/presentationml/2006/main">
-  <p:cSld>
-    <p:spTree>
-      <p:nvGrpSpPr>
-        <p:cNvPr id="1" name="">
-          <a:extLst>
-            <a:ext uri="{FF2B5EF4-FFF2-40B4-BE49-F238E27FC236}">
               <a16:creationId xmlns:a16="http://schemas.microsoft.com/office/drawing/2014/main" id="{A2B68032-C042-4B91-2BF0-9B26B9662DA0}"/>
             </a:ext>
           </a:extLst>
@@ -1042,7 +922,7 @@
           <a:p>
             <a:fld id="{79CE77F9-1A7F-B148-A0AA-5828300D10BC}" type="slidenum">
               <a:rPr lang="pl-PL" smtClean="0"/>
-              <a:t>11</a:t>
+              <a:t>10</a:t>
             </a:fld>
             <a:endParaRPr lang="pl-PL"/>
           </a:p>
@@ -1061,7 +941,7 @@
 </p:notes>
 </file>
 
-<file path=ppt/notesSlides/notesSlide12.xml><?xml version="1.0" encoding="utf-8"?>
+<file path=ppt/notesSlides/notesSlide11.xml><?xml version="1.0" encoding="utf-8"?>
 <p:notes xmlns:a="http://schemas.openxmlformats.org/drawingml/2006/main" xmlns:r="http://schemas.openxmlformats.org/officeDocument/2006/relationships" xmlns:p="http://schemas.openxmlformats.org/presentationml/2006/main">
   <p:cSld>
     <p:spTree>
@@ -1160,7 +1040,7 @@
           <a:p>
             <a:fld id="{79CE77F9-1A7F-B148-A0AA-5828300D10BC}" type="slidenum">
               <a:rPr lang="pl-PL" smtClean="0"/>
-              <a:t>12</a:t>
+              <a:t>11</a:t>
             </a:fld>
             <a:endParaRPr lang="pl-PL"/>
           </a:p>
@@ -1179,7 +1059,7 @@
 </p:notes>
 </file>
 
-<file path=ppt/notesSlides/notesSlide13.xml><?xml version="1.0" encoding="utf-8"?>
+<file path=ppt/notesSlides/notesSlide12.xml><?xml version="1.0" encoding="utf-8"?>
 <p:notes xmlns:a="http://schemas.openxmlformats.org/drawingml/2006/main" xmlns:r="http://schemas.openxmlformats.org/officeDocument/2006/relationships" xmlns:p="http://schemas.openxmlformats.org/presentationml/2006/main">
   <p:cSld>
     <p:spTree>
@@ -1278,7 +1158,7 @@
           <a:p>
             <a:fld id="{79CE77F9-1A7F-B148-A0AA-5828300D10BC}" type="slidenum">
               <a:rPr lang="pl-PL" smtClean="0"/>
-              <a:t>13</a:t>
+              <a:t>12</a:t>
             </a:fld>
             <a:endParaRPr lang="pl-PL"/>
           </a:p>
@@ -1297,7 +1177,7 @@
 </p:notes>
 </file>
 
-<file path=ppt/notesSlides/notesSlide14.xml><?xml version="1.0" encoding="utf-8"?>
+<file path=ppt/notesSlides/notesSlide13.xml><?xml version="1.0" encoding="utf-8"?>
 <p:notes xmlns:a="http://schemas.openxmlformats.org/drawingml/2006/main" xmlns:r="http://schemas.openxmlformats.org/officeDocument/2006/relationships" xmlns:p="http://schemas.openxmlformats.org/presentationml/2006/main">
   <p:cSld>
     <p:spTree>
@@ -1396,7 +1276,7 @@
           <a:p>
             <a:fld id="{79CE77F9-1A7F-B148-A0AA-5828300D10BC}" type="slidenum">
               <a:rPr lang="pl-PL" smtClean="0"/>
-              <a:t>14</a:t>
+              <a:t>13</a:t>
             </a:fld>
             <a:endParaRPr lang="pl-PL"/>
           </a:p>
@@ -1415,7 +1295,7 @@
 </p:notes>
 </file>
 
-<file path=ppt/notesSlides/notesSlide15.xml><?xml version="1.0" encoding="utf-8"?>
+<file path=ppt/notesSlides/notesSlide14.xml><?xml version="1.0" encoding="utf-8"?>
 <p:notes xmlns:a="http://schemas.openxmlformats.org/drawingml/2006/main" xmlns:r="http://schemas.openxmlformats.org/officeDocument/2006/relationships" xmlns:p="http://schemas.openxmlformats.org/presentationml/2006/main">
   <p:cSld>
     <p:spTree>
@@ -1514,7 +1394,7 @@
           <a:p>
             <a:fld id="{79CE77F9-1A7F-B148-A0AA-5828300D10BC}" type="slidenum">
               <a:rPr lang="pl-PL" smtClean="0"/>
-              <a:t>15</a:t>
+              <a:t>14</a:t>
             </a:fld>
             <a:endParaRPr lang="pl-PL"/>
           </a:p>
@@ -1533,7 +1413,7 @@
 </p:notes>
 </file>
 
-<file path=ppt/notesSlides/notesSlide16.xml><?xml version="1.0" encoding="utf-8"?>
+<file path=ppt/notesSlides/notesSlide15.xml><?xml version="1.0" encoding="utf-8"?>
 <p:notes xmlns:a="http://schemas.openxmlformats.org/drawingml/2006/main" xmlns:r="http://schemas.openxmlformats.org/officeDocument/2006/relationships" xmlns:p="http://schemas.openxmlformats.org/presentationml/2006/main">
   <p:cSld>
     <p:spTree>
@@ -1632,7 +1512,7 @@
           <a:p>
             <a:fld id="{79CE77F9-1A7F-B148-A0AA-5828300D10BC}" type="slidenum">
               <a:rPr lang="pl-PL" smtClean="0"/>
-              <a:t>16</a:t>
+              <a:t>15</a:t>
             </a:fld>
             <a:endParaRPr lang="pl-PL"/>
           </a:p>
@@ -1651,7 +1531,7 @@
 </p:notes>
 </file>
 
-<file path=ppt/notesSlides/notesSlide17.xml><?xml version="1.0" encoding="utf-8"?>
+<file path=ppt/notesSlides/notesSlide16.xml><?xml version="1.0" encoding="utf-8"?>
 <p:notes xmlns:a="http://schemas.openxmlformats.org/drawingml/2006/main" xmlns:r="http://schemas.openxmlformats.org/officeDocument/2006/relationships" xmlns:p="http://schemas.openxmlformats.org/presentationml/2006/main">
   <p:cSld>
     <p:spTree>
@@ -1750,7 +1630,7 @@
           <a:p>
             <a:fld id="{79CE77F9-1A7F-B148-A0AA-5828300D10BC}" type="slidenum">
               <a:rPr lang="pl-PL" smtClean="0"/>
-              <a:t>17</a:t>
+              <a:t>16</a:t>
             </a:fld>
             <a:endParaRPr lang="pl-PL"/>
           </a:p>
@@ -1769,7 +1649,7 @@
 </p:notes>
 </file>
 
-<file path=ppt/notesSlides/notesSlide18.xml><?xml version="1.0" encoding="utf-8"?>
+<file path=ppt/notesSlides/notesSlide17.xml><?xml version="1.0" encoding="utf-8"?>
 <p:notes xmlns:a="http://schemas.openxmlformats.org/drawingml/2006/main" xmlns:r="http://schemas.openxmlformats.org/officeDocument/2006/relationships" xmlns:p="http://schemas.openxmlformats.org/presentationml/2006/main">
   <p:cSld>
     <p:spTree>
@@ -1868,7 +1748,7 @@
           <a:p>
             <a:fld id="{79CE77F9-1A7F-B148-A0AA-5828300D10BC}" type="slidenum">
               <a:rPr lang="pl-PL" smtClean="0"/>
-              <a:t>18</a:t>
+              <a:t>17</a:t>
             </a:fld>
             <a:endParaRPr lang="pl-PL"/>
           </a:p>
@@ -1887,7 +1767,7 @@
 </p:notes>
 </file>
 
-<file path=ppt/notesSlides/notesSlide19.xml><?xml version="1.0" encoding="utf-8"?>
+<file path=ppt/notesSlides/notesSlide18.xml><?xml version="1.0" encoding="utf-8"?>
 <p:notes xmlns:a="http://schemas.openxmlformats.org/drawingml/2006/main" xmlns:r="http://schemas.openxmlformats.org/officeDocument/2006/relationships" xmlns:p="http://schemas.openxmlformats.org/presentationml/2006/main">
   <p:cSld>
     <p:spTree>
@@ -1986,7 +1866,7 @@
           <a:p>
             <a:fld id="{79CE77F9-1A7F-B148-A0AA-5828300D10BC}" type="slidenum">
               <a:rPr lang="pl-PL" smtClean="0"/>
-              <a:t>19</a:t>
+              <a:t>18</a:t>
             </a:fld>
             <a:endParaRPr lang="pl-PL"/>
           </a:p>
@@ -2005,101 +1885,7 @@
 </p:notes>
 </file>
 
-<file path=ppt/notesSlides/notesSlide2.xml><?xml version="1.0" encoding="utf-8"?>
-<p:notes xmlns:a="http://schemas.openxmlformats.org/drawingml/2006/main" xmlns:r="http://schemas.openxmlformats.org/officeDocument/2006/relationships" xmlns:p="http://schemas.openxmlformats.org/presentationml/2006/main">
-  <p:cSld>
-    <p:spTree>
-      <p:nvGrpSpPr>
-        <p:cNvPr id="1" name=""/>
-        <p:cNvGrpSpPr/>
-        <p:nvPr/>
-      </p:nvGrpSpPr>
-      <p:grpSpPr>
-        <a:xfrm>
-          <a:off x="0" y="0"/>
-          <a:ext cx="0" cy="0"/>
-          <a:chOff x="0" y="0"/>
-          <a:chExt cx="0" cy="0"/>
-        </a:xfrm>
-      </p:grpSpPr>
-      <p:sp>
-        <p:nvSpPr>
-          <p:cNvPr id="2" name="Slide Image Placeholder 1"/>
-          <p:cNvSpPr>
-            <a:spLocks noGrp="1" noRot="1" noChangeAspect="1"/>
-          </p:cNvSpPr>
-          <p:nvPr>
-            <p:ph type="sldImg"/>
-          </p:nvPr>
-        </p:nvSpPr>
-        <p:spPr/>
-        <p:txBody>
-          <a:bodyPr/>
-          <a:lstStyle/>
-          <a:p>
-            <a:endParaRPr lang="pl-PL"/>
-          </a:p>
-        </p:txBody>
-      </p:sp>
-      <p:sp>
-        <p:nvSpPr>
-          <p:cNvPr id="3" name="Notes Placeholder 2"/>
-          <p:cNvSpPr>
-            <a:spLocks noGrp="1"/>
-          </p:cNvSpPr>
-          <p:nvPr>
-            <p:ph type="body" idx="1"/>
-          </p:nvPr>
-        </p:nvSpPr>
-        <p:spPr/>
-        <p:txBody>
-          <a:bodyPr/>
-          <a:lstStyle/>
-          <a:p>
-            <a:pPr rtl="0"/>
-            <a:endParaRPr lang="pl-PL" dirty="0">
-              <a:effectLst/>
-            </a:endParaRPr>
-          </a:p>
-        </p:txBody>
-      </p:sp>
-      <p:sp>
-        <p:nvSpPr>
-          <p:cNvPr id="4" name="Slide Number Placeholder 3"/>
-          <p:cNvSpPr>
-            <a:spLocks noGrp="1"/>
-          </p:cNvSpPr>
-          <p:nvPr>
-            <p:ph type="sldNum" sz="quarter" idx="10"/>
-          </p:nvPr>
-        </p:nvSpPr>
-        <p:spPr/>
-        <p:txBody>
-          <a:bodyPr/>
-          <a:lstStyle/>
-          <a:p>
-            <a:fld id="{79CE77F9-1A7F-B148-A0AA-5828300D10BC}" type="slidenum">
-              <a:rPr lang="pl-PL" smtClean="0"/>
-              <a:t>2</a:t>
-            </a:fld>
-            <a:endParaRPr lang="pl-PL"/>
-          </a:p>
-        </p:txBody>
-      </p:sp>
-    </p:spTree>
-    <p:extLst>
-      <p:ext uri="{BB962C8B-B14F-4D97-AF65-F5344CB8AC3E}">
-        <p14:creationId xmlns:p14="http://schemas.microsoft.com/office/powerpoint/2010/main" val="3473981838"/>
-      </p:ext>
-    </p:extLst>
-  </p:cSld>
-  <p:clrMapOvr>
-    <a:masterClrMapping/>
-  </p:clrMapOvr>
-</p:notes>
-</file>
-
-<file path=ppt/notesSlides/notesSlide20.xml><?xml version="1.0" encoding="utf-8"?>
+<file path=ppt/notesSlides/notesSlide19.xml><?xml version="1.0" encoding="utf-8"?>
 <p:notes xmlns:a="http://schemas.openxmlformats.org/drawingml/2006/main" xmlns:r="http://schemas.openxmlformats.org/officeDocument/2006/relationships" xmlns:p="http://schemas.openxmlformats.org/presentationml/2006/main">
   <p:cSld>
     <p:spTree>
@@ -2198,7 +1984,7 @@
           <a:p>
             <a:fld id="{79CE77F9-1A7F-B148-A0AA-5828300D10BC}" type="slidenum">
               <a:rPr lang="pl-PL" smtClean="0"/>
-              <a:t>20</a:t>
+              <a:t>19</a:t>
             </a:fld>
             <a:endParaRPr lang="pl-PL"/>
           </a:p>
@@ -2217,7 +2003,101 @@
 </p:notes>
 </file>
 
-<file path=ppt/notesSlides/notesSlide21.xml><?xml version="1.0" encoding="utf-8"?>
+<file path=ppt/notesSlides/notesSlide2.xml><?xml version="1.0" encoding="utf-8"?>
+<p:notes xmlns:a="http://schemas.openxmlformats.org/drawingml/2006/main" xmlns:r="http://schemas.openxmlformats.org/officeDocument/2006/relationships" xmlns:p="http://schemas.openxmlformats.org/presentationml/2006/main">
+  <p:cSld>
+    <p:spTree>
+      <p:nvGrpSpPr>
+        <p:cNvPr id="1" name=""/>
+        <p:cNvGrpSpPr/>
+        <p:nvPr/>
+      </p:nvGrpSpPr>
+      <p:grpSpPr>
+        <a:xfrm>
+          <a:off x="0" y="0"/>
+          <a:ext cx="0" cy="0"/>
+          <a:chOff x="0" y="0"/>
+          <a:chExt cx="0" cy="0"/>
+        </a:xfrm>
+      </p:grpSpPr>
+      <p:sp>
+        <p:nvSpPr>
+          <p:cNvPr id="2" name="Slide Image Placeholder 1"/>
+          <p:cNvSpPr>
+            <a:spLocks noGrp="1" noRot="1" noChangeAspect="1"/>
+          </p:cNvSpPr>
+          <p:nvPr>
+            <p:ph type="sldImg"/>
+          </p:nvPr>
+        </p:nvSpPr>
+        <p:spPr/>
+        <p:txBody>
+          <a:bodyPr/>
+          <a:lstStyle/>
+          <a:p>
+            <a:endParaRPr lang="pl-PL"/>
+          </a:p>
+        </p:txBody>
+      </p:sp>
+      <p:sp>
+        <p:nvSpPr>
+          <p:cNvPr id="3" name="Notes Placeholder 2"/>
+          <p:cNvSpPr>
+            <a:spLocks noGrp="1"/>
+          </p:cNvSpPr>
+          <p:nvPr>
+            <p:ph type="body" idx="1"/>
+          </p:nvPr>
+        </p:nvSpPr>
+        <p:spPr/>
+        <p:txBody>
+          <a:bodyPr/>
+          <a:lstStyle/>
+          <a:p>
+            <a:pPr rtl="0"/>
+            <a:endParaRPr lang="pl-PL" dirty="0">
+              <a:effectLst/>
+            </a:endParaRPr>
+          </a:p>
+        </p:txBody>
+      </p:sp>
+      <p:sp>
+        <p:nvSpPr>
+          <p:cNvPr id="4" name="Slide Number Placeholder 3"/>
+          <p:cNvSpPr>
+            <a:spLocks noGrp="1"/>
+          </p:cNvSpPr>
+          <p:nvPr>
+            <p:ph type="sldNum" sz="quarter" idx="10"/>
+          </p:nvPr>
+        </p:nvSpPr>
+        <p:spPr/>
+        <p:txBody>
+          <a:bodyPr/>
+          <a:lstStyle/>
+          <a:p>
+            <a:fld id="{79CE77F9-1A7F-B148-A0AA-5828300D10BC}" type="slidenum">
+              <a:rPr lang="pl-PL" smtClean="0"/>
+              <a:t>2</a:t>
+            </a:fld>
+            <a:endParaRPr lang="pl-PL"/>
+          </a:p>
+        </p:txBody>
+      </p:sp>
+    </p:spTree>
+    <p:extLst>
+      <p:ext uri="{BB962C8B-B14F-4D97-AF65-F5344CB8AC3E}">
+        <p14:creationId xmlns:p14="http://schemas.microsoft.com/office/powerpoint/2010/main" val="3473981838"/>
+      </p:ext>
+    </p:extLst>
+  </p:cSld>
+  <p:clrMapOvr>
+    <a:masterClrMapping/>
+  </p:clrMapOvr>
+</p:notes>
+</file>
+
+<file path=ppt/notesSlides/notesSlide20.xml><?xml version="1.0" encoding="utf-8"?>
 <p:notes xmlns:a="http://schemas.openxmlformats.org/drawingml/2006/main" xmlns:r="http://schemas.openxmlformats.org/officeDocument/2006/relationships" xmlns:p="http://schemas.openxmlformats.org/presentationml/2006/main">
   <p:cSld>
     <p:spTree>
@@ -2316,7 +2196,7 @@
           <a:p>
             <a:fld id="{79CE77F9-1A7F-B148-A0AA-5828300D10BC}" type="slidenum">
               <a:rPr lang="pl-PL" smtClean="0"/>
-              <a:t>21</a:t>
+              <a:t>20</a:t>
             </a:fld>
             <a:endParaRPr lang="pl-PL"/>
           </a:p>
@@ -2335,7 +2215,7 @@
 </p:notes>
 </file>
 
-<file path=ppt/notesSlides/notesSlide22.xml><?xml version="1.0" encoding="utf-8"?>
+<file path=ppt/notesSlides/notesSlide21.xml><?xml version="1.0" encoding="utf-8"?>
 <p:notes xmlns:a="http://schemas.openxmlformats.org/drawingml/2006/main" xmlns:r="http://schemas.openxmlformats.org/officeDocument/2006/relationships" xmlns:p="http://schemas.openxmlformats.org/presentationml/2006/main">
   <p:cSld>
     <p:spTree>
@@ -2434,7 +2314,7 @@
           <a:p>
             <a:fld id="{79CE77F9-1A7F-B148-A0AA-5828300D10BC}" type="slidenum">
               <a:rPr lang="pl-PL" smtClean="0"/>
-              <a:t>22</a:t>
+              <a:t>21</a:t>
             </a:fld>
             <a:endParaRPr lang="pl-PL"/>
           </a:p>
@@ -2453,7 +2333,7 @@
 </p:notes>
 </file>
 
-<file path=ppt/notesSlides/notesSlide23.xml><?xml version="1.0" encoding="utf-8"?>
+<file path=ppt/notesSlides/notesSlide22.xml><?xml version="1.0" encoding="utf-8"?>
 <p:notes xmlns:a="http://schemas.openxmlformats.org/drawingml/2006/main" xmlns:r="http://schemas.openxmlformats.org/officeDocument/2006/relationships" xmlns:p="http://schemas.openxmlformats.org/presentationml/2006/main">
   <p:cSld>
     <p:spTree>
@@ -2552,7 +2432,7 @@
           <a:p>
             <a:fld id="{79CE77F9-1A7F-B148-A0AA-5828300D10BC}" type="slidenum">
               <a:rPr lang="pl-PL" smtClean="0"/>
-              <a:t>23</a:t>
+              <a:t>22</a:t>
             </a:fld>
             <a:endParaRPr lang="pl-PL"/>
           </a:p>
@@ -2571,7 +2451,7 @@
 </p:notes>
 </file>
 
-<file path=ppt/notesSlides/notesSlide24.xml><?xml version="1.0" encoding="utf-8"?>
+<file path=ppt/notesSlides/notesSlide23.xml><?xml version="1.0" encoding="utf-8"?>
 <p:notes xmlns:a="http://schemas.openxmlformats.org/drawingml/2006/main" xmlns:r="http://schemas.openxmlformats.org/officeDocument/2006/relationships" xmlns:p="http://schemas.openxmlformats.org/presentationml/2006/main">
   <p:cSld>
     <p:spTree>
@@ -2670,7 +2550,7 @@
           <a:p>
             <a:fld id="{79CE77F9-1A7F-B148-A0AA-5828300D10BC}" type="slidenum">
               <a:rPr lang="pl-PL" smtClean="0"/>
-              <a:t>24</a:t>
+              <a:t>23</a:t>
             </a:fld>
             <a:endParaRPr lang="pl-PL"/>
           </a:p>
@@ -2689,7 +2569,7 @@
 </p:notes>
 </file>
 
-<file path=ppt/notesSlides/notesSlide25.xml><?xml version="1.0" encoding="utf-8"?>
+<file path=ppt/notesSlides/notesSlide24.xml><?xml version="1.0" encoding="utf-8"?>
 <p:notes xmlns:a="http://schemas.openxmlformats.org/drawingml/2006/main" xmlns:r="http://schemas.openxmlformats.org/officeDocument/2006/relationships" xmlns:p="http://schemas.openxmlformats.org/presentationml/2006/main">
   <p:cSld>
     <p:spTree>
@@ -2788,7 +2668,7 @@
           <a:p>
             <a:fld id="{79CE77F9-1A7F-B148-A0AA-5828300D10BC}" type="slidenum">
               <a:rPr lang="pl-PL" smtClean="0"/>
-              <a:t>25</a:t>
+              <a:t>24</a:t>
             </a:fld>
             <a:endParaRPr lang="pl-PL"/>
           </a:p>
@@ -2807,7 +2687,7 @@
 </p:notes>
 </file>
 
-<file path=ppt/notesSlides/notesSlide26.xml><?xml version="1.0" encoding="utf-8"?>
+<file path=ppt/notesSlides/notesSlide25.xml><?xml version="1.0" encoding="utf-8"?>
 <p:notes xmlns:a="http://schemas.openxmlformats.org/drawingml/2006/main" xmlns:r="http://schemas.openxmlformats.org/officeDocument/2006/relationships" xmlns:p="http://schemas.openxmlformats.org/presentationml/2006/main">
   <p:cSld>
     <p:spTree>
@@ -2906,7 +2786,7 @@
           <a:p>
             <a:fld id="{79CE77F9-1A7F-B148-A0AA-5828300D10BC}" type="slidenum">
               <a:rPr lang="pl-PL" smtClean="0"/>
-              <a:t>26</a:t>
+              <a:t>25</a:t>
             </a:fld>
             <a:endParaRPr lang="pl-PL"/>
           </a:p>
@@ -2925,7 +2805,7 @@
 </p:notes>
 </file>
 
-<file path=ppt/notesSlides/notesSlide27.xml><?xml version="1.0" encoding="utf-8"?>
+<file path=ppt/notesSlides/notesSlide26.xml><?xml version="1.0" encoding="utf-8"?>
 <p:notes xmlns:a="http://schemas.openxmlformats.org/drawingml/2006/main" xmlns:r="http://schemas.openxmlformats.org/officeDocument/2006/relationships" xmlns:p="http://schemas.openxmlformats.org/presentationml/2006/main">
   <p:cSld>
     <p:spTree>
@@ -3024,7 +2904,7 @@
           <a:p>
             <a:fld id="{79CE77F9-1A7F-B148-A0AA-5828300D10BC}" type="slidenum">
               <a:rPr lang="pl-PL" smtClean="0"/>
-              <a:t>27</a:t>
+              <a:t>26</a:t>
             </a:fld>
             <a:endParaRPr lang="pl-PL"/>
           </a:p>
@@ -3043,7 +2923,7 @@
 </p:notes>
 </file>
 
-<file path=ppt/notesSlides/notesSlide28.xml><?xml version="1.0" encoding="utf-8"?>
+<file path=ppt/notesSlides/notesSlide27.xml><?xml version="1.0" encoding="utf-8"?>
 <p:notes xmlns:a="http://schemas.openxmlformats.org/drawingml/2006/main" xmlns:r="http://schemas.openxmlformats.org/officeDocument/2006/relationships" xmlns:p="http://schemas.openxmlformats.org/presentationml/2006/main">
   <p:cSld>
     <p:spTree>
@@ -3142,7 +3022,7 @@
           <a:p>
             <a:fld id="{79CE77F9-1A7F-B148-A0AA-5828300D10BC}" type="slidenum">
               <a:rPr lang="pl-PL" smtClean="0"/>
-              <a:t>28</a:t>
+              <a:t>27</a:t>
             </a:fld>
             <a:endParaRPr lang="pl-PL"/>
           </a:p>
@@ -3152,124 +3032,6 @@
     <p:extLst>
       <p:ext uri="{BB962C8B-B14F-4D97-AF65-F5344CB8AC3E}">
         <p14:creationId xmlns:p14="http://schemas.microsoft.com/office/powerpoint/2010/main" val="4209554517"/>
-      </p:ext>
-    </p:extLst>
-  </p:cSld>
-  <p:clrMapOvr>
-    <a:masterClrMapping/>
-  </p:clrMapOvr>
-</p:notes>
-</file>
-
-<file path=ppt/notesSlides/notesSlide29.xml><?xml version="1.0" encoding="utf-8"?>
-<p:notes xmlns:a="http://schemas.openxmlformats.org/drawingml/2006/main" xmlns:r="http://schemas.openxmlformats.org/officeDocument/2006/relationships" xmlns:p="http://schemas.openxmlformats.org/presentationml/2006/main">
-  <p:cSld>
-    <p:spTree>
-      <p:nvGrpSpPr>
-        <p:cNvPr id="1" name="">
-          <a:extLst>
-            <a:ext uri="{FF2B5EF4-FFF2-40B4-BE49-F238E27FC236}">
-              <a16:creationId xmlns:a16="http://schemas.microsoft.com/office/drawing/2014/main" id="{141188CF-6843-1797-3B28-82B8CAF84E50}"/>
-            </a:ext>
-          </a:extLst>
-        </p:cNvPr>
-        <p:cNvGrpSpPr/>
-        <p:nvPr/>
-      </p:nvGrpSpPr>
-      <p:grpSpPr>
-        <a:xfrm>
-          <a:off x="0" y="0"/>
-          <a:ext cx="0" cy="0"/>
-          <a:chOff x="0" y="0"/>
-          <a:chExt cx="0" cy="0"/>
-        </a:xfrm>
-      </p:grpSpPr>
-      <p:sp>
-        <p:nvSpPr>
-          <p:cNvPr id="2" name="Slide Image Placeholder 1">
-            <a:extLst>
-              <a:ext uri="{FF2B5EF4-FFF2-40B4-BE49-F238E27FC236}">
-                <a16:creationId xmlns:a16="http://schemas.microsoft.com/office/drawing/2014/main" id="{0EADBE34-8BAC-8044-28A7-B95E12FE42AE}"/>
-              </a:ext>
-            </a:extLst>
-          </p:cNvPr>
-          <p:cNvSpPr>
-            <a:spLocks noGrp="1" noRot="1" noChangeAspect="1"/>
-          </p:cNvSpPr>
-          <p:nvPr>
-            <p:ph type="sldImg"/>
-          </p:nvPr>
-        </p:nvSpPr>
-        <p:spPr/>
-        <p:txBody>
-          <a:bodyPr/>
-          <a:lstStyle/>
-          <a:p>
-            <a:endParaRPr lang="pl-PL"/>
-          </a:p>
-        </p:txBody>
-      </p:sp>
-      <p:sp>
-        <p:nvSpPr>
-          <p:cNvPr id="3" name="Notes Placeholder 2">
-            <a:extLst>
-              <a:ext uri="{FF2B5EF4-FFF2-40B4-BE49-F238E27FC236}">
-                <a16:creationId xmlns:a16="http://schemas.microsoft.com/office/drawing/2014/main" id="{777AF2C8-76A6-656C-5D3B-FDF1C3BBFF4F}"/>
-              </a:ext>
-            </a:extLst>
-          </p:cNvPr>
-          <p:cNvSpPr>
-            <a:spLocks noGrp="1"/>
-          </p:cNvSpPr>
-          <p:nvPr>
-            <p:ph type="body" idx="1"/>
-          </p:nvPr>
-        </p:nvSpPr>
-        <p:spPr/>
-        <p:txBody>
-          <a:bodyPr/>
-          <a:lstStyle/>
-          <a:p>
-            <a:pPr rtl="0"/>
-            <a:endParaRPr lang="pl-PL" dirty="0">
-              <a:effectLst/>
-            </a:endParaRPr>
-          </a:p>
-        </p:txBody>
-      </p:sp>
-      <p:sp>
-        <p:nvSpPr>
-          <p:cNvPr id="4" name="Slide Number Placeholder 3">
-            <a:extLst>
-              <a:ext uri="{FF2B5EF4-FFF2-40B4-BE49-F238E27FC236}">
-                <a16:creationId xmlns:a16="http://schemas.microsoft.com/office/drawing/2014/main" id="{DEBE62E2-E6CD-17CC-42FC-D993D75E22C9}"/>
-              </a:ext>
-            </a:extLst>
-          </p:cNvPr>
-          <p:cNvSpPr>
-            <a:spLocks noGrp="1"/>
-          </p:cNvSpPr>
-          <p:nvPr>
-            <p:ph type="sldNum" sz="quarter" idx="10"/>
-          </p:nvPr>
-        </p:nvSpPr>
-        <p:spPr/>
-        <p:txBody>
-          <a:bodyPr/>
-          <a:lstStyle/>
-          <a:p>
-            <a:fld id="{79CE77F9-1A7F-B148-A0AA-5828300D10BC}" type="slidenum">
-              <a:rPr lang="pl-PL" smtClean="0"/>
-              <a:t>29</a:t>
-            </a:fld>
-            <a:endParaRPr lang="pl-PL"/>
-          </a:p>
-        </p:txBody>
-      </p:sp>
-    </p:spTree>
-    <p:extLst>
-      <p:ext uri="{BB962C8B-B14F-4D97-AF65-F5344CB8AC3E}">
-        <p14:creationId xmlns:p14="http://schemas.microsoft.com/office/powerpoint/2010/main" val="2270337191"/>
       </p:ext>
     </p:extLst>
   </p:cSld>
@@ -4071,7 +3833,7 @@
     </p:spTree>
     <p:extLst>
       <p:ext uri="{BB962C8B-B14F-4D97-AF65-F5344CB8AC3E}">
-        <p14:creationId xmlns:p14="http://schemas.microsoft.com/office/powerpoint/2010/main" val="2360142142"/>
+        <p14:creationId xmlns:p14="http://schemas.microsoft.com/office/powerpoint/2010/main" val="3934046284"/>
       </p:ext>
     </p:extLst>
   </p:cSld>
@@ -4260,7 +4022,7 @@
           <a:p>
             <a:fld id="{91017B01-0C30-B241-B19F-621BE4770608}" type="datetimeFigureOut">
               <a:rPr lang="pl-PL" smtClean="0"/>
-              <a:t>1.10.2026</a:t>
+              <a:t>6.10.2026</a:t>
             </a:fld>
             <a:endParaRPr lang="pl-PL"/>
           </a:p>
@@ -4429,7 +4191,7 @@
           <a:p>
             <a:fld id="{91017B01-0C30-B241-B19F-621BE4770608}" type="datetimeFigureOut">
               <a:rPr lang="pl-PL" smtClean="0"/>
-              <a:t>1.10.2026</a:t>
+              <a:t>6.10.2026</a:t>
             </a:fld>
             <a:endParaRPr lang="pl-PL"/>
           </a:p>
@@ -4608,7 +4370,7 @@
           <a:p>
             <a:fld id="{91017B01-0C30-B241-B19F-621BE4770608}" type="datetimeFigureOut">
               <a:rPr lang="pl-PL" smtClean="0"/>
-              <a:t>1.10.2026</a:t>
+              <a:t>6.10.2026</a:t>
             </a:fld>
             <a:endParaRPr lang="pl-PL"/>
           </a:p>
@@ -4777,7 +4539,7 @@
           <a:p>
             <a:fld id="{91017B01-0C30-B241-B19F-621BE4770608}" type="datetimeFigureOut">
               <a:rPr lang="pl-PL" smtClean="0"/>
-              <a:t>1.10.2026</a:t>
+              <a:t>6.10.2026</a:t>
             </a:fld>
             <a:endParaRPr lang="pl-PL"/>
           </a:p>
@@ -5023,7 +4785,7 @@
           <a:p>
             <a:fld id="{91017B01-0C30-B241-B19F-621BE4770608}" type="datetimeFigureOut">
               <a:rPr lang="pl-PL" smtClean="0"/>
-              <a:t>1.10.2026</a:t>
+              <a:t>6.10.2026</a:t>
             </a:fld>
             <a:endParaRPr lang="pl-PL"/>
           </a:p>
@@ -5309,7 +5071,7 @@
           <a:p>
             <a:fld id="{91017B01-0C30-B241-B19F-621BE4770608}" type="datetimeFigureOut">
               <a:rPr lang="pl-PL" smtClean="0"/>
-              <a:t>1.10.2026</a:t>
+              <a:t>6.10.2026</a:t>
             </a:fld>
             <a:endParaRPr lang="pl-PL"/>
           </a:p>
@@ -5729,7 +5491,7 @@
           <a:p>
             <a:fld id="{91017B01-0C30-B241-B19F-621BE4770608}" type="datetimeFigureOut">
               <a:rPr lang="pl-PL" smtClean="0"/>
-              <a:t>1.10.2026</a:t>
+              <a:t>6.10.2026</a:t>
             </a:fld>
             <a:endParaRPr lang="pl-PL"/>
           </a:p>
@@ -5847,7 +5609,7 @@
           <a:p>
             <a:fld id="{91017B01-0C30-B241-B19F-621BE4770608}" type="datetimeFigureOut">
               <a:rPr lang="pl-PL" smtClean="0"/>
-              <a:t>1.10.2026</a:t>
+              <a:t>6.10.2026</a:t>
             </a:fld>
             <a:endParaRPr lang="pl-PL"/>
           </a:p>
@@ -5943,7 +5705,7 @@
           <a:p>
             <a:fld id="{91017B01-0C30-B241-B19F-621BE4770608}" type="datetimeFigureOut">
               <a:rPr lang="pl-PL" smtClean="0"/>
-              <a:t>1.10.2026</a:t>
+              <a:t>6.10.2026</a:t>
             </a:fld>
             <a:endParaRPr lang="pl-PL"/>
           </a:p>
@@ -6220,7 +5982,7 @@
           <a:p>
             <a:fld id="{91017B01-0C30-B241-B19F-621BE4770608}" type="datetimeFigureOut">
               <a:rPr lang="pl-PL" smtClean="0"/>
-              <a:t>1.10.2026</a:t>
+              <a:t>6.10.2026</a:t>
             </a:fld>
             <a:endParaRPr lang="pl-PL"/>
           </a:p>
@@ -6476,7 +6238,7 @@
           <a:p>
             <a:fld id="{91017B01-0C30-B241-B19F-621BE4770608}" type="datetimeFigureOut">
               <a:rPr lang="pl-PL" smtClean="0"/>
-              <a:t>1.10.2026</a:t>
+              <a:t>6.10.2026</a:t>
             </a:fld>
             <a:endParaRPr lang="pl-PL"/>
           </a:p>
@@ -6688,7 +6450,7 @@
           <a:p>
             <a:fld id="{91017B01-0C30-B241-B19F-621BE4770608}" type="datetimeFigureOut">
               <a:rPr lang="pl-PL" smtClean="0"/>
-              <a:t>1.10.2026</a:t>
+              <a:t>6.10.2026</a:t>
             </a:fld>
             <a:endParaRPr lang="pl-PL"/>
           </a:p>
@@ -7319,1039 +7081,6 @@
         <p:cNvPr id="1" name="">
           <a:extLst>
             <a:ext uri="{FF2B5EF4-FFF2-40B4-BE49-F238E27FC236}">
-              <a16:creationId xmlns:a16="http://schemas.microsoft.com/office/drawing/2014/main" id="{ADE21A44-2F60-F90A-4EDA-A35BB7658576}"/>
-            </a:ext>
-          </a:extLst>
-        </p:cNvPr>
-        <p:cNvGrpSpPr/>
-        <p:nvPr/>
-      </p:nvGrpSpPr>
-      <p:grpSpPr>
-        <a:xfrm>
-          <a:off x="0" y="0"/>
-          <a:ext cx="0" cy="0"/>
-          <a:chOff x="0" y="0"/>
-          <a:chExt cx="0" cy="0"/>
-        </a:xfrm>
-      </p:grpSpPr>
-      <p:sp>
-        <p:nvSpPr>
-          <p:cNvPr id="2" name="Rectangle 1">
-            <a:extLst>
-              <a:ext uri="{FF2B5EF4-FFF2-40B4-BE49-F238E27FC236}">
-                <a16:creationId xmlns:a16="http://schemas.microsoft.com/office/drawing/2014/main" id="{72FB61E2-0DDB-26CF-FF34-838293DE79BC}"/>
-              </a:ext>
-            </a:extLst>
-          </p:cNvPr>
-          <p:cNvSpPr/>
-          <p:nvPr/>
-        </p:nvSpPr>
-        <p:spPr>
-          <a:xfrm>
-            <a:off x="1979712" y="188640"/>
-            <a:ext cx="6696744" cy="492443"/>
-          </a:xfrm>
-          <a:prstGeom prst="rect">
-            <a:avLst/>
-          </a:prstGeom>
-        </p:spPr>
-        <p:txBody>
-          <a:bodyPr wrap="square">
-            <a:spAutoFit/>
-          </a:bodyPr>
-          <a:lstStyle/>
-          <a:p>
-            <a:pPr algn="ctr"/>
-            <a:r>
-              <a:rPr lang="pl-PL" sz="2600" dirty="0">
-                <a:solidFill>
-                  <a:schemeClr val="bg1"/>
-                </a:solidFill>
-                <a:latin typeface="Verdana" panose="020B0604030504040204" pitchFamily="34" charset="0"/>
-                <a:ea typeface="Verdana" panose="020B0604030504040204" pitchFamily="34" charset="0"/>
-                <a:cs typeface="Verdana" panose="020B0604030504040204" pitchFamily="34" charset="0"/>
-              </a:rPr>
-              <a:t>Konfiguracja Projektu</a:t>
-            </a:r>
-          </a:p>
-        </p:txBody>
-      </p:sp>
-      <p:sp>
-        <p:nvSpPr>
-          <p:cNvPr id="5" name="Android Studio: Empty Activity&#10;Projekt Kotlin z ">
-            <a:extLst>
-              <a:ext uri="{FF2B5EF4-FFF2-40B4-BE49-F238E27FC236}">
-                <a16:creationId xmlns:a16="http://schemas.microsoft.com/office/drawing/2014/main" id="{B137BD04-70B9-C23D-8936-C4AD7A9C5424}"/>
-              </a:ext>
-            </a:extLst>
-          </p:cNvPr>
-          <p:cNvSpPr>
-            <a:spLocks noGrp="1"/>
-          </p:cNvSpPr>
-          <p:nvPr/>
-        </p:nvSpPr>
-        <p:spPr>
-          <a:xfrm>
-            <a:off x="1333500" y="1171575"/>
-            <a:ext cx="7381875" cy="704850"/>
-          </a:xfrm>
-          <a:prstGeom prst="rect">
-            <a:avLst/>
-          </a:prstGeom>
-          <a:noFill/>
-          <a:ln w="0">
-            <a:noFill/>
-          </a:ln>
-        </p:spPr>
-        <p:txBody>
-          <a:bodyPr wrap="square" lIns="0" tIns="0" rIns="0" bIns="0" anchor="t">
-            <a:noAutofit/>
-          </a:bodyPr>
-          <a:lstStyle/>
-          <a:p>
-            <a:pPr algn="l">
-              <a:spcBef>
-                <a:spcPts val="0"/>
-              </a:spcBef>
-              <a:spcAft>
-                <a:spcPts val="0"/>
-              </a:spcAft>
-              <a:defRPr sz="2100" b="0">
-                <a:solidFill>
-                  <a:srgbClr val="152B37"/>
-                </a:solidFill>
-                <a:latin typeface="Calibri"/>
-                <a:ea typeface="Calibri"/>
-                <a:cs typeface="Calibri"/>
-              </a:defRPr>
-            </a:pPr>
-            <a:r>
-              <a:rPr sz="2400" b="0" dirty="0">
-                <a:solidFill>
-                  <a:srgbClr val="152B37"/>
-                </a:solidFill>
-                <a:latin typeface="Calibri"/>
-                <a:ea typeface="Calibri"/>
-                <a:cs typeface="Calibri"/>
-              </a:rPr>
-              <a:t>Android Studio: Empty Activity</a:t>
-            </a:r>
-          </a:p>
-          <a:p>
-            <a:pPr algn="l">
-              <a:spcBef>
-                <a:spcPts val="0"/>
-              </a:spcBef>
-              <a:spcAft>
-                <a:spcPts val="0"/>
-              </a:spcAft>
-              <a:defRPr sz="2100" b="0">
-                <a:solidFill>
-                  <a:srgbClr val="152B37"/>
-                </a:solidFill>
-                <a:latin typeface="Calibri"/>
-                <a:ea typeface="Calibri"/>
-                <a:cs typeface="Calibri"/>
-              </a:defRPr>
-            </a:pPr>
-            <a:r>
-              <a:rPr sz="2400" b="0" dirty="0">
-                <a:solidFill>
-                  <a:srgbClr val="152B37"/>
-                </a:solidFill>
-                <a:latin typeface="Calibri"/>
-                <a:ea typeface="Calibri"/>
-                <a:cs typeface="Calibri"/>
-              </a:rPr>
-              <a:t>Projekt Kotlin z </a:t>
-            </a:r>
-            <a:r>
-              <a:rPr sz="2400" b="0" dirty="0" err="1">
-                <a:solidFill>
-                  <a:srgbClr val="152B37"/>
-                </a:solidFill>
-                <a:latin typeface="Calibri"/>
-                <a:ea typeface="Calibri"/>
-                <a:cs typeface="Calibri"/>
-              </a:rPr>
-              <a:t>interfejsem</a:t>
-            </a:r>
-            <a:r>
-              <a:rPr sz="2400" b="0" dirty="0">
-                <a:solidFill>
-                  <a:srgbClr val="152B37"/>
-                </a:solidFill>
-                <a:latin typeface="Calibri"/>
-                <a:ea typeface="Calibri"/>
-                <a:cs typeface="Calibri"/>
-              </a:rPr>
-              <a:t> Jetpack Compose</a:t>
-            </a:r>
-          </a:p>
-        </p:txBody>
-      </p:sp>
-      <p:graphicFrame>
-        <p:nvGraphicFramePr>
-          <p:cNvPr id="7" name="Tabela 6">
-            <a:extLst>
-              <a:ext uri="{FF2B5EF4-FFF2-40B4-BE49-F238E27FC236}">
-                <a16:creationId xmlns:a16="http://schemas.microsoft.com/office/drawing/2014/main" id="{85BFF9E0-2E1A-12BD-A901-83B68005EA0C}"/>
-              </a:ext>
-            </a:extLst>
-          </p:cNvPr>
-          <p:cNvGraphicFramePr/>
-          <p:nvPr>
-            <p:extLst>
-              <p:ext uri="{D42A27DB-BD31-4B8C-83A1-F6EECF244321}">
-                <p14:modId xmlns:p14="http://schemas.microsoft.com/office/powerpoint/2010/main" val="2981709760"/>
-              </p:ext>
-            </p:extLst>
-          </p:nvPr>
-        </p:nvGraphicFramePr>
-        <p:xfrm>
-          <a:off x="1333500" y="2324100"/>
-          <a:ext cx="7381875" cy="2952752"/>
-        </p:xfrm>
-        <a:graphic>
-          <a:graphicData uri="http://schemas.openxmlformats.org/drawingml/2006/table">
-            <a:tbl>
-              <a:tblPr/>
-              <a:tblGrid>
-                <a:gridCol w="3333750">
-                  <a:extLst>
-                    <a:ext uri="{9D8B030D-6E8A-4147-A177-3AD203B41FA5}">
-                      <a16:colId xmlns:a16="http://schemas.microsoft.com/office/drawing/2014/main" val="20000"/>
-                    </a:ext>
-                  </a:extLst>
-                </a:gridCol>
-                <a:gridCol w="4048125">
-                  <a:extLst>
-                    <a:ext uri="{9D8B030D-6E8A-4147-A177-3AD203B41FA5}">
-                      <a16:colId xmlns:a16="http://schemas.microsoft.com/office/drawing/2014/main" val="20001"/>
-                    </a:ext>
-                  </a:extLst>
-                </a:gridCol>
-              </a:tblGrid>
-              <a:tr h="738188">
-                <a:tc>
-                  <a:txBody>
-                    <a:bodyPr/>
-                    <a:lstStyle/>
-                    <a:p>
-                      <a:pPr algn="ctr"/>
-                      <a:r>
-                        <a:rPr sz="2800" b="1" dirty="0">
-                          <a:solidFill>
-                            <a:srgbClr val="FFFFFF"/>
-                          </a:solidFill>
-                          <a:latin typeface="Calibri"/>
-                          <a:ea typeface="Calibri"/>
-                          <a:cs typeface="Calibri"/>
-                        </a:rPr>
-                        <a:t>Plik</a:t>
-                      </a:r>
-                    </a:p>
-                  </a:txBody>
-                  <a:tcPr anchor="ctr">
-                    <a:solidFill>
-                      <a:srgbClr val="005F88"/>
-                    </a:solidFill>
-                  </a:tcPr>
-                </a:tc>
-                <a:tc>
-                  <a:txBody>
-                    <a:bodyPr/>
-                    <a:lstStyle/>
-                    <a:p>
-                      <a:pPr algn="ctr"/>
-                      <a:r>
-                        <a:rPr sz="2800" b="1" dirty="0">
-                          <a:solidFill>
-                            <a:srgbClr val="FFFFFF"/>
-                          </a:solidFill>
-                          <a:latin typeface="Calibri"/>
-                          <a:ea typeface="Calibri"/>
-                          <a:cs typeface="Calibri"/>
-                        </a:rPr>
-                        <a:t>Rola</a:t>
-                      </a:r>
-                    </a:p>
-                  </a:txBody>
-                  <a:tcPr anchor="ctr">
-                    <a:solidFill>
-                      <a:srgbClr val="005F88"/>
-                    </a:solidFill>
-                  </a:tcPr>
-                </a:tc>
-                <a:extLst>
-                  <a:ext uri="{0D108BD9-81ED-4DB2-BD59-A6C34878D82A}">
-                    <a16:rowId xmlns:a16="http://schemas.microsoft.com/office/drawing/2014/main" val="10000"/>
-                  </a:ext>
-                </a:extLst>
-              </a:tr>
-              <a:tr h="738188">
-                <a:tc>
-                  <a:txBody>
-                    <a:bodyPr/>
-                    <a:lstStyle/>
-                    <a:p>
-                      <a:r>
-                        <a:rPr sz="2000" b="0" dirty="0" err="1">
-                          <a:solidFill>
-                            <a:srgbClr val="152B37"/>
-                          </a:solidFill>
-                          <a:latin typeface="Calibri"/>
-                          <a:ea typeface="Calibri"/>
-                          <a:cs typeface="Calibri"/>
-                        </a:rPr>
-                        <a:t>gradle</a:t>
-                      </a:r>
-                      <a:r>
-                        <a:rPr sz="2000" b="0" dirty="0">
-                          <a:solidFill>
-                            <a:srgbClr val="152B37"/>
-                          </a:solidFill>
-                          <a:latin typeface="Calibri"/>
-                          <a:ea typeface="Calibri"/>
-                          <a:cs typeface="Calibri"/>
-                        </a:rPr>
-                        <a:t>/</a:t>
-                      </a:r>
-                      <a:r>
-                        <a:rPr sz="2000" b="0" dirty="0" err="1">
-                          <a:solidFill>
-                            <a:srgbClr val="152B37"/>
-                          </a:solidFill>
-                          <a:latin typeface="Calibri"/>
-                          <a:ea typeface="Calibri"/>
-                          <a:cs typeface="Calibri"/>
-                        </a:rPr>
-                        <a:t>libs.versions.toml</a:t>
-                      </a:r>
-                      <a:endParaRPr sz="2000" b="0" dirty="0">
-                        <a:solidFill>
-                          <a:srgbClr val="152B37"/>
-                        </a:solidFill>
-                        <a:latin typeface="Calibri"/>
-                        <a:ea typeface="Calibri"/>
-                        <a:cs typeface="Calibri"/>
-                      </a:endParaRPr>
-                    </a:p>
-                  </a:txBody>
-                  <a:tcPr anchor="ctr">
-                    <a:solidFill>
-                      <a:srgbClr val="FFFFFF"/>
-                    </a:solidFill>
-                  </a:tcPr>
-                </a:tc>
-                <a:tc>
-                  <a:txBody>
-                    <a:bodyPr/>
-                    <a:lstStyle/>
-                    <a:p>
-                      <a:r>
-                        <a:rPr sz="2000" b="0" dirty="0" err="1">
-                          <a:solidFill>
-                            <a:srgbClr val="152B37"/>
-                          </a:solidFill>
-                          <a:latin typeface="Calibri"/>
-                          <a:ea typeface="Calibri"/>
-                          <a:cs typeface="Calibri"/>
-                        </a:rPr>
-                        <a:t>Wersje</a:t>
-                      </a:r>
-                      <a:r>
-                        <a:rPr sz="2000" b="0" dirty="0">
-                          <a:solidFill>
-                            <a:srgbClr val="152B37"/>
-                          </a:solidFill>
-                          <a:latin typeface="Calibri"/>
-                          <a:ea typeface="Calibri"/>
-                          <a:cs typeface="Calibri"/>
-                        </a:rPr>
-                        <a:t> </a:t>
-                      </a:r>
-                      <a:r>
-                        <a:rPr sz="2000" b="0" dirty="0" err="1">
-                          <a:solidFill>
-                            <a:srgbClr val="152B37"/>
-                          </a:solidFill>
-                          <a:latin typeface="Calibri"/>
-                          <a:ea typeface="Calibri"/>
-                          <a:cs typeface="Calibri"/>
-                        </a:rPr>
-                        <a:t>i</a:t>
-                      </a:r>
-                      <a:r>
-                        <a:rPr sz="2000" b="0" dirty="0">
-                          <a:solidFill>
-                            <a:srgbClr val="152B37"/>
-                          </a:solidFill>
-                          <a:latin typeface="Calibri"/>
-                          <a:ea typeface="Calibri"/>
-                          <a:cs typeface="Calibri"/>
-                        </a:rPr>
-                        <a:t> </a:t>
-                      </a:r>
-                      <a:r>
-                        <a:rPr sz="2000" b="0" dirty="0" err="1">
-                          <a:solidFill>
-                            <a:srgbClr val="152B37"/>
-                          </a:solidFill>
-                          <a:latin typeface="Calibri"/>
-                          <a:ea typeface="Calibri"/>
-                          <a:cs typeface="Calibri"/>
-                        </a:rPr>
-                        <a:t>aliasy</a:t>
-                      </a:r>
-                      <a:r>
-                        <a:rPr sz="2000" b="0" dirty="0">
-                          <a:solidFill>
-                            <a:srgbClr val="152B37"/>
-                          </a:solidFill>
-                          <a:latin typeface="Calibri"/>
-                          <a:ea typeface="Calibri"/>
-                          <a:cs typeface="Calibri"/>
-                        </a:rPr>
-                        <a:t> </a:t>
-                      </a:r>
-                      <a:r>
-                        <a:rPr sz="2000" b="0" dirty="0" err="1">
-                          <a:solidFill>
-                            <a:srgbClr val="152B37"/>
-                          </a:solidFill>
-                          <a:latin typeface="Calibri"/>
-                          <a:ea typeface="Calibri"/>
-                          <a:cs typeface="Calibri"/>
-                        </a:rPr>
-                        <a:t>bibliotek</a:t>
-                      </a:r>
-                      <a:r>
-                        <a:rPr sz="2000" b="0" dirty="0">
-                          <a:solidFill>
-                            <a:srgbClr val="152B37"/>
-                          </a:solidFill>
-                          <a:latin typeface="Calibri"/>
-                          <a:ea typeface="Calibri"/>
-                          <a:cs typeface="Calibri"/>
-                        </a:rPr>
-                        <a:t> </a:t>
-                      </a:r>
-                      <a:r>
-                        <a:rPr sz="2000" b="0" dirty="0" err="1">
-                          <a:solidFill>
-                            <a:srgbClr val="152B37"/>
-                          </a:solidFill>
-                          <a:latin typeface="Calibri"/>
-                          <a:ea typeface="Calibri"/>
-                          <a:cs typeface="Calibri"/>
-                        </a:rPr>
-                        <a:t>oraz</a:t>
-                      </a:r>
-                      <a:r>
-                        <a:rPr sz="2000" b="0" dirty="0">
-                          <a:solidFill>
-                            <a:srgbClr val="152B37"/>
-                          </a:solidFill>
-                          <a:latin typeface="Calibri"/>
-                          <a:ea typeface="Calibri"/>
-                          <a:cs typeface="Calibri"/>
-                        </a:rPr>
-                        <a:t> </a:t>
-                      </a:r>
-                      <a:r>
-                        <a:rPr sz="2000" b="0" dirty="0" err="1">
-                          <a:solidFill>
-                            <a:srgbClr val="152B37"/>
-                          </a:solidFill>
-                          <a:latin typeface="Calibri"/>
-                          <a:ea typeface="Calibri"/>
-                          <a:cs typeface="Calibri"/>
-                        </a:rPr>
-                        <a:t>pluginów</a:t>
-                      </a:r>
-                      <a:endParaRPr sz="2000" b="0" dirty="0">
-                        <a:solidFill>
-                          <a:srgbClr val="152B37"/>
-                        </a:solidFill>
-                        <a:latin typeface="Calibri"/>
-                        <a:ea typeface="Calibri"/>
-                        <a:cs typeface="Calibri"/>
-                      </a:endParaRPr>
-                    </a:p>
-                  </a:txBody>
-                  <a:tcPr anchor="ctr">
-                    <a:solidFill>
-                      <a:srgbClr val="FFFFFF"/>
-                    </a:solidFill>
-                  </a:tcPr>
-                </a:tc>
-                <a:extLst>
-                  <a:ext uri="{0D108BD9-81ED-4DB2-BD59-A6C34878D82A}">
-                    <a16:rowId xmlns:a16="http://schemas.microsoft.com/office/drawing/2014/main" val="10001"/>
-                  </a:ext>
-                </a:extLst>
-              </a:tr>
-              <a:tr h="738188">
-                <a:tc>
-                  <a:txBody>
-                    <a:bodyPr/>
-                    <a:lstStyle/>
-                    <a:p>
-                      <a:r>
-                        <a:rPr sz="2000" b="0" dirty="0" err="1">
-                          <a:solidFill>
-                            <a:srgbClr val="152B37"/>
-                          </a:solidFill>
-                          <a:latin typeface="Calibri"/>
-                          <a:ea typeface="Calibri"/>
-                          <a:cs typeface="Calibri"/>
-                        </a:rPr>
-                        <a:t>build.gradle.kts</a:t>
-                      </a:r>
-                      <a:endParaRPr sz="2000" b="0" dirty="0">
-                        <a:solidFill>
-                          <a:srgbClr val="152B37"/>
-                        </a:solidFill>
-                        <a:latin typeface="Calibri"/>
-                        <a:ea typeface="Calibri"/>
-                        <a:cs typeface="Calibri"/>
-                      </a:endParaRPr>
-                    </a:p>
-                  </a:txBody>
-                  <a:tcPr anchor="ctr">
-                    <a:solidFill>
-                      <a:srgbClr val="EEF4F7"/>
-                    </a:solidFill>
-                  </a:tcPr>
-                </a:tc>
-                <a:tc>
-                  <a:txBody>
-                    <a:bodyPr/>
-                    <a:lstStyle/>
-                    <a:p>
-                      <a:r>
-                        <a:rPr sz="2000" b="0" dirty="0" err="1">
-                          <a:solidFill>
-                            <a:srgbClr val="152B37"/>
-                          </a:solidFill>
-                          <a:latin typeface="Calibri"/>
-                          <a:ea typeface="Calibri"/>
-                          <a:cs typeface="Calibri"/>
-                        </a:rPr>
-                        <a:t>Deklaracje</a:t>
-                      </a:r>
-                      <a:r>
-                        <a:rPr sz="2000" b="0" dirty="0">
-                          <a:solidFill>
-                            <a:srgbClr val="152B37"/>
-                          </a:solidFill>
-                          <a:latin typeface="Calibri"/>
-                          <a:ea typeface="Calibri"/>
-                          <a:cs typeface="Calibri"/>
-                        </a:rPr>
-                        <a:t> </a:t>
-                      </a:r>
-                      <a:r>
-                        <a:rPr sz="2000" b="0" dirty="0" err="1">
-                          <a:solidFill>
-                            <a:srgbClr val="152B37"/>
-                          </a:solidFill>
-                          <a:latin typeface="Calibri"/>
-                          <a:ea typeface="Calibri"/>
-                          <a:cs typeface="Calibri"/>
-                        </a:rPr>
-                        <a:t>pluginów</a:t>
-                      </a:r>
-                      <a:r>
-                        <a:rPr sz="2000" b="0" dirty="0">
-                          <a:solidFill>
-                            <a:srgbClr val="152B37"/>
-                          </a:solidFill>
-                          <a:latin typeface="Calibri"/>
-                          <a:ea typeface="Calibri"/>
-                          <a:cs typeface="Calibri"/>
-                        </a:rPr>
-                        <a:t> </a:t>
-                      </a:r>
-                      <a:r>
-                        <a:rPr sz="2000" b="0" dirty="0" err="1">
-                          <a:solidFill>
-                            <a:srgbClr val="152B37"/>
-                          </a:solidFill>
-                          <a:latin typeface="Calibri"/>
-                          <a:ea typeface="Calibri"/>
-                          <a:cs typeface="Calibri"/>
-                        </a:rPr>
-                        <a:t>projektu</a:t>
-                      </a:r>
-                      <a:endParaRPr sz="2000" b="0" dirty="0">
-                        <a:solidFill>
-                          <a:srgbClr val="152B37"/>
-                        </a:solidFill>
-                        <a:latin typeface="Calibri"/>
-                        <a:ea typeface="Calibri"/>
-                        <a:cs typeface="Calibri"/>
-                      </a:endParaRPr>
-                    </a:p>
-                  </a:txBody>
-                  <a:tcPr anchor="ctr">
-                    <a:solidFill>
-                      <a:srgbClr val="EEF4F7"/>
-                    </a:solidFill>
-                  </a:tcPr>
-                </a:tc>
-                <a:extLst>
-                  <a:ext uri="{0D108BD9-81ED-4DB2-BD59-A6C34878D82A}">
-                    <a16:rowId xmlns:a16="http://schemas.microsoft.com/office/drawing/2014/main" val="10002"/>
-                  </a:ext>
-                </a:extLst>
-              </a:tr>
-              <a:tr h="738188">
-                <a:tc>
-                  <a:txBody>
-                    <a:bodyPr/>
-                    <a:lstStyle/>
-                    <a:p>
-                      <a:r>
-                        <a:rPr sz="2000" b="0" dirty="0">
-                          <a:solidFill>
-                            <a:srgbClr val="152B37"/>
-                          </a:solidFill>
-                          <a:latin typeface="Calibri"/>
-                          <a:ea typeface="Calibri"/>
-                          <a:cs typeface="Calibri"/>
-                        </a:rPr>
-                        <a:t>app/</a:t>
-                      </a:r>
-                      <a:r>
-                        <a:rPr sz="2000" b="0" dirty="0" err="1">
-                          <a:solidFill>
-                            <a:srgbClr val="152B37"/>
-                          </a:solidFill>
-                          <a:latin typeface="Calibri"/>
-                          <a:ea typeface="Calibri"/>
-                          <a:cs typeface="Calibri"/>
-                        </a:rPr>
-                        <a:t>build.gradle.kts</a:t>
-                      </a:r>
-                      <a:endParaRPr sz="2000" b="0" dirty="0">
-                        <a:solidFill>
-                          <a:srgbClr val="152B37"/>
-                        </a:solidFill>
-                        <a:latin typeface="Calibri"/>
-                        <a:ea typeface="Calibri"/>
-                        <a:cs typeface="Calibri"/>
-                      </a:endParaRPr>
-                    </a:p>
-                  </a:txBody>
-                  <a:tcPr anchor="ctr">
-                    <a:solidFill>
-                      <a:srgbClr val="FFFFFF"/>
-                    </a:solidFill>
-                  </a:tcPr>
-                </a:tc>
-                <a:tc>
-                  <a:txBody>
-                    <a:bodyPr/>
-                    <a:lstStyle/>
-                    <a:p>
-                      <a:r>
-                        <a:rPr sz="2000" b="0" dirty="0" err="1">
-                          <a:solidFill>
-                            <a:srgbClr val="152B37"/>
-                          </a:solidFill>
-                          <a:latin typeface="Calibri"/>
-                          <a:ea typeface="Calibri"/>
-                          <a:cs typeface="Calibri"/>
-                        </a:rPr>
-                        <a:t>Pluginy</a:t>
-                      </a:r>
-                      <a:r>
-                        <a:rPr sz="2000" b="0" dirty="0">
-                          <a:solidFill>
-                            <a:srgbClr val="152B37"/>
-                          </a:solidFill>
-                          <a:latin typeface="Calibri"/>
-                          <a:ea typeface="Calibri"/>
-                          <a:cs typeface="Calibri"/>
-                        </a:rPr>
-                        <a:t> </a:t>
-                      </a:r>
-                      <a:r>
-                        <a:rPr sz="2000" b="0" dirty="0" err="1">
-                          <a:solidFill>
-                            <a:srgbClr val="152B37"/>
-                          </a:solidFill>
-                          <a:latin typeface="Calibri"/>
-                          <a:ea typeface="Calibri"/>
-                          <a:cs typeface="Calibri"/>
-                        </a:rPr>
-                        <a:t>i</a:t>
-                      </a:r>
-                      <a:r>
-                        <a:rPr sz="2000" b="0" dirty="0">
-                          <a:solidFill>
-                            <a:srgbClr val="152B37"/>
-                          </a:solidFill>
-                          <a:latin typeface="Calibri"/>
-                          <a:ea typeface="Calibri"/>
-                          <a:cs typeface="Calibri"/>
-                        </a:rPr>
-                        <a:t> </a:t>
-                      </a:r>
-                      <a:r>
-                        <a:rPr sz="2000" b="0" dirty="0" err="1">
-                          <a:solidFill>
-                            <a:srgbClr val="152B37"/>
-                          </a:solidFill>
-                          <a:latin typeface="Calibri"/>
-                          <a:ea typeface="Calibri"/>
-                          <a:cs typeface="Calibri"/>
-                        </a:rPr>
-                        <a:t>zależności</a:t>
-                      </a:r>
-                      <a:r>
-                        <a:rPr sz="2000" b="0" dirty="0">
-                          <a:solidFill>
-                            <a:srgbClr val="152B37"/>
-                          </a:solidFill>
-                          <a:latin typeface="Calibri"/>
-                          <a:ea typeface="Calibri"/>
-                          <a:cs typeface="Calibri"/>
-                        </a:rPr>
-                        <a:t> </a:t>
-                      </a:r>
-                      <a:r>
-                        <a:rPr sz="2000" b="0" dirty="0" err="1">
-                          <a:solidFill>
-                            <a:srgbClr val="152B37"/>
-                          </a:solidFill>
-                          <a:latin typeface="Calibri"/>
-                          <a:ea typeface="Calibri"/>
-                          <a:cs typeface="Calibri"/>
-                        </a:rPr>
-                        <a:t>modułu</a:t>
-                      </a:r>
-                      <a:r>
-                        <a:rPr sz="2000" b="0" dirty="0">
-                          <a:solidFill>
-                            <a:srgbClr val="152B37"/>
-                          </a:solidFill>
-                          <a:latin typeface="Calibri"/>
-                          <a:ea typeface="Calibri"/>
-                          <a:cs typeface="Calibri"/>
-                        </a:rPr>
-                        <a:t> app</a:t>
-                      </a:r>
-                    </a:p>
-                  </a:txBody>
-                  <a:tcPr anchor="ctr">
-                    <a:solidFill>
-                      <a:srgbClr val="FFFFFF"/>
-                    </a:solidFill>
-                  </a:tcPr>
-                </a:tc>
-                <a:extLst>
-                  <a:ext uri="{0D108BD9-81ED-4DB2-BD59-A6C34878D82A}">
-                    <a16:rowId xmlns:a16="http://schemas.microsoft.com/office/drawing/2014/main" val="10003"/>
-                  </a:ext>
-                </a:extLst>
-              </a:tr>
-            </a:tbl>
-          </a:graphicData>
-        </a:graphic>
-      </p:graphicFrame>
-      <p:sp>
-        <p:nvSpPr>
-          <p:cNvPr id="10" name="Dopisuj wpisy do istniejących sekcji.&#10;Po zmianac">
-            <a:extLst>
-              <a:ext uri="{FF2B5EF4-FFF2-40B4-BE49-F238E27FC236}">
-                <a16:creationId xmlns:a16="http://schemas.microsoft.com/office/drawing/2014/main" id="{7144A50C-184A-6ECF-5723-D6B97372AF21}"/>
-              </a:ext>
-            </a:extLst>
-          </p:cNvPr>
-          <p:cNvSpPr>
-            <a:spLocks noGrp="1"/>
-          </p:cNvSpPr>
-          <p:nvPr/>
-        </p:nvSpPr>
-        <p:spPr>
-          <a:xfrm>
-            <a:off x="1333500" y="5886450"/>
-            <a:ext cx="7381875" cy="619125"/>
-          </a:xfrm>
-          <a:prstGeom prst="rect">
-            <a:avLst/>
-          </a:prstGeom>
-          <a:noFill/>
-          <a:ln w="0">
-            <a:noFill/>
-          </a:ln>
-        </p:spPr>
-        <p:txBody>
-          <a:bodyPr wrap="square" lIns="0" tIns="0" rIns="0" bIns="0" anchor="t">
-            <a:noAutofit/>
-          </a:bodyPr>
-          <a:lstStyle/>
-          <a:p>
-            <a:pPr algn="l">
-              <a:spcBef>
-                <a:spcPts val="0"/>
-              </a:spcBef>
-              <a:spcAft>
-                <a:spcPts val="0"/>
-              </a:spcAft>
-              <a:defRPr sz="1725" b="0">
-                <a:solidFill>
-                  <a:srgbClr val="455661"/>
-                </a:solidFill>
-                <a:latin typeface="Calibri"/>
-                <a:ea typeface="Calibri"/>
-                <a:cs typeface="Calibri"/>
-              </a:defRPr>
-            </a:pPr>
-            <a:r>
-              <a:rPr sz="2000" b="0" dirty="0" err="1">
-                <a:solidFill>
-                  <a:srgbClr val="455661"/>
-                </a:solidFill>
-                <a:latin typeface="Calibri"/>
-                <a:ea typeface="Calibri"/>
-                <a:cs typeface="Calibri"/>
-              </a:rPr>
-              <a:t>Dopisuj</a:t>
-            </a:r>
-            <a:r>
-              <a:rPr sz="2000" b="0" dirty="0">
-                <a:solidFill>
-                  <a:srgbClr val="455661"/>
-                </a:solidFill>
-                <a:latin typeface="Calibri"/>
-                <a:ea typeface="Calibri"/>
-                <a:cs typeface="Calibri"/>
-              </a:rPr>
-              <a:t> </a:t>
-            </a:r>
-            <a:r>
-              <a:rPr sz="2000" b="0" dirty="0" err="1">
-                <a:solidFill>
-                  <a:srgbClr val="455661"/>
-                </a:solidFill>
-                <a:latin typeface="Calibri"/>
-                <a:ea typeface="Calibri"/>
-                <a:cs typeface="Calibri"/>
-              </a:rPr>
-              <a:t>wpisy</a:t>
-            </a:r>
-            <a:r>
-              <a:rPr sz="2000" b="0" dirty="0">
-                <a:solidFill>
-                  <a:srgbClr val="455661"/>
-                </a:solidFill>
-                <a:latin typeface="Calibri"/>
-                <a:ea typeface="Calibri"/>
-                <a:cs typeface="Calibri"/>
-              </a:rPr>
-              <a:t> do </a:t>
-            </a:r>
-            <a:r>
-              <a:rPr sz="2000" b="0" dirty="0" err="1">
-                <a:solidFill>
-                  <a:srgbClr val="455661"/>
-                </a:solidFill>
-                <a:latin typeface="Calibri"/>
-                <a:ea typeface="Calibri"/>
-                <a:cs typeface="Calibri"/>
-              </a:rPr>
-              <a:t>istniejących</a:t>
-            </a:r>
-            <a:r>
-              <a:rPr sz="2000" b="0" dirty="0">
-                <a:solidFill>
-                  <a:srgbClr val="455661"/>
-                </a:solidFill>
-                <a:latin typeface="Calibri"/>
-                <a:ea typeface="Calibri"/>
-                <a:cs typeface="Calibri"/>
-              </a:rPr>
-              <a:t> </a:t>
-            </a:r>
-            <a:r>
-              <a:rPr sz="2000" b="0" dirty="0" err="1">
-                <a:solidFill>
-                  <a:srgbClr val="455661"/>
-                </a:solidFill>
-                <a:latin typeface="Calibri"/>
-                <a:ea typeface="Calibri"/>
-                <a:cs typeface="Calibri"/>
-              </a:rPr>
-              <a:t>sekcji</a:t>
-            </a:r>
-            <a:r>
-              <a:rPr sz="2000" b="0" dirty="0">
-                <a:solidFill>
-                  <a:srgbClr val="455661"/>
-                </a:solidFill>
-                <a:latin typeface="Calibri"/>
-                <a:ea typeface="Calibri"/>
-                <a:cs typeface="Calibri"/>
-              </a:rPr>
-              <a:t>.</a:t>
-            </a:r>
-          </a:p>
-          <a:p>
-            <a:pPr algn="l">
-              <a:spcBef>
-                <a:spcPts val="0"/>
-              </a:spcBef>
-              <a:spcAft>
-                <a:spcPts val="0"/>
-              </a:spcAft>
-              <a:defRPr sz="1725" b="0">
-                <a:solidFill>
-                  <a:srgbClr val="455661"/>
-                </a:solidFill>
-                <a:latin typeface="Calibri"/>
-                <a:ea typeface="Calibri"/>
-                <a:cs typeface="Calibri"/>
-              </a:defRPr>
-            </a:pPr>
-            <a:r>
-              <a:rPr sz="2400" b="0" dirty="0">
-                <a:solidFill>
-                  <a:srgbClr val="455661"/>
-                </a:solidFill>
-                <a:latin typeface="Calibri"/>
-                <a:ea typeface="Calibri"/>
-                <a:cs typeface="Calibri"/>
-              </a:rPr>
-              <a:t>Po </a:t>
-            </a:r>
-            <a:r>
-              <a:rPr sz="2400" b="0" dirty="0" err="1">
-                <a:solidFill>
-                  <a:srgbClr val="455661"/>
-                </a:solidFill>
-                <a:latin typeface="Calibri"/>
-                <a:ea typeface="Calibri"/>
-                <a:cs typeface="Calibri"/>
-              </a:rPr>
-              <a:t>zmianach</a:t>
-            </a:r>
-            <a:r>
-              <a:rPr sz="2400" b="0" dirty="0">
-                <a:solidFill>
-                  <a:srgbClr val="455661"/>
-                </a:solidFill>
-                <a:latin typeface="Calibri"/>
-                <a:ea typeface="Calibri"/>
-                <a:cs typeface="Calibri"/>
-              </a:rPr>
-              <a:t> </a:t>
-            </a:r>
-            <a:r>
-              <a:rPr sz="2400" b="0" dirty="0" err="1">
-                <a:solidFill>
-                  <a:srgbClr val="455661"/>
-                </a:solidFill>
-                <a:latin typeface="Calibri"/>
-                <a:ea typeface="Calibri"/>
-                <a:cs typeface="Calibri"/>
-              </a:rPr>
-              <a:t>wykonaj</a:t>
-            </a:r>
-            <a:r>
-              <a:rPr sz="2400" b="0" dirty="0">
-                <a:solidFill>
-                  <a:srgbClr val="455661"/>
-                </a:solidFill>
-                <a:latin typeface="Calibri"/>
-                <a:ea typeface="Calibri"/>
-                <a:cs typeface="Calibri"/>
-              </a:rPr>
-              <a:t> </a:t>
-            </a:r>
-            <a:r>
-              <a:rPr sz="2400" b="0" dirty="0" err="1">
-                <a:solidFill>
-                  <a:srgbClr val="455661"/>
-                </a:solidFill>
-                <a:latin typeface="Calibri"/>
-                <a:ea typeface="Calibri"/>
-                <a:cs typeface="Calibri"/>
-              </a:rPr>
-              <a:t>synchronizację</a:t>
-            </a:r>
-            <a:r>
-              <a:rPr sz="2400" b="0" dirty="0">
-                <a:solidFill>
-                  <a:srgbClr val="455661"/>
-                </a:solidFill>
-                <a:latin typeface="Calibri"/>
-                <a:ea typeface="Calibri"/>
-                <a:cs typeface="Calibri"/>
-              </a:rPr>
-              <a:t> </a:t>
-            </a:r>
-            <a:r>
-              <a:rPr sz="2400" b="0" dirty="0" err="1">
-                <a:solidFill>
-                  <a:srgbClr val="455661"/>
-                </a:solidFill>
-                <a:latin typeface="Calibri"/>
-                <a:ea typeface="Calibri"/>
-                <a:cs typeface="Calibri"/>
-              </a:rPr>
-              <a:t>projektu</a:t>
-            </a:r>
-            <a:r>
-              <a:rPr sz="2400" b="0" dirty="0">
-                <a:solidFill>
-                  <a:srgbClr val="455661"/>
-                </a:solidFill>
-                <a:latin typeface="Calibri"/>
-                <a:ea typeface="Calibri"/>
-                <a:cs typeface="Calibri"/>
-              </a:rPr>
-              <a:t>.</a:t>
-            </a:r>
-          </a:p>
-        </p:txBody>
-      </p:sp>
-    </p:spTree>
-    <p:extLst>
-      <p:ext uri="{BB962C8B-B14F-4D97-AF65-F5344CB8AC3E}">
-        <p14:creationId xmlns:p14="http://schemas.microsoft.com/office/powerpoint/2010/main" val="1741222220"/>
-      </p:ext>
-    </p:extLst>
-  </p:cSld>
-  <p:clrMapOvr>
-    <a:masterClrMapping/>
-  </p:clrMapOvr>
-</p:sld>
-</file>
-
-<file path=ppt/slides/slide11.xml><?xml version="1.0" encoding="utf-8"?>
-<p:sld xmlns:a="http://schemas.openxmlformats.org/drawingml/2006/main" xmlns:r="http://schemas.openxmlformats.org/officeDocument/2006/relationships" xmlns:p="http://schemas.openxmlformats.org/presentationml/2006/main">
-  <p:cSld>
-    <p:bg>
-      <p:bgPr>
-        <a:blipFill dpi="0" rotWithShape="0">
-          <a:blip r:embed="rId3" cstate="print"/>
-          <a:srcRect/>
-          <a:stretch>
-            <a:fillRect/>
-          </a:stretch>
-        </a:blipFill>
-        <a:effectLst/>
-      </p:bgPr>
-    </p:bg>
-    <p:spTree>
-      <p:nvGrpSpPr>
-        <p:cNvPr id="1" name="">
-          <a:extLst>
-            <a:ext uri="{FF2B5EF4-FFF2-40B4-BE49-F238E27FC236}">
               <a16:creationId xmlns:a16="http://schemas.microsoft.com/office/drawing/2014/main" id="{BA6BA64F-CC63-364B-B1A9-6DDD1DC0DC4A}"/>
             </a:ext>
           </a:extLst>
@@ -9043,7 +7772,7 @@
 </p:sld>
 </file>
 
-<file path=ppt/slides/slide12.xml><?xml version="1.0" encoding="utf-8"?>
+<file path=ppt/slides/slide11.xml><?xml version="1.0" encoding="utf-8"?>
 <p:sld xmlns:a="http://schemas.openxmlformats.org/drawingml/2006/main" xmlns:r="http://schemas.openxmlformats.org/officeDocument/2006/relationships" xmlns:p="http://schemas.openxmlformats.org/presentationml/2006/main">
   <p:cSld>
     <p:bg>
@@ -9621,7 +8350,7 @@
 </p:sld>
 </file>
 
-<file path=ppt/slides/slide13.xml><?xml version="1.0" encoding="utf-8"?>
+<file path=ppt/slides/slide12.xml><?xml version="1.0" encoding="utf-8"?>
 <p:sld xmlns:a="http://schemas.openxmlformats.org/drawingml/2006/main" xmlns:r="http://schemas.openxmlformats.org/officeDocument/2006/relationships" xmlns:p="http://schemas.openxmlformats.org/presentationml/2006/main">
   <p:cSld>
     <p:bg>
@@ -10575,7 +9304,7 @@
 </p:sld>
 </file>
 
-<file path=ppt/slides/slide14.xml><?xml version="1.0" encoding="utf-8"?>
+<file path=ppt/slides/slide13.xml><?xml version="1.0" encoding="utf-8"?>
 <p:sld xmlns:a="http://schemas.openxmlformats.org/drawingml/2006/main" xmlns:r="http://schemas.openxmlformats.org/officeDocument/2006/relationships" xmlns:p="http://schemas.openxmlformats.org/presentationml/2006/main">
   <p:cSld>
     <p:bg>
@@ -11412,7 +10141,7 @@
 </p:sld>
 </file>
 
-<file path=ppt/slides/slide15.xml><?xml version="1.0" encoding="utf-8"?>
+<file path=ppt/slides/slide14.xml><?xml version="1.0" encoding="utf-8"?>
 <p:sld xmlns:a="http://schemas.openxmlformats.org/drawingml/2006/main" xmlns:r="http://schemas.openxmlformats.org/officeDocument/2006/relationships" xmlns:p="http://schemas.openxmlformats.org/presentationml/2006/main">
   <p:cSld>
     <p:bg>
@@ -12331,7 +11060,7 @@
 </p:sld>
 </file>
 
-<file path=ppt/slides/slide16.xml><?xml version="1.0" encoding="utf-8"?>
+<file path=ppt/slides/slide15.xml><?xml version="1.0" encoding="utf-8"?>
 <p:sld xmlns:a="http://schemas.openxmlformats.org/drawingml/2006/main" xmlns:r="http://schemas.openxmlformats.org/officeDocument/2006/relationships" xmlns:p="http://schemas.openxmlformats.org/presentationml/2006/main">
   <p:cSld>
     <p:bg>
@@ -13250,7 +11979,7 @@
 </p:sld>
 </file>
 
-<file path=ppt/slides/slide17.xml><?xml version="1.0" encoding="utf-8"?>
+<file path=ppt/slides/slide16.xml><?xml version="1.0" encoding="utf-8"?>
 <p:sld xmlns:a="http://schemas.openxmlformats.org/drawingml/2006/main" xmlns:r="http://schemas.openxmlformats.org/officeDocument/2006/relationships" xmlns:p="http://schemas.openxmlformats.org/presentationml/2006/main">
   <p:cSld>
     <p:bg>
@@ -14021,7 +12750,7 @@
 </p:sld>
 </file>
 
-<file path=ppt/slides/slide18.xml><?xml version="1.0" encoding="utf-8"?>
+<file path=ppt/slides/slide17.xml><?xml version="1.0" encoding="utf-8"?>
 <p:sld xmlns:a="http://schemas.openxmlformats.org/drawingml/2006/main" xmlns:r="http://schemas.openxmlformats.org/officeDocument/2006/relationships" xmlns:p="http://schemas.openxmlformats.org/presentationml/2006/main">
   <p:cSld>
     <p:bg>
@@ -14762,7 +13491,7 @@
 </p:sld>
 </file>
 
-<file path=ppt/slides/slide19.xml><?xml version="1.0" encoding="utf-8"?>
+<file path=ppt/slides/slide18.xml><?xml version="1.0" encoding="utf-8"?>
 <p:sld xmlns:a="http://schemas.openxmlformats.org/drawingml/2006/main" xmlns:r="http://schemas.openxmlformats.org/officeDocument/2006/relationships" xmlns:p="http://schemas.openxmlformats.org/presentationml/2006/main">
   <p:cSld>
     <p:bg>
@@ -15408,735 +14137,7 @@
 </p:sld>
 </file>
 
-<file path=ppt/slides/slide2.xml><?xml version="1.0" encoding="utf-8"?>
-<p:sld xmlns:a="http://schemas.openxmlformats.org/drawingml/2006/main" xmlns:r="http://schemas.openxmlformats.org/officeDocument/2006/relationships" xmlns:p="http://schemas.openxmlformats.org/presentationml/2006/main">
-  <p:cSld>
-    <p:bg>
-      <p:bgPr>
-        <a:blipFill dpi="0" rotWithShape="0">
-          <a:blip r:embed="rId3" cstate="print"/>
-          <a:srcRect/>
-          <a:stretch>
-            <a:fillRect/>
-          </a:stretch>
-        </a:blipFill>
-        <a:effectLst/>
-      </p:bgPr>
-    </p:bg>
-    <p:spTree>
-      <p:nvGrpSpPr>
-        <p:cNvPr id="1" name=""/>
-        <p:cNvGrpSpPr/>
-        <p:nvPr/>
-      </p:nvGrpSpPr>
-      <p:grpSpPr>
-        <a:xfrm>
-          <a:off x="0" y="0"/>
-          <a:ext cx="0" cy="0"/>
-          <a:chOff x="0" y="0"/>
-          <a:chExt cx="0" cy="0"/>
-        </a:xfrm>
-      </p:grpSpPr>
-      <p:sp>
-        <p:nvSpPr>
-          <p:cNvPr id="2" name="Rectangle 1"/>
-          <p:cNvSpPr/>
-          <p:nvPr/>
-        </p:nvSpPr>
-        <p:spPr>
-          <a:xfrm>
-            <a:off x="1979712" y="188640"/>
-            <a:ext cx="6696744" cy="492443"/>
-          </a:xfrm>
-          <a:prstGeom prst="rect">
-            <a:avLst/>
-          </a:prstGeom>
-        </p:spPr>
-        <p:txBody>
-          <a:bodyPr wrap="square">
-            <a:spAutoFit/>
-          </a:bodyPr>
-          <a:lstStyle/>
-          <a:p>
-            <a:pPr algn="ctr"/>
-            <a:r>
-              <a:rPr lang="pl-PL" sz="2600" dirty="0">
-                <a:solidFill>
-                  <a:schemeClr val="bg1"/>
-                </a:solidFill>
-                <a:latin typeface="Verdana" panose="020B0604030504040204" pitchFamily="34" charset="0"/>
-                <a:ea typeface="Verdana" panose="020B0604030504040204" pitchFamily="34" charset="0"/>
-                <a:cs typeface="Verdana" panose="020B0604030504040204" pitchFamily="34" charset="0"/>
-              </a:rPr>
-              <a:t>PODSTAWOWE INFORMACJE</a:t>
-            </a:r>
-          </a:p>
-        </p:txBody>
-      </p:sp>
-      <p:sp>
-        <p:nvSpPr>
-          <p:cNvPr id="4" name="Rafał Lewandków">
-            <a:extLst>
-              <a:ext uri="{FF2B5EF4-FFF2-40B4-BE49-F238E27FC236}">
-                <a16:creationId xmlns:a16="http://schemas.microsoft.com/office/drawing/2014/main" id="{A4334D46-2A30-0E04-17FD-F0ABE4960882}"/>
-              </a:ext>
-            </a:extLst>
-          </p:cNvPr>
-          <p:cNvSpPr>
-            <a:spLocks noGrp="1"/>
-          </p:cNvSpPr>
-          <p:nvPr/>
-        </p:nvSpPr>
-        <p:spPr>
-          <a:xfrm>
-            <a:off x="1333500" y="1238250"/>
-            <a:ext cx="7381875" cy="457200"/>
-          </a:xfrm>
-          <a:prstGeom prst="rect">
-            <a:avLst/>
-          </a:prstGeom>
-          <a:noFill/>
-          <a:ln w="0">
-            <a:noFill/>
-          </a:ln>
-        </p:spPr>
-        <p:txBody>
-          <a:bodyPr wrap="square" lIns="0" tIns="0" rIns="0" bIns="0" anchor="t">
-            <a:noAutofit/>
-          </a:bodyPr>
-          <a:lstStyle/>
-          <a:p>
-            <a:pPr algn="l">
-              <a:spcBef>
-                <a:spcPts val="0"/>
-              </a:spcBef>
-              <a:spcAft>
-                <a:spcPts val="0"/>
-              </a:spcAft>
-              <a:defRPr sz="2550" b="1">
-                <a:solidFill>
-                  <a:srgbClr val="152B37"/>
-                </a:solidFill>
-                <a:latin typeface="Calibri"/>
-                <a:ea typeface="Calibri"/>
-                <a:cs typeface="Calibri"/>
-              </a:defRPr>
-            </a:pPr>
-            <a:r>
-              <a:rPr sz="2550" b="1" dirty="0">
-                <a:solidFill>
-                  <a:srgbClr val="152B37"/>
-                </a:solidFill>
-                <a:latin typeface="Calibri"/>
-                <a:ea typeface="Calibri"/>
-                <a:cs typeface="Calibri"/>
-              </a:rPr>
-              <a:t>Rafał Lewandków</a:t>
-            </a:r>
-          </a:p>
-        </p:txBody>
-      </p:sp>
-      <p:sp>
-        <p:nvSpPr>
-          <p:cNvPr id="6" name="pokój 075&#10;rafal.lewandkow2@uwr.edu.pl">
-            <a:extLst>
-              <a:ext uri="{FF2B5EF4-FFF2-40B4-BE49-F238E27FC236}">
-                <a16:creationId xmlns:a16="http://schemas.microsoft.com/office/drawing/2014/main" id="{02CB2400-E4AC-5A4D-C5A5-D3BEDFF6DA88}"/>
-              </a:ext>
-            </a:extLst>
-          </p:cNvPr>
-          <p:cNvSpPr>
-            <a:spLocks noGrp="1"/>
-          </p:cNvSpPr>
-          <p:nvPr/>
-        </p:nvSpPr>
-        <p:spPr>
-          <a:xfrm>
-            <a:off x="1333500" y="1762125"/>
-            <a:ext cx="7381875" cy="714375"/>
-          </a:xfrm>
-          <a:prstGeom prst="rect">
-            <a:avLst/>
-          </a:prstGeom>
-          <a:noFill/>
-          <a:ln w="0">
-            <a:noFill/>
-          </a:ln>
-        </p:spPr>
-        <p:txBody>
-          <a:bodyPr wrap="square" lIns="0" tIns="0" rIns="0" bIns="0" anchor="t">
-            <a:noAutofit/>
-          </a:bodyPr>
-          <a:lstStyle/>
-          <a:p>
-            <a:pPr algn="l">
-              <a:spcBef>
-                <a:spcPts val="0"/>
-              </a:spcBef>
-              <a:spcAft>
-                <a:spcPts val="0"/>
-              </a:spcAft>
-              <a:defRPr sz="2175" b="0">
-                <a:solidFill>
-                  <a:srgbClr val="152B37"/>
-                </a:solidFill>
-                <a:latin typeface="Calibri"/>
-                <a:ea typeface="Calibri"/>
-                <a:cs typeface="Calibri"/>
-              </a:defRPr>
-            </a:pPr>
-            <a:r>
-              <a:rPr sz="2175" b="0" dirty="0" err="1">
-                <a:solidFill>
-                  <a:srgbClr val="152B37"/>
-                </a:solidFill>
-                <a:latin typeface="Calibri"/>
-                <a:ea typeface="Calibri"/>
-                <a:cs typeface="Calibri"/>
-              </a:rPr>
-              <a:t>pokój</a:t>
-            </a:r>
-            <a:r>
-              <a:rPr sz="2175" b="0" dirty="0">
-                <a:solidFill>
-                  <a:srgbClr val="152B37"/>
-                </a:solidFill>
-                <a:latin typeface="Calibri"/>
-                <a:ea typeface="Calibri"/>
-                <a:cs typeface="Calibri"/>
-              </a:rPr>
-              <a:t> 075</a:t>
-            </a:r>
-          </a:p>
-          <a:p>
-            <a:pPr algn="l">
-              <a:spcBef>
-                <a:spcPts val="0"/>
-              </a:spcBef>
-              <a:spcAft>
-                <a:spcPts val="0"/>
-              </a:spcAft>
-              <a:defRPr sz="2175" b="0">
-                <a:solidFill>
-                  <a:srgbClr val="152B37"/>
-                </a:solidFill>
-                <a:latin typeface="Calibri"/>
-                <a:ea typeface="Calibri"/>
-                <a:cs typeface="Calibri"/>
-              </a:defRPr>
-            </a:pPr>
-            <a:r>
-              <a:rPr sz="2175" b="0" dirty="0">
-                <a:solidFill>
-                  <a:srgbClr val="152B37"/>
-                </a:solidFill>
-                <a:latin typeface="Calibri"/>
-                <a:ea typeface="Calibri"/>
-                <a:cs typeface="Calibri"/>
-              </a:rPr>
-              <a:t>rafal.lewandkow2@uwr.edu.pl</a:t>
-            </a:r>
-          </a:p>
-        </p:txBody>
-      </p:sp>
-      <p:sp>
-        <p:nvSpPr>
-          <p:cNvPr id="9" name="Wykład: 15 godz.   Laboratorium: 30 godz.">
-            <a:extLst>
-              <a:ext uri="{FF2B5EF4-FFF2-40B4-BE49-F238E27FC236}">
-                <a16:creationId xmlns:a16="http://schemas.microsoft.com/office/drawing/2014/main" id="{6B26E33E-1705-2D83-7CFE-CFDB77591DE8}"/>
-              </a:ext>
-            </a:extLst>
-          </p:cNvPr>
-          <p:cNvSpPr>
-            <a:spLocks noGrp="1"/>
-          </p:cNvSpPr>
-          <p:nvPr/>
-        </p:nvSpPr>
-        <p:spPr>
-          <a:xfrm>
-            <a:off x="1333500" y="2857500"/>
-            <a:ext cx="7381875" cy="476250"/>
-          </a:xfrm>
-          <a:prstGeom prst="rect">
-            <a:avLst/>
-          </a:prstGeom>
-          <a:noFill/>
-          <a:ln w="0">
-            <a:noFill/>
-          </a:ln>
-        </p:spPr>
-        <p:txBody>
-          <a:bodyPr wrap="square" lIns="0" tIns="0" rIns="0" bIns="0" anchor="t">
-            <a:noAutofit/>
-          </a:bodyPr>
-          <a:lstStyle/>
-          <a:p>
-            <a:pPr algn="l">
-              <a:spcBef>
-                <a:spcPts val="0"/>
-              </a:spcBef>
-              <a:spcAft>
-                <a:spcPts val="0"/>
-              </a:spcAft>
-              <a:defRPr sz="2175" b="0">
-                <a:solidFill>
-                  <a:srgbClr val="152B37"/>
-                </a:solidFill>
-                <a:latin typeface="Calibri"/>
-                <a:ea typeface="Calibri"/>
-                <a:cs typeface="Calibri"/>
-              </a:defRPr>
-            </a:pPr>
-            <a:r>
-              <a:rPr sz="2175" b="0" dirty="0" err="1">
-                <a:solidFill>
-                  <a:srgbClr val="152B37"/>
-                </a:solidFill>
-                <a:latin typeface="Calibri"/>
-                <a:ea typeface="Calibri"/>
-                <a:cs typeface="Calibri"/>
-              </a:rPr>
-              <a:t>Wykład</a:t>
-            </a:r>
-            <a:r>
-              <a:rPr sz="2175" b="0" dirty="0">
-                <a:solidFill>
-                  <a:srgbClr val="152B37"/>
-                </a:solidFill>
-                <a:latin typeface="Calibri"/>
-                <a:ea typeface="Calibri"/>
-                <a:cs typeface="Calibri"/>
-              </a:rPr>
-              <a:t>: 15 </a:t>
-            </a:r>
-            <a:r>
-              <a:rPr sz="2175" b="0" dirty="0" err="1">
-                <a:solidFill>
-                  <a:srgbClr val="152B37"/>
-                </a:solidFill>
-                <a:latin typeface="Calibri"/>
-                <a:ea typeface="Calibri"/>
-                <a:cs typeface="Calibri"/>
-              </a:rPr>
-              <a:t>godz</a:t>
-            </a:r>
-            <a:r>
-              <a:rPr sz="2175" b="0" dirty="0">
-                <a:solidFill>
-                  <a:srgbClr val="152B37"/>
-                </a:solidFill>
-                <a:latin typeface="Calibri"/>
-                <a:ea typeface="Calibri"/>
-                <a:cs typeface="Calibri"/>
-              </a:rPr>
-              <a:t>.   </a:t>
-            </a:r>
-            <a:r>
-              <a:rPr sz="2175" b="0" dirty="0" err="1">
-                <a:solidFill>
-                  <a:srgbClr val="152B37"/>
-                </a:solidFill>
-                <a:latin typeface="Calibri"/>
-                <a:ea typeface="Calibri"/>
-                <a:cs typeface="Calibri"/>
-              </a:rPr>
-              <a:t>Laboratorium</a:t>
-            </a:r>
-            <a:r>
-              <a:rPr sz="2175" b="0" dirty="0">
-                <a:solidFill>
-                  <a:srgbClr val="152B37"/>
-                </a:solidFill>
-                <a:latin typeface="Calibri"/>
-                <a:ea typeface="Calibri"/>
-                <a:cs typeface="Calibri"/>
-              </a:rPr>
-              <a:t>: 30 </a:t>
-            </a:r>
-            <a:r>
-              <a:rPr sz="2175" b="0" dirty="0" err="1">
-                <a:solidFill>
-                  <a:srgbClr val="152B37"/>
-                </a:solidFill>
-                <a:latin typeface="Calibri"/>
-                <a:ea typeface="Calibri"/>
-                <a:cs typeface="Calibri"/>
-              </a:rPr>
-              <a:t>godz</a:t>
-            </a:r>
-            <a:r>
-              <a:rPr sz="2175" b="0" dirty="0">
-                <a:solidFill>
-                  <a:srgbClr val="152B37"/>
-                </a:solidFill>
-                <a:latin typeface="Calibri"/>
-                <a:ea typeface="Calibri"/>
-                <a:cs typeface="Calibri"/>
-              </a:rPr>
-              <a:t>.</a:t>
-            </a:r>
-          </a:p>
-        </p:txBody>
-      </p:sp>
-      <p:sp>
-        <p:nvSpPr>
-          <p:cNvPr id="12" name="Materiały: rlewandkow.com">
-            <a:extLst>
-              <a:ext uri="{FF2B5EF4-FFF2-40B4-BE49-F238E27FC236}">
-                <a16:creationId xmlns:a16="http://schemas.microsoft.com/office/drawing/2014/main" id="{1FB2DDBE-5EC8-FEAE-524A-D0AA35F28369}"/>
-              </a:ext>
-            </a:extLst>
-          </p:cNvPr>
-          <p:cNvSpPr>
-            <a:spLocks noGrp="1"/>
-          </p:cNvSpPr>
-          <p:nvPr/>
-        </p:nvSpPr>
-        <p:spPr>
-          <a:xfrm>
-            <a:off x="1333500" y="3600450"/>
-            <a:ext cx="7381875" cy="428625"/>
-          </a:xfrm>
-          <a:prstGeom prst="rect">
-            <a:avLst/>
-          </a:prstGeom>
-          <a:noFill/>
-          <a:ln w="0">
-            <a:noFill/>
-          </a:ln>
-        </p:spPr>
-        <p:txBody>
-          <a:bodyPr wrap="square" lIns="0" tIns="0" rIns="0" bIns="0" anchor="t">
-            <a:noAutofit/>
-          </a:bodyPr>
-          <a:lstStyle/>
-          <a:p>
-            <a:pPr algn="l">
-              <a:spcBef>
-                <a:spcPts val="0"/>
-              </a:spcBef>
-              <a:spcAft>
-                <a:spcPts val="0"/>
-              </a:spcAft>
-              <a:defRPr sz="2400" b="1">
-                <a:solidFill>
-                  <a:srgbClr val="005F88"/>
-                </a:solidFill>
-                <a:latin typeface="Calibri"/>
-                <a:ea typeface="Calibri"/>
-                <a:cs typeface="Calibri"/>
-              </a:defRPr>
-            </a:pPr>
-            <a:r>
-              <a:rPr sz="2400" b="1" dirty="0" err="1">
-                <a:solidFill>
-                  <a:srgbClr val="005F88"/>
-                </a:solidFill>
-                <a:latin typeface="Calibri"/>
-                <a:ea typeface="Calibri"/>
-                <a:cs typeface="Calibri"/>
-              </a:rPr>
-              <a:t>Materiały</a:t>
-            </a:r>
-            <a:r>
-              <a:rPr sz="2400" b="1" dirty="0">
-                <a:solidFill>
-                  <a:srgbClr val="005F88"/>
-                </a:solidFill>
-                <a:latin typeface="Calibri"/>
-                <a:ea typeface="Calibri"/>
-                <a:cs typeface="Calibri"/>
-              </a:rPr>
-              <a:t>: </a:t>
-            </a:r>
-            <a:r>
-              <a:rPr lang="pl-PL" sz="2400" b="1" dirty="0">
-                <a:solidFill>
-                  <a:srgbClr val="005F88"/>
-                </a:solidFill>
-                <a:latin typeface="Calibri"/>
-                <a:ea typeface="Calibri"/>
-                <a:cs typeface="Calibri"/>
-              </a:rPr>
-              <a:t>https://github.com/RafLew84/ProgUM</a:t>
-            </a:r>
-            <a:endParaRPr sz="2400" b="1" dirty="0">
-              <a:solidFill>
-                <a:srgbClr val="005F88"/>
-              </a:solidFill>
-              <a:latin typeface="Calibri"/>
-              <a:ea typeface="Calibri"/>
-              <a:cs typeface="Calibri"/>
-            </a:endParaRPr>
-          </a:p>
-        </p:txBody>
-      </p:sp>
-      <p:sp>
-        <p:nvSpPr>
-          <p:cNvPr id="14" name="Literatura obowiązkowa i zalecana">
-            <a:extLst>
-              <a:ext uri="{FF2B5EF4-FFF2-40B4-BE49-F238E27FC236}">
-                <a16:creationId xmlns:a16="http://schemas.microsoft.com/office/drawing/2014/main" id="{43A0870E-4E1D-0570-0C88-B07F4CC86666}"/>
-              </a:ext>
-            </a:extLst>
-          </p:cNvPr>
-          <p:cNvSpPr>
-            <a:spLocks noGrp="1"/>
-          </p:cNvSpPr>
-          <p:nvPr/>
-        </p:nvSpPr>
-        <p:spPr>
-          <a:xfrm>
-            <a:off x="1333500" y="4524375"/>
-            <a:ext cx="7381875" cy="333375"/>
-          </a:xfrm>
-          <a:prstGeom prst="rect">
-            <a:avLst/>
-          </a:prstGeom>
-          <a:noFill/>
-          <a:ln w="0">
-            <a:noFill/>
-          </a:ln>
-        </p:spPr>
-        <p:txBody>
-          <a:bodyPr wrap="square" lIns="0" tIns="0" rIns="0" bIns="0" anchor="t">
-            <a:noAutofit/>
-          </a:bodyPr>
-          <a:lstStyle/>
-          <a:p>
-            <a:pPr algn="l">
-              <a:spcBef>
-                <a:spcPts val="0"/>
-              </a:spcBef>
-              <a:spcAft>
-                <a:spcPts val="0"/>
-              </a:spcAft>
-              <a:defRPr sz="2025" b="1">
-                <a:solidFill>
-                  <a:srgbClr val="152B37"/>
-                </a:solidFill>
-                <a:latin typeface="Calibri"/>
-                <a:ea typeface="Calibri"/>
-                <a:cs typeface="Calibri"/>
-              </a:defRPr>
-            </a:pPr>
-            <a:r>
-              <a:rPr sz="2025" b="1" dirty="0" err="1">
-                <a:solidFill>
-                  <a:srgbClr val="152B37"/>
-                </a:solidFill>
-                <a:latin typeface="Calibri"/>
-                <a:ea typeface="Calibri"/>
-                <a:cs typeface="Calibri"/>
-              </a:rPr>
-              <a:t>Literatura</a:t>
-            </a:r>
-            <a:r>
-              <a:rPr sz="2025" b="1" dirty="0">
-                <a:solidFill>
-                  <a:srgbClr val="152B37"/>
-                </a:solidFill>
-                <a:latin typeface="Calibri"/>
-                <a:ea typeface="Calibri"/>
-                <a:cs typeface="Calibri"/>
-              </a:rPr>
-              <a:t> </a:t>
-            </a:r>
-            <a:r>
-              <a:rPr sz="2025" b="1" dirty="0" err="1">
-                <a:solidFill>
-                  <a:srgbClr val="152B37"/>
-                </a:solidFill>
-                <a:latin typeface="Calibri"/>
-                <a:ea typeface="Calibri"/>
-                <a:cs typeface="Calibri"/>
-              </a:rPr>
-              <a:t>obowiązkowa</a:t>
-            </a:r>
-            <a:r>
-              <a:rPr sz="2025" b="1" dirty="0">
-                <a:solidFill>
-                  <a:srgbClr val="152B37"/>
-                </a:solidFill>
-                <a:latin typeface="Calibri"/>
-                <a:ea typeface="Calibri"/>
-                <a:cs typeface="Calibri"/>
-              </a:rPr>
-              <a:t> </a:t>
-            </a:r>
-            <a:r>
-              <a:rPr sz="2025" b="1" dirty="0" err="1">
-                <a:solidFill>
-                  <a:srgbClr val="152B37"/>
-                </a:solidFill>
-                <a:latin typeface="Calibri"/>
-                <a:ea typeface="Calibri"/>
-                <a:cs typeface="Calibri"/>
-              </a:rPr>
-              <a:t>i</a:t>
-            </a:r>
-            <a:r>
-              <a:rPr sz="2025" b="1" dirty="0">
-                <a:solidFill>
-                  <a:srgbClr val="152B37"/>
-                </a:solidFill>
-                <a:latin typeface="Calibri"/>
-                <a:ea typeface="Calibri"/>
-                <a:cs typeface="Calibri"/>
-              </a:rPr>
-              <a:t> </a:t>
-            </a:r>
-            <a:r>
-              <a:rPr sz="2025" b="1" dirty="0" err="1">
-                <a:solidFill>
-                  <a:srgbClr val="152B37"/>
-                </a:solidFill>
-                <a:latin typeface="Calibri"/>
-                <a:ea typeface="Calibri"/>
-                <a:cs typeface="Calibri"/>
-              </a:rPr>
-              <a:t>zalecana</a:t>
-            </a:r>
-            <a:endParaRPr sz="2025" b="1" dirty="0">
-              <a:solidFill>
-                <a:srgbClr val="152B37"/>
-              </a:solidFill>
-              <a:latin typeface="Calibri"/>
-              <a:ea typeface="Calibri"/>
-              <a:cs typeface="Calibri"/>
-            </a:endParaRPr>
-          </a:p>
-        </p:txBody>
-      </p:sp>
-      <p:sp>
-        <p:nvSpPr>
-          <p:cNvPr id="16" name="Dokumentacja: kotlinlang.org/docs/home.html&#10;Kurs">
-            <a:extLst>
-              <a:ext uri="{FF2B5EF4-FFF2-40B4-BE49-F238E27FC236}">
-                <a16:creationId xmlns:a16="http://schemas.microsoft.com/office/drawing/2014/main" id="{41AC9676-E130-82A4-E760-C133769424F7}"/>
-              </a:ext>
-            </a:extLst>
-          </p:cNvPr>
-          <p:cNvSpPr>
-            <a:spLocks noGrp="1"/>
-          </p:cNvSpPr>
-          <p:nvPr/>
-        </p:nvSpPr>
-        <p:spPr>
-          <a:xfrm>
-            <a:off x="1333500" y="4953000"/>
-            <a:ext cx="7381875" cy="1028700"/>
-          </a:xfrm>
-          <a:prstGeom prst="rect">
-            <a:avLst/>
-          </a:prstGeom>
-          <a:noFill/>
-          <a:ln w="0">
-            <a:noFill/>
-          </a:ln>
-        </p:spPr>
-        <p:txBody>
-          <a:bodyPr wrap="square" lIns="0" tIns="0" rIns="0" bIns="0" anchor="t">
-            <a:noAutofit/>
-          </a:bodyPr>
-          <a:lstStyle/>
-          <a:p>
-            <a:pPr algn="l">
-              <a:spcBef>
-                <a:spcPts val="0"/>
-              </a:spcBef>
-              <a:spcAft>
-                <a:spcPts val="0"/>
-              </a:spcAft>
-              <a:defRPr sz="1875" b="0">
-                <a:solidFill>
-                  <a:srgbClr val="152B37"/>
-                </a:solidFill>
-                <a:latin typeface="Calibri"/>
-                <a:ea typeface="Calibri"/>
-                <a:cs typeface="Calibri"/>
-              </a:defRPr>
-            </a:pPr>
-            <a:r>
-              <a:rPr sz="1875" b="0" dirty="0" err="1">
-                <a:solidFill>
-                  <a:srgbClr val="152B37"/>
-                </a:solidFill>
-                <a:latin typeface="Calibri"/>
-                <a:ea typeface="Calibri"/>
-                <a:cs typeface="Calibri"/>
-              </a:rPr>
-              <a:t>Dokumentacja</a:t>
-            </a:r>
-            <a:r>
-              <a:rPr sz="1875" b="0" dirty="0">
-                <a:solidFill>
-                  <a:srgbClr val="152B37"/>
-                </a:solidFill>
-                <a:latin typeface="Calibri"/>
-                <a:ea typeface="Calibri"/>
-                <a:cs typeface="Calibri"/>
-              </a:rPr>
-              <a:t>: kotlinlang.org/docs/home.html</a:t>
-            </a:r>
-          </a:p>
-          <a:p>
-            <a:pPr algn="l">
-              <a:spcBef>
-                <a:spcPts val="0"/>
-              </a:spcBef>
-              <a:spcAft>
-                <a:spcPts val="0"/>
-              </a:spcAft>
-              <a:defRPr sz="1875" b="0">
-                <a:solidFill>
-                  <a:srgbClr val="152B37"/>
-                </a:solidFill>
-                <a:latin typeface="Calibri"/>
-                <a:ea typeface="Calibri"/>
-                <a:cs typeface="Calibri"/>
-              </a:defRPr>
-            </a:pPr>
-            <a:r>
-              <a:rPr sz="1875" b="0" dirty="0" err="1">
-                <a:solidFill>
-                  <a:srgbClr val="152B37"/>
-                </a:solidFill>
-                <a:latin typeface="Calibri"/>
-                <a:ea typeface="Calibri"/>
-                <a:cs typeface="Calibri"/>
-              </a:rPr>
-              <a:t>Kursy</a:t>
-            </a:r>
-            <a:r>
-              <a:rPr sz="1875" b="0" dirty="0">
-                <a:solidFill>
-                  <a:srgbClr val="152B37"/>
-                </a:solidFill>
-                <a:latin typeface="Calibri"/>
-                <a:ea typeface="Calibri"/>
-                <a:cs typeface="Calibri"/>
-              </a:rPr>
-              <a:t>: developer.android.com/courses</a:t>
-            </a:r>
-          </a:p>
-        </p:txBody>
-      </p:sp>
-    </p:spTree>
-    <p:extLst>
-      <p:ext uri="{BB962C8B-B14F-4D97-AF65-F5344CB8AC3E}">
-        <p14:creationId xmlns:p14="http://schemas.microsoft.com/office/powerpoint/2010/main" val="4175824041"/>
-      </p:ext>
-    </p:extLst>
-  </p:cSld>
-  <p:clrMapOvr>
-    <a:masterClrMapping/>
-  </p:clrMapOvr>
-</p:sld>
-</file>
-
-<file path=ppt/slides/slide20.xml><?xml version="1.0" encoding="utf-8"?>
+<file path=ppt/slides/slide19.xml><?xml version="1.0" encoding="utf-8"?>
 <p:sld xmlns:a="http://schemas.openxmlformats.org/drawingml/2006/main" xmlns:r="http://schemas.openxmlformats.org/officeDocument/2006/relationships" xmlns:p="http://schemas.openxmlformats.org/presentationml/2006/main">
   <p:cSld>
     <p:bg>
@@ -16808,7 +14809,735 @@
 </p:sld>
 </file>
 
-<file path=ppt/slides/slide21.xml><?xml version="1.0" encoding="utf-8"?>
+<file path=ppt/slides/slide2.xml><?xml version="1.0" encoding="utf-8"?>
+<p:sld xmlns:a="http://schemas.openxmlformats.org/drawingml/2006/main" xmlns:r="http://schemas.openxmlformats.org/officeDocument/2006/relationships" xmlns:p="http://schemas.openxmlformats.org/presentationml/2006/main">
+  <p:cSld>
+    <p:bg>
+      <p:bgPr>
+        <a:blipFill dpi="0" rotWithShape="0">
+          <a:blip r:embed="rId3" cstate="print"/>
+          <a:srcRect/>
+          <a:stretch>
+            <a:fillRect/>
+          </a:stretch>
+        </a:blipFill>
+        <a:effectLst/>
+      </p:bgPr>
+    </p:bg>
+    <p:spTree>
+      <p:nvGrpSpPr>
+        <p:cNvPr id="1" name=""/>
+        <p:cNvGrpSpPr/>
+        <p:nvPr/>
+      </p:nvGrpSpPr>
+      <p:grpSpPr>
+        <a:xfrm>
+          <a:off x="0" y="0"/>
+          <a:ext cx="0" cy="0"/>
+          <a:chOff x="0" y="0"/>
+          <a:chExt cx="0" cy="0"/>
+        </a:xfrm>
+      </p:grpSpPr>
+      <p:sp>
+        <p:nvSpPr>
+          <p:cNvPr id="2" name="Rectangle 1"/>
+          <p:cNvSpPr/>
+          <p:nvPr/>
+        </p:nvSpPr>
+        <p:spPr>
+          <a:xfrm>
+            <a:off x="1979712" y="188640"/>
+            <a:ext cx="6696744" cy="492443"/>
+          </a:xfrm>
+          <a:prstGeom prst="rect">
+            <a:avLst/>
+          </a:prstGeom>
+        </p:spPr>
+        <p:txBody>
+          <a:bodyPr wrap="square">
+            <a:spAutoFit/>
+          </a:bodyPr>
+          <a:lstStyle/>
+          <a:p>
+            <a:pPr algn="ctr"/>
+            <a:r>
+              <a:rPr lang="pl-PL" sz="2600" dirty="0">
+                <a:solidFill>
+                  <a:schemeClr val="bg1"/>
+                </a:solidFill>
+                <a:latin typeface="Verdana" panose="020B0604030504040204" pitchFamily="34" charset="0"/>
+                <a:ea typeface="Verdana" panose="020B0604030504040204" pitchFamily="34" charset="0"/>
+                <a:cs typeface="Verdana" panose="020B0604030504040204" pitchFamily="34" charset="0"/>
+              </a:rPr>
+              <a:t>PODSTAWOWE INFORMACJE</a:t>
+            </a:r>
+          </a:p>
+        </p:txBody>
+      </p:sp>
+      <p:sp>
+        <p:nvSpPr>
+          <p:cNvPr id="4" name="Rafał Lewandków">
+            <a:extLst>
+              <a:ext uri="{FF2B5EF4-FFF2-40B4-BE49-F238E27FC236}">
+                <a16:creationId xmlns:a16="http://schemas.microsoft.com/office/drawing/2014/main" id="{A4334D46-2A30-0E04-17FD-F0ABE4960882}"/>
+              </a:ext>
+            </a:extLst>
+          </p:cNvPr>
+          <p:cNvSpPr>
+            <a:spLocks noGrp="1"/>
+          </p:cNvSpPr>
+          <p:nvPr/>
+        </p:nvSpPr>
+        <p:spPr>
+          <a:xfrm>
+            <a:off x="1333500" y="1238250"/>
+            <a:ext cx="7381875" cy="457200"/>
+          </a:xfrm>
+          <a:prstGeom prst="rect">
+            <a:avLst/>
+          </a:prstGeom>
+          <a:noFill/>
+          <a:ln w="0">
+            <a:noFill/>
+          </a:ln>
+        </p:spPr>
+        <p:txBody>
+          <a:bodyPr wrap="square" lIns="0" tIns="0" rIns="0" bIns="0" anchor="t">
+            <a:noAutofit/>
+          </a:bodyPr>
+          <a:lstStyle/>
+          <a:p>
+            <a:pPr algn="l">
+              <a:spcBef>
+                <a:spcPts val="0"/>
+              </a:spcBef>
+              <a:spcAft>
+                <a:spcPts val="0"/>
+              </a:spcAft>
+              <a:defRPr sz="2550" b="1">
+                <a:solidFill>
+                  <a:srgbClr val="152B37"/>
+                </a:solidFill>
+                <a:latin typeface="Calibri"/>
+                <a:ea typeface="Calibri"/>
+                <a:cs typeface="Calibri"/>
+              </a:defRPr>
+            </a:pPr>
+            <a:r>
+              <a:rPr sz="2550" b="1" dirty="0">
+                <a:solidFill>
+                  <a:srgbClr val="152B37"/>
+                </a:solidFill>
+                <a:latin typeface="Calibri"/>
+                <a:ea typeface="Calibri"/>
+                <a:cs typeface="Calibri"/>
+              </a:rPr>
+              <a:t>Rafał Lewandków</a:t>
+            </a:r>
+          </a:p>
+        </p:txBody>
+      </p:sp>
+      <p:sp>
+        <p:nvSpPr>
+          <p:cNvPr id="6" name="pokój 075&#10;rafal.lewandkow2@uwr.edu.pl">
+            <a:extLst>
+              <a:ext uri="{FF2B5EF4-FFF2-40B4-BE49-F238E27FC236}">
+                <a16:creationId xmlns:a16="http://schemas.microsoft.com/office/drawing/2014/main" id="{02CB2400-E4AC-5A4D-C5A5-D3BEDFF6DA88}"/>
+              </a:ext>
+            </a:extLst>
+          </p:cNvPr>
+          <p:cNvSpPr>
+            <a:spLocks noGrp="1"/>
+          </p:cNvSpPr>
+          <p:nvPr/>
+        </p:nvSpPr>
+        <p:spPr>
+          <a:xfrm>
+            <a:off x="1333500" y="1762125"/>
+            <a:ext cx="7381875" cy="714375"/>
+          </a:xfrm>
+          <a:prstGeom prst="rect">
+            <a:avLst/>
+          </a:prstGeom>
+          <a:noFill/>
+          <a:ln w="0">
+            <a:noFill/>
+          </a:ln>
+        </p:spPr>
+        <p:txBody>
+          <a:bodyPr wrap="square" lIns="0" tIns="0" rIns="0" bIns="0" anchor="t">
+            <a:noAutofit/>
+          </a:bodyPr>
+          <a:lstStyle/>
+          <a:p>
+            <a:pPr algn="l">
+              <a:spcBef>
+                <a:spcPts val="0"/>
+              </a:spcBef>
+              <a:spcAft>
+                <a:spcPts val="0"/>
+              </a:spcAft>
+              <a:defRPr sz="2175" b="0">
+                <a:solidFill>
+                  <a:srgbClr val="152B37"/>
+                </a:solidFill>
+                <a:latin typeface="Calibri"/>
+                <a:ea typeface="Calibri"/>
+                <a:cs typeface="Calibri"/>
+              </a:defRPr>
+            </a:pPr>
+            <a:r>
+              <a:rPr sz="2175" b="0" dirty="0" err="1">
+                <a:solidFill>
+                  <a:srgbClr val="152B37"/>
+                </a:solidFill>
+                <a:latin typeface="Calibri"/>
+                <a:ea typeface="Calibri"/>
+                <a:cs typeface="Calibri"/>
+              </a:rPr>
+              <a:t>pokój</a:t>
+            </a:r>
+            <a:r>
+              <a:rPr sz="2175" b="0" dirty="0">
+                <a:solidFill>
+                  <a:srgbClr val="152B37"/>
+                </a:solidFill>
+                <a:latin typeface="Calibri"/>
+                <a:ea typeface="Calibri"/>
+                <a:cs typeface="Calibri"/>
+              </a:rPr>
+              <a:t> 075</a:t>
+            </a:r>
+          </a:p>
+          <a:p>
+            <a:pPr algn="l">
+              <a:spcBef>
+                <a:spcPts val="0"/>
+              </a:spcBef>
+              <a:spcAft>
+                <a:spcPts val="0"/>
+              </a:spcAft>
+              <a:defRPr sz="2175" b="0">
+                <a:solidFill>
+                  <a:srgbClr val="152B37"/>
+                </a:solidFill>
+                <a:latin typeface="Calibri"/>
+                <a:ea typeface="Calibri"/>
+                <a:cs typeface="Calibri"/>
+              </a:defRPr>
+            </a:pPr>
+            <a:r>
+              <a:rPr sz="2175" b="0" dirty="0">
+                <a:solidFill>
+                  <a:srgbClr val="152B37"/>
+                </a:solidFill>
+                <a:latin typeface="Calibri"/>
+                <a:ea typeface="Calibri"/>
+                <a:cs typeface="Calibri"/>
+              </a:rPr>
+              <a:t>rafal.lewandkow2@uwr.edu.pl</a:t>
+            </a:r>
+          </a:p>
+        </p:txBody>
+      </p:sp>
+      <p:sp>
+        <p:nvSpPr>
+          <p:cNvPr id="9" name="Wykład: 15 godz.   Laboratorium: 30 godz.">
+            <a:extLst>
+              <a:ext uri="{FF2B5EF4-FFF2-40B4-BE49-F238E27FC236}">
+                <a16:creationId xmlns:a16="http://schemas.microsoft.com/office/drawing/2014/main" id="{6B26E33E-1705-2D83-7CFE-CFDB77591DE8}"/>
+              </a:ext>
+            </a:extLst>
+          </p:cNvPr>
+          <p:cNvSpPr>
+            <a:spLocks noGrp="1"/>
+          </p:cNvSpPr>
+          <p:nvPr/>
+        </p:nvSpPr>
+        <p:spPr>
+          <a:xfrm>
+            <a:off x="1333500" y="2857500"/>
+            <a:ext cx="7381875" cy="476250"/>
+          </a:xfrm>
+          <a:prstGeom prst="rect">
+            <a:avLst/>
+          </a:prstGeom>
+          <a:noFill/>
+          <a:ln w="0">
+            <a:noFill/>
+          </a:ln>
+        </p:spPr>
+        <p:txBody>
+          <a:bodyPr wrap="square" lIns="0" tIns="0" rIns="0" bIns="0" anchor="t">
+            <a:noAutofit/>
+          </a:bodyPr>
+          <a:lstStyle/>
+          <a:p>
+            <a:pPr algn="l">
+              <a:spcBef>
+                <a:spcPts val="0"/>
+              </a:spcBef>
+              <a:spcAft>
+                <a:spcPts val="0"/>
+              </a:spcAft>
+              <a:defRPr sz="2175" b="0">
+                <a:solidFill>
+                  <a:srgbClr val="152B37"/>
+                </a:solidFill>
+                <a:latin typeface="Calibri"/>
+                <a:ea typeface="Calibri"/>
+                <a:cs typeface="Calibri"/>
+              </a:defRPr>
+            </a:pPr>
+            <a:r>
+              <a:rPr sz="2175" b="0" dirty="0" err="1">
+                <a:solidFill>
+                  <a:srgbClr val="152B37"/>
+                </a:solidFill>
+                <a:latin typeface="Calibri"/>
+                <a:ea typeface="Calibri"/>
+                <a:cs typeface="Calibri"/>
+              </a:rPr>
+              <a:t>Wykład</a:t>
+            </a:r>
+            <a:r>
+              <a:rPr sz="2175" b="0" dirty="0">
+                <a:solidFill>
+                  <a:srgbClr val="152B37"/>
+                </a:solidFill>
+                <a:latin typeface="Calibri"/>
+                <a:ea typeface="Calibri"/>
+                <a:cs typeface="Calibri"/>
+              </a:rPr>
+              <a:t>: 15 </a:t>
+            </a:r>
+            <a:r>
+              <a:rPr sz="2175" b="0" dirty="0" err="1">
+                <a:solidFill>
+                  <a:srgbClr val="152B37"/>
+                </a:solidFill>
+                <a:latin typeface="Calibri"/>
+                <a:ea typeface="Calibri"/>
+                <a:cs typeface="Calibri"/>
+              </a:rPr>
+              <a:t>godz</a:t>
+            </a:r>
+            <a:r>
+              <a:rPr sz="2175" b="0" dirty="0">
+                <a:solidFill>
+                  <a:srgbClr val="152B37"/>
+                </a:solidFill>
+                <a:latin typeface="Calibri"/>
+                <a:ea typeface="Calibri"/>
+                <a:cs typeface="Calibri"/>
+              </a:rPr>
+              <a:t>.   </a:t>
+            </a:r>
+            <a:r>
+              <a:rPr sz="2175" b="0" dirty="0" err="1">
+                <a:solidFill>
+                  <a:srgbClr val="152B37"/>
+                </a:solidFill>
+                <a:latin typeface="Calibri"/>
+                <a:ea typeface="Calibri"/>
+                <a:cs typeface="Calibri"/>
+              </a:rPr>
+              <a:t>Laboratorium</a:t>
+            </a:r>
+            <a:r>
+              <a:rPr sz="2175" b="0" dirty="0">
+                <a:solidFill>
+                  <a:srgbClr val="152B37"/>
+                </a:solidFill>
+                <a:latin typeface="Calibri"/>
+                <a:ea typeface="Calibri"/>
+                <a:cs typeface="Calibri"/>
+              </a:rPr>
+              <a:t>: 30 </a:t>
+            </a:r>
+            <a:r>
+              <a:rPr sz="2175" b="0" dirty="0" err="1">
+                <a:solidFill>
+                  <a:srgbClr val="152B37"/>
+                </a:solidFill>
+                <a:latin typeface="Calibri"/>
+                <a:ea typeface="Calibri"/>
+                <a:cs typeface="Calibri"/>
+              </a:rPr>
+              <a:t>godz</a:t>
+            </a:r>
+            <a:r>
+              <a:rPr sz="2175" b="0" dirty="0">
+                <a:solidFill>
+                  <a:srgbClr val="152B37"/>
+                </a:solidFill>
+                <a:latin typeface="Calibri"/>
+                <a:ea typeface="Calibri"/>
+                <a:cs typeface="Calibri"/>
+              </a:rPr>
+              <a:t>.</a:t>
+            </a:r>
+          </a:p>
+        </p:txBody>
+      </p:sp>
+      <p:sp>
+        <p:nvSpPr>
+          <p:cNvPr id="12" name="Materiały: rlewandkow.com">
+            <a:extLst>
+              <a:ext uri="{FF2B5EF4-FFF2-40B4-BE49-F238E27FC236}">
+                <a16:creationId xmlns:a16="http://schemas.microsoft.com/office/drawing/2014/main" id="{1FB2DDBE-5EC8-FEAE-524A-D0AA35F28369}"/>
+              </a:ext>
+            </a:extLst>
+          </p:cNvPr>
+          <p:cNvSpPr>
+            <a:spLocks noGrp="1"/>
+          </p:cNvSpPr>
+          <p:nvPr/>
+        </p:nvSpPr>
+        <p:spPr>
+          <a:xfrm>
+            <a:off x="1333500" y="3600450"/>
+            <a:ext cx="7381875" cy="428625"/>
+          </a:xfrm>
+          <a:prstGeom prst="rect">
+            <a:avLst/>
+          </a:prstGeom>
+          <a:noFill/>
+          <a:ln w="0">
+            <a:noFill/>
+          </a:ln>
+        </p:spPr>
+        <p:txBody>
+          <a:bodyPr wrap="square" lIns="0" tIns="0" rIns="0" bIns="0" anchor="t">
+            <a:noAutofit/>
+          </a:bodyPr>
+          <a:lstStyle/>
+          <a:p>
+            <a:pPr algn="l">
+              <a:spcBef>
+                <a:spcPts val="0"/>
+              </a:spcBef>
+              <a:spcAft>
+                <a:spcPts val="0"/>
+              </a:spcAft>
+              <a:defRPr sz="2400" b="1">
+                <a:solidFill>
+                  <a:srgbClr val="005F88"/>
+                </a:solidFill>
+                <a:latin typeface="Calibri"/>
+                <a:ea typeface="Calibri"/>
+                <a:cs typeface="Calibri"/>
+              </a:defRPr>
+            </a:pPr>
+            <a:r>
+              <a:rPr sz="2400" b="1" dirty="0" err="1">
+                <a:solidFill>
+                  <a:srgbClr val="005F88"/>
+                </a:solidFill>
+                <a:latin typeface="Calibri"/>
+                <a:ea typeface="Calibri"/>
+                <a:cs typeface="Calibri"/>
+              </a:rPr>
+              <a:t>Materiały</a:t>
+            </a:r>
+            <a:r>
+              <a:rPr sz="2400" b="1" dirty="0">
+                <a:solidFill>
+                  <a:srgbClr val="005F88"/>
+                </a:solidFill>
+                <a:latin typeface="Calibri"/>
+                <a:ea typeface="Calibri"/>
+                <a:cs typeface="Calibri"/>
+              </a:rPr>
+              <a:t>: </a:t>
+            </a:r>
+            <a:r>
+              <a:rPr lang="pl-PL" sz="2400" b="1" dirty="0">
+                <a:solidFill>
+                  <a:srgbClr val="005F88"/>
+                </a:solidFill>
+                <a:latin typeface="Calibri"/>
+                <a:ea typeface="Calibri"/>
+                <a:cs typeface="Calibri"/>
+              </a:rPr>
+              <a:t>https://github.com/RafLew84/ProgUM</a:t>
+            </a:r>
+            <a:endParaRPr sz="2400" b="1" dirty="0">
+              <a:solidFill>
+                <a:srgbClr val="005F88"/>
+              </a:solidFill>
+              <a:latin typeface="Calibri"/>
+              <a:ea typeface="Calibri"/>
+              <a:cs typeface="Calibri"/>
+            </a:endParaRPr>
+          </a:p>
+        </p:txBody>
+      </p:sp>
+      <p:sp>
+        <p:nvSpPr>
+          <p:cNvPr id="14" name="Literatura obowiązkowa i zalecana">
+            <a:extLst>
+              <a:ext uri="{FF2B5EF4-FFF2-40B4-BE49-F238E27FC236}">
+                <a16:creationId xmlns:a16="http://schemas.microsoft.com/office/drawing/2014/main" id="{43A0870E-4E1D-0570-0C88-B07F4CC86666}"/>
+              </a:ext>
+            </a:extLst>
+          </p:cNvPr>
+          <p:cNvSpPr>
+            <a:spLocks noGrp="1"/>
+          </p:cNvSpPr>
+          <p:nvPr/>
+        </p:nvSpPr>
+        <p:spPr>
+          <a:xfrm>
+            <a:off x="1333500" y="4524375"/>
+            <a:ext cx="7381875" cy="333375"/>
+          </a:xfrm>
+          <a:prstGeom prst="rect">
+            <a:avLst/>
+          </a:prstGeom>
+          <a:noFill/>
+          <a:ln w="0">
+            <a:noFill/>
+          </a:ln>
+        </p:spPr>
+        <p:txBody>
+          <a:bodyPr wrap="square" lIns="0" tIns="0" rIns="0" bIns="0" anchor="t">
+            <a:noAutofit/>
+          </a:bodyPr>
+          <a:lstStyle/>
+          <a:p>
+            <a:pPr algn="l">
+              <a:spcBef>
+                <a:spcPts val="0"/>
+              </a:spcBef>
+              <a:spcAft>
+                <a:spcPts val="0"/>
+              </a:spcAft>
+              <a:defRPr sz="2025" b="1">
+                <a:solidFill>
+                  <a:srgbClr val="152B37"/>
+                </a:solidFill>
+                <a:latin typeface="Calibri"/>
+                <a:ea typeface="Calibri"/>
+                <a:cs typeface="Calibri"/>
+              </a:defRPr>
+            </a:pPr>
+            <a:r>
+              <a:rPr sz="2025" b="1" dirty="0" err="1">
+                <a:solidFill>
+                  <a:srgbClr val="152B37"/>
+                </a:solidFill>
+                <a:latin typeface="Calibri"/>
+                <a:ea typeface="Calibri"/>
+                <a:cs typeface="Calibri"/>
+              </a:rPr>
+              <a:t>Literatura</a:t>
+            </a:r>
+            <a:r>
+              <a:rPr sz="2025" b="1" dirty="0">
+                <a:solidFill>
+                  <a:srgbClr val="152B37"/>
+                </a:solidFill>
+                <a:latin typeface="Calibri"/>
+                <a:ea typeface="Calibri"/>
+                <a:cs typeface="Calibri"/>
+              </a:rPr>
+              <a:t> </a:t>
+            </a:r>
+            <a:r>
+              <a:rPr sz="2025" b="1" dirty="0" err="1">
+                <a:solidFill>
+                  <a:srgbClr val="152B37"/>
+                </a:solidFill>
+                <a:latin typeface="Calibri"/>
+                <a:ea typeface="Calibri"/>
+                <a:cs typeface="Calibri"/>
+              </a:rPr>
+              <a:t>obowiązkowa</a:t>
+            </a:r>
+            <a:r>
+              <a:rPr sz="2025" b="1" dirty="0">
+                <a:solidFill>
+                  <a:srgbClr val="152B37"/>
+                </a:solidFill>
+                <a:latin typeface="Calibri"/>
+                <a:ea typeface="Calibri"/>
+                <a:cs typeface="Calibri"/>
+              </a:rPr>
+              <a:t> </a:t>
+            </a:r>
+            <a:r>
+              <a:rPr sz="2025" b="1" dirty="0" err="1">
+                <a:solidFill>
+                  <a:srgbClr val="152B37"/>
+                </a:solidFill>
+                <a:latin typeface="Calibri"/>
+                <a:ea typeface="Calibri"/>
+                <a:cs typeface="Calibri"/>
+              </a:rPr>
+              <a:t>i</a:t>
+            </a:r>
+            <a:r>
+              <a:rPr sz="2025" b="1" dirty="0">
+                <a:solidFill>
+                  <a:srgbClr val="152B37"/>
+                </a:solidFill>
+                <a:latin typeface="Calibri"/>
+                <a:ea typeface="Calibri"/>
+                <a:cs typeface="Calibri"/>
+              </a:rPr>
+              <a:t> </a:t>
+            </a:r>
+            <a:r>
+              <a:rPr sz="2025" b="1" dirty="0" err="1">
+                <a:solidFill>
+                  <a:srgbClr val="152B37"/>
+                </a:solidFill>
+                <a:latin typeface="Calibri"/>
+                <a:ea typeface="Calibri"/>
+                <a:cs typeface="Calibri"/>
+              </a:rPr>
+              <a:t>zalecana</a:t>
+            </a:r>
+            <a:endParaRPr sz="2025" b="1" dirty="0">
+              <a:solidFill>
+                <a:srgbClr val="152B37"/>
+              </a:solidFill>
+              <a:latin typeface="Calibri"/>
+              <a:ea typeface="Calibri"/>
+              <a:cs typeface="Calibri"/>
+            </a:endParaRPr>
+          </a:p>
+        </p:txBody>
+      </p:sp>
+      <p:sp>
+        <p:nvSpPr>
+          <p:cNvPr id="16" name="Dokumentacja: kotlinlang.org/docs/home.html&#10;Kurs">
+            <a:extLst>
+              <a:ext uri="{FF2B5EF4-FFF2-40B4-BE49-F238E27FC236}">
+                <a16:creationId xmlns:a16="http://schemas.microsoft.com/office/drawing/2014/main" id="{41AC9676-E130-82A4-E760-C133769424F7}"/>
+              </a:ext>
+            </a:extLst>
+          </p:cNvPr>
+          <p:cNvSpPr>
+            <a:spLocks noGrp="1"/>
+          </p:cNvSpPr>
+          <p:nvPr/>
+        </p:nvSpPr>
+        <p:spPr>
+          <a:xfrm>
+            <a:off x="1333500" y="4953000"/>
+            <a:ext cx="7381875" cy="1028700"/>
+          </a:xfrm>
+          <a:prstGeom prst="rect">
+            <a:avLst/>
+          </a:prstGeom>
+          <a:noFill/>
+          <a:ln w="0">
+            <a:noFill/>
+          </a:ln>
+        </p:spPr>
+        <p:txBody>
+          <a:bodyPr wrap="square" lIns="0" tIns="0" rIns="0" bIns="0" anchor="t">
+            <a:noAutofit/>
+          </a:bodyPr>
+          <a:lstStyle/>
+          <a:p>
+            <a:pPr algn="l">
+              <a:spcBef>
+                <a:spcPts val="0"/>
+              </a:spcBef>
+              <a:spcAft>
+                <a:spcPts val="0"/>
+              </a:spcAft>
+              <a:defRPr sz="1875" b="0">
+                <a:solidFill>
+                  <a:srgbClr val="152B37"/>
+                </a:solidFill>
+                <a:latin typeface="Calibri"/>
+                <a:ea typeface="Calibri"/>
+                <a:cs typeface="Calibri"/>
+              </a:defRPr>
+            </a:pPr>
+            <a:r>
+              <a:rPr sz="1875" b="0" dirty="0" err="1">
+                <a:solidFill>
+                  <a:srgbClr val="152B37"/>
+                </a:solidFill>
+                <a:latin typeface="Calibri"/>
+                <a:ea typeface="Calibri"/>
+                <a:cs typeface="Calibri"/>
+              </a:rPr>
+              <a:t>Dokumentacja</a:t>
+            </a:r>
+            <a:r>
+              <a:rPr sz="1875" b="0" dirty="0">
+                <a:solidFill>
+                  <a:srgbClr val="152B37"/>
+                </a:solidFill>
+                <a:latin typeface="Calibri"/>
+                <a:ea typeface="Calibri"/>
+                <a:cs typeface="Calibri"/>
+              </a:rPr>
+              <a:t>: kotlinlang.org/docs/home.html</a:t>
+            </a:r>
+          </a:p>
+          <a:p>
+            <a:pPr algn="l">
+              <a:spcBef>
+                <a:spcPts val="0"/>
+              </a:spcBef>
+              <a:spcAft>
+                <a:spcPts val="0"/>
+              </a:spcAft>
+              <a:defRPr sz="1875" b="0">
+                <a:solidFill>
+                  <a:srgbClr val="152B37"/>
+                </a:solidFill>
+                <a:latin typeface="Calibri"/>
+                <a:ea typeface="Calibri"/>
+                <a:cs typeface="Calibri"/>
+              </a:defRPr>
+            </a:pPr>
+            <a:r>
+              <a:rPr sz="1875" b="0" dirty="0" err="1">
+                <a:solidFill>
+                  <a:srgbClr val="152B37"/>
+                </a:solidFill>
+                <a:latin typeface="Calibri"/>
+                <a:ea typeface="Calibri"/>
+                <a:cs typeface="Calibri"/>
+              </a:rPr>
+              <a:t>Kursy</a:t>
+            </a:r>
+            <a:r>
+              <a:rPr sz="1875" b="0" dirty="0">
+                <a:solidFill>
+                  <a:srgbClr val="152B37"/>
+                </a:solidFill>
+                <a:latin typeface="Calibri"/>
+                <a:ea typeface="Calibri"/>
+                <a:cs typeface="Calibri"/>
+              </a:rPr>
+              <a:t>: developer.android.com/courses</a:t>
+            </a:r>
+          </a:p>
+        </p:txBody>
+      </p:sp>
+    </p:spTree>
+    <p:extLst>
+      <p:ext uri="{BB962C8B-B14F-4D97-AF65-F5344CB8AC3E}">
+        <p14:creationId xmlns:p14="http://schemas.microsoft.com/office/powerpoint/2010/main" val="4175824041"/>
+      </p:ext>
+    </p:extLst>
+  </p:cSld>
+  <p:clrMapOvr>
+    <a:masterClrMapping/>
+  </p:clrMapOvr>
+</p:sld>
+</file>
+
+<file path=ppt/slides/slide20.xml><?xml version="1.0" encoding="utf-8"?>
 <p:sld xmlns:a="http://schemas.openxmlformats.org/drawingml/2006/main" xmlns:r="http://schemas.openxmlformats.org/officeDocument/2006/relationships" xmlns:p="http://schemas.openxmlformats.org/presentationml/2006/main">
   <p:cSld>
     <p:bg>
@@ -17380,7 +16109,7 @@
 </p:sld>
 </file>
 
-<file path=ppt/slides/slide22.xml><?xml version="1.0" encoding="utf-8"?>
+<file path=ppt/slides/slide21.xml><?xml version="1.0" encoding="utf-8"?>
 <p:sld xmlns:a="http://schemas.openxmlformats.org/drawingml/2006/main" xmlns:r="http://schemas.openxmlformats.org/officeDocument/2006/relationships" xmlns:p="http://schemas.openxmlformats.org/presentationml/2006/main">
   <p:cSld>
     <p:bg>
@@ -18297,7 +17026,7 @@
 </p:sld>
 </file>
 
-<file path=ppt/slides/slide23.xml><?xml version="1.0" encoding="utf-8"?>
+<file path=ppt/slides/slide22.xml><?xml version="1.0" encoding="utf-8"?>
 <p:sld xmlns:a="http://schemas.openxmlformats.org/drawingml/2006/main" xmlns:r="http://schemas.openxmlformats.org/officeDocument/2006/relationships" xmlns:p="http://schemas.openxmlformats.org/presentationml/2006/main">
   <p:cSld>
     <p:bg>
@@ -19048,7 +17777,7 @@
 </p:sld>
 </file>
 
-<file path=ppt/slides/slide24.xml><?xml version="1.0" encoding="utf-8"?>
+<file path=ppt/slides/slide23.xml><?xml version="1.0" encoding="utf-8"?>
 <p:sld xmlns:a="http://schemas.openxmlformats.org/drawingml/2006/main" xmlns:r="http://schemas.openxmlformats.org/officeDocument/2006/relationships" xmlns:p="http://schemas.openxmlformats.org/presentationml/2006/main">
   <p:cSld>
     <p:bg>
@@ -19954,7 +18683,7 @@
 </p:sld>
 </file>
 
-<file path=ppt/slides/slide25.xml><?xml version="1.0" encoding="utf-8"?>
+<file path=ppt/slides/slide24.xml><?xml version="1.0" encoding="utf-8"?>
 <p:sld xmlns:a="http://schemas.openxmlformats.org/drawingml/2006/main" xmlns:r="http://schemas.openxmlformats.org/officeDocument/2006/relationships" xmlns:p="http://schemas.openxmlformats.org/presentationml/2006/main">
   <p:cSld>
     <p:bg>
@@ -20875,7 +19604,7 @@
 </p:sld>
 </file>
 
-<file path=ppt/slides/slide26.xml><?xml version="1.0" encoding="utf-8"?>
+<file path=ppt/slides/slide25.xml><?xml version="1.0" encoding="utf-8"?>
 <p:sld xmlns:a="http://schemas.openxmlformats.org/drawingml/2006/main" xmlns:r="http://schemas.openxmlformats.org/officeDocument/2006/relationships" xmlns:p="http://schemas.openxmlformats.org/presentationml/2006/main">
   <p:cSld>
     <p:bg>
@@ -21794,7 +20523,7 @@
 </p:sld>
 </file>
 
-<file path=ppt/slides/slide27.xml><?xml version="1.0" encoding="utf-8"?>
+<file path=ppt/slides/slide26.xml><?xml version="1.0" encoding="utf-8"?>
 <p:sld xmlns:a="http://schemas.openxmlformats.org/drawingml/2006/main" xmlns:r="http://schemas.openxmlformats.org/officeDocument/2006/relationships" xmlns:p="http://schemas.openxmlformats.org/presentationml/2006/main">
   <p:cSld>
     <p:bg>
@@ -22391,7 +21120,7 @@
 </p:sld>
 </file>
 
-<file path=ppt/slides/slide28.xml><?xml version="1.0" encoding="utf-8"?>
+<file path=ppt/slides/slide27.xml><?xml version="1.0" encoding="utf-8"?>
 <p:sld xmlns:a="http://schemas.openxmlformats.org/drawingml/2006/main" xmlns:r="http://schemas.openxmlformats.org/officeDocument/2006/relationships" xmlns:p="http://schemas.openxmlformats.org/presentationml/2006/main">
   <p:cSld>
     <p:bg>
@@ -23318,942 +22047,6 @@
     <p:extLst>
       <p:ext uri="{BB962C8B-B14F-4D97-AF65-F5344CB8AC3E}">
         <p14:creationId xmlns:p14="http://schemas.microsoft.com/office/powerpoint/2010/main" val="2157611971"/>
-      </p:ext>
-    </p:extLst>
-  </p:cSld>
-  <p:clrMapOvr>
-    <a:masterClrMapping/>
-  </p:clrMapOvr>
-</p:sld>
-</file>
-
-<file path=ppt/slides/slide29.xml><?xml version="1.0" encoding="utf-8"?>
-<p:sld xmlns:a="http://schemas.openxmlformats.org/drawingml/2006/main" xmlns:r="http://schemas.openxmlformats.org/officeDocument/2006/relationships" xmlns:p="http://schemas.openxmlformats.org/presentationml/2006/main">
-  <p:cSld>
-    <p:bg>
-      <p:bgPr>
-        <a:blipFill dpi="0" rotWithShape="0">
-          <a:blip r:embed="rId3" cstate="print"/>
-          <a:srcRect/>
-          <a:stretch>
-            <a:fillRect/>
-          </a:stretch>
-        </a:blipFill>
-        <a:effectLst/>
-      </p:bgPr>
-    </p:bg>
-    <p:spTree>
-      <p:nvGrpSpPr>
-        <p:cNvPr id="1" name="">
-          <a:extLst>
-            <a:ext uri="{FF2B5EF4-FFF2-40B4-BE49-F238E27FC236}">
-              <a16:creationId xmlns:a16="http://schemas.microsoft.com/office/drawing/2014/main" id="{C957AE89-3BBC-574F-A243-50BFDF71B8D3}"/>
-            </a:ext>
-          </a:extLst>
-        </p:cNvPr>
-        <p:cNvGrpSpPr/>
-        <p:nvPr/>
-      </p:nvGrpSpPr>
-      <p:grpSpPr>
-        <a:xfrm>
-          <a:off x="0" y="0"/>
-          <a:ext cx="0" cy="0"/>
-          <a:chOff x="0" y="0"/>
-          <a:chExt cx="0" cy="0"/>
-        </a:xfrm>
-      </p:grpSpPr>
-      <p:sp>
-        <p:nvSpPr>
-          <p:cNvPr id="2" name="Rectangle 1">
-            <a:extLst>
-              <a:ext uri="{FF2B5EF4-FFF2-40B4-BE49-F238E27FC236}">
-                <a16:creationId xmlns:a16="http://schemas.microsoft.com/office/drawing/2014/main" id="{0602DB24-698C-3A52-C77F-93B935FB96E2}"/>
-              </a:ext>
-            </a:extLst>
-          </p:cNvPr>
-          <p:cNvSpPr/>
-          <p:nvPr/>
-        </p:nvSpPr>
-        <p:spPr>
-          <a:xfrm>
-            <a:off x="1979712" y="188640"/>
-            <a:ext cx="6696744" cy="492443"/>
-          </a:xfrm>
-          <a:prstGeom prst="rect">
-            <a:avLst/>
-          </a:prstGeom>
-        </p:spPr>
-        <p:txBody>
-          <a:bodyPr wrap="square">
-            <a:spAutoFit/>
-          </a:bodyPr>
-          <a:lstStyle/>
-          <a:p>
-            <a:pPr algn="ctr"/>
-            <a:r>
-              <a:rPr lang="pl-PL" sz="2600" dirty="0">
-                <a:solidFill>
-                  <a:schemeClr val="bg1"/>
-                </a:solidFill>
-                <a:latin typeface="Verdana" panose="020B0604030504040204" pitchFamily="34" charset="0"/>
-                <a:ea typeface="Verdana" panose="020B0604030504040204" pitchFamily="34" charset="0"/>
-                <a:cs typeface="Verdana" panose="020B0604030504040204" pitchFamily="34" charset="0"/>
-              </a:rPr>
-              <a:t>Dane formularza i powrót</a:t>
-            </a:r>
-          </a:p>
-        </p:txBody>
-      </p:sp>
-      <p:sp>
-        <p:nvSpPr>
-          <p:cNvPr id="15" name="Kod Kotlin">
-            <a:extLst>
-              <a:ext uri="{FF2B5EF4-FFF2-40B4-BE49-F238E27FC236}">
-                <a16:creationId xmlns:a16="http://schemas.microsoft.com/office/drawing/2014/main" id="{CC675E67-A8B2-292B-5E19-996CBED3C893}"/>
-              </a:ext>
-            </a:extLst>
-          </p:cNvPr>
-          <p:cNvSpPr>
-            <a:spLocks noGrp="1"/>
-          </p:cNvSpPr>
-          <p:nvPr/>
-        </p:nvSpPr>
-        <p:spPr>
-          <a:xfrm>
-            <a:off x="1333500" y="1409700"/>
-            <a:ext cx="4619625" cy="2333625"/>
-          </a:xfrm>
-          <a:prstGeom prst="rect">
-            <a:avLst/>
-          </a:prstGeom>
-          <a:noFill/>
-          <a:ln w="0">
-            <a:noFill/>
-          </a:ln>
-        </p:spPr>
-        <p:txBody>
-          <a:bodyPr wrap="none" lIns="0" tIns="0" rIns="0" bIns="0" anchor="t">
-            <a:noAutofit/>
-          </a:bodyPr>
-          <a:lstStyle/>
-          <a:p>
-            <a:pPr algn="l">
-              <a:spcBef>
-                <a:spcPts val="0"/>
-              </a:spcBef>
-              <a:spcAft>
-                <a:spcPts val="0"/>
-              </a:spcAft>
-              <a:defRPr sz="1725" b="0">
-                <a:solidFill>
-                  <a:srgbClr val="202326"/>
-                </a:solidFill>
-                <a:latin typeface="Consolas"/>
-                <a:ea typeface="Consolas"/>
-                <a:cs typeface="Consolas"/>
-              </a:defRPr>
-            </a:pPr>
-            <a:r>
-              <a:rPr>
-                <a:solidFill>
-                  <a:srgbClr val="777777"/>
-                </a:solidFill>
-              </a:rPr>
-              <a:t>// Stan ponad NavHost</a:t>
-            </a:r>
-          </a:p>
-          <a:p>
-            <a:pPr algn="l">
-              <a:spcBef>
-                <a:spcPts val="0"/>
-              </a:spcBef>
-              <a:spcAft>
-                <a:spcPts val="0"/>
-              </a:spcAft>
-              <a:defRPr sz="1725" b="0">
-                <a:solidFill>
-                  <a:srgbClr val="202326"/>
-                </a:solidFill>
-                <a:latin typeface="Consolas"/>
-                <a:ea typeface="Consolas"/>
-                <a:cs typeface="Consolas"/>
-              </a:defRPr>
-            </a:pPr>
-            <a:r>
-              <a:rPr>
-                <a:solidFill>
-                  <a:srgbClr val="0033B3"/>
-                </a:solidFill>
-              </a:rPr>
-              <a:t>var</a:t>
-            </a:r>
-            <a:r>
-              <a:t> address </a:t>
-            </a:r>
-            <a:r>
-              <a:rPr>
-                <a:solidFill>
-                  <a:srgbClr val="0033B3"/>
-                </a:solidFill>
-              </a:rPr>
-              <a:t>by</a:t>
-            </a:r>
-            <a:r>
-              <a:t> rememberSaveable {</a:t>
-            </a:r>
-          </a:p>
-          <a:p>
-            <a:pPr algn="l">
-              <a:spcBef>
-                <a:spcPts val="0"/>
-              </a:spcBef>
-              <a:spcAft>
-                <a:spcPts val="0"/>
-              </a:spcAft>
-              <a:defRPr sz="1725" b="0">
-                <a:solidFill>
-                  <a:srgbClr val="202326"/>
-                </a:solidFill>
-                <a:latin typeface="Consolas"/>
-                <a:ea typeface="Consolas"/>
-                <a:cs typeface="Consolas"/>
-              </a:defRPr>
-            </a:pPr>
-            <a:r>
-              <a:t>    mutableStateOf(</a:t>
-            </a:r>
-            <a:r>
-              <a:rPr>
-                <a:solidFill>
-                  <a:srgbClr val="067D17"/>
-                </a:solidFill>
-              </a:rPr>
-              <a:t>""</a:t>
-            </a:r>
-            <a:r>
-              <a:t>)</a:t>
-            </a:r>
-          </a:p>
-          <a:p>
-            <a:pPr algn="l">
-              <a:spcBef>
-                <a:spcPts val="0"/>
-              </a:spcBef>
-              <a:spcAft>
-                <a:spcPts val="0"/>
-              </a:spcAft>
-              <a:defRPr sz="1725" b="0">
-                <a:solidFill>
-                  <a:srgbClr val="202326"/>
-                </a:solidFill>
-                <a:latin typeface="Consolas"/>
-                <a:ea typeface="Consolas"/>
-                <a:cs typeface="Consolas"/>
-              </a:defRPr>
-            </a:pPr>
-            <a:r>
-              <a:t>}</a:t>
-            </a:r>
-          </a:p>
-          <a:p>
-            <a:pPr algn="l">
-              <a:spcBef>
-                <a:spcPts val="0"/>
-              </a:spcBef>
-              <a:spcAft>
-                <a:spcPts val="0"/>
-              </a:spcAft>
-              <a:defRPr sz="1725" b="0">
-                <a:solidFill>
-                  <a:srgbClr val="202326"/>
-                </a:solidFill>
-                <a:latin typeface="Consolas"/>
-                <a:ea typeface="Consolas"/>
-                <a:cs typeface="Consolas"/>
-              </a:defRPr>
-            </a:pPr>
-            <a:r>
-              <a:rPr>
-                <a:solidFill>
-                  <a:srgbClr val="0033B3"/>
-                </a:solidFill>
-              </a:rPr>
-              <a:t>var</a:t>
-            </a:r>
-            <a:r>
-              <a:t> payment </a:t>
-            </a:r>
-            <a:r>
-              <a:rPr>
-                <a:solidFill>
-                  <a:srgbClr val="0033B3"/>
-                </a:solidFill>
-              </a:rPr>
-              <a:t>by</a:t>
-            </a:r>
-            <a:r>
-              <a:t> rememberSaveable {</a:t>
-            </a:r>
-          </a:p>
-          <a:p>
-            <a:pPr algn="l">
-              <a:spcBef>
-                <a:spcPts val="0"/>
-              </a:spcBef>
-              <a:spcAft>
-                <a:spcPts val="0"/>
-              </a:spcAft>
-              <a:defRPr sz="1725" b="0">
-                <a:solidFill>
-                  <a:srgbClr val="202326"/>
-                </a:solidFill>
-                <a:latin typeface="Consolas"/>
-                <a:ea typeface="Consolas"/>
-                <a:cs typeface="Consolas"/>
-              </a:defRPr>
-            </a:pPr>
-            <a:r>
-              <a:t>    mutableStateOf(</a:t>
-            </a:r>
-            <a:r>
-              <a:rPr>
-                <a:solidFill>
-                  <a:srgbClr val="067D17"/>
-                </a:solidFill>
-              </a:rPr>
-              <a:t>"Karta"</a:t>
-            </a:r>
-            <a:r>
-              <a:t>)</a:t>
-            </a:r>
-          </a:p>
-          <a:p>
-            <a:pPr algn="l">
-              <a:spcBef>
-                <a:spcPts val="0"/>
-              </a:spcBef>
-              <a:spcAft>
-                <a:spcPts val="0"/>
-              </a:spcAft>
-              <a:defRPr sz="1725" b="0">
-                <a:solidFill>
-                  <a:srgbClr val="202326"/>
-                </a:solidFill>
-                <a:latin typeface="Consolas"/>
-                <a:ea typeface="Consolas"/>
-                <a:cs typeface="Consolas"/>
-              </a:defRPr>
-            </a:pPr>
-            <a:r>
-              <a:t>}</a:t>
-            </a:r>
-          </a:p>
-        </p:txBody>
-      </p:sp>
-      <p:sp>
-        <p:nvSpPr>
-          <p:cNvPr id="17" name="Wartości i callbacki">
-            <a:extLst>
-              <a:ext uri="{FF2B5EF4-FFF2-40B4-BE49-F238E27FC236}">
-                <a16:creationId xmlns:a16="http://schemas.microsoft.com/office/drawing/2014/main" id="{55FFAD87-CDED-73E1-7C1E-281E3663DA71}"/>
-              </a:ext>
-            </a:extLst>
-          </p:cNvPr>
-          <p:cNvSpPr>
-            <a:spLocks noGrp="1"/>
-          </p:cNvSpPr>
-          <p:nvPr/>
-        </p:nvSpPr>
-        <p:spPr>
-          <a:xfrm>
-            <a:off x="1333500" y="3943350"/>
-            <a:ext cx="4619625" cy="342900"/>
-          </a:xfrm>
-          <a:prstGeom prst="rect">
-            <a:avLst/>
-          </a:prstGeom>
-          <a:noFill/>
-          <a:ln w="0">
-            <a:noFill/>
-          </a:ln>
-        </p:spPr>
-        <p:txBody>
-          <a:bodyPr wrap="square" lIns="0" tIns="0" rIns="0" bIns="0" anchor="t">
-            <a:noAutofit/>
-          </a:bodyPr>
-          <a:lstStyle/>
-          <a:p>
-            <a:pPr algn="ctr">
-              <a:spcBef>
-                <a:spcPts val="0"/>
-              </a:spcBef>
-              <a:spcAft>
-                <a:spcPts val="0"/>
-              </a:spcAft>
-              <a:defRPr sz="1875" b="1">
-                <a:solidFill>
-                  <a:srgbClr val="005F88"/>
-                </a:solidFill>
-                <a:latin typeface="Calibri"/>
-                <a:ea typeface="Calibri"/>
-                <a:cs typeface="Calibri"/>
-              </a:defRPr>
-            </a:pPr>
-            <a:r>
-              <a:rPr sz="2400" b="1" dirty="0" err="1">
-                <a:solidFill>
-                  <a:srgbClr val="005F88"/>
-                </a:solidFill>
-                <a:latin typeface="Calibri"/>
-                <a:ea typeface="Calibri"/>
-                <a:cs typeface="Calibri"/>
-              </a:rPr>
-              <a:t>Wartości</a:t>
-            </a:r>
-            <a:r>
-              <a:rPr sz="2400" b="1" dirty="0">
-                <a:solidFill>
-                  <a:srgbClr val="005F88"/>
-                </a:solidFill>
-                <a:latin typeface="Calibri"/>
-                <a:ea typeface="Calibri"/>
-                <a:cs typeface="Calibri"/>
-              </a:rPr>
-              <a:t> </a:t>
-            </a:r>
-            <a:r>
-              <a:rPr sz="2400" b="1" dirty="0" err="1">
-                <a:solidFill>
-                  <a:srgbClr val="005F88"/>
-                </a:solidFill>
-                <a:latin typeface="Calibri"/>
-                <a:ea typeface="Calibri"/>
-                <a:cs typeface="Calibri"/>
-              </a:rPr>
-              <a:t>i</a:t>
-            </a:r>
-            <a:r>
-              <a:rPr sz="2400" b="1" dirty="0">
-                <a:solidFill>
-                  <a:srgbClr val="005F88"/>
-                </a:solidFill>
-                <a:latin typeface="Calibri"/>
-                <a:ea typeface="Calibri"/>
-                <a:cs typeface="Calibri"/>
-              </a:rPr>
-              <a:t> </a:t>
-            </a:r>
-            <a:r>
-              <a:rPr sz="2400" b="1" dirty="0" err="1">
-                <a:solidFill>
-                  <a:srgbClr val="005F88"/>
-                </a:solidFill>
-                <a:latin typeface="Calibri"/>
-                <a:ea typeface="Calibri"/>
-                <a:cs typeface="Calibri"/>
-              </a:rPr>
-              <a:t>callbacki</a:t>
-            </a:r>
-            <a:endParaRPr sz="2400" b="1" dirty="0">
-              <a:solidFill>
-                <a:srgbClr val="005F88"/>
-              </a:solidFill>
-              <a:latin typeface="Calibri"/>
-              <a:ea typeface="Calibri"/>
-              <a:cs typeface="Calibri"/>
-            </a:endParaRPr>
-          </a:p>
-        </p:txBody>
-      </p:sp>
-      <p:sp>
-        <p:nvSpPr>
-          <p:cNvPr id="19" name="Ekrany odczytują wspólny stan&#10;i zgłaszają jego z">
-            <a:extLst>
-              <a:ext uri="{FF2B5EF4-FFF2-40B4-BE49-F238E27FC236}">
-                <a16:creationId xmlns:a16="http://schemas.microsoft.com/office/drawing/2014/main" id="{438FB122-89D5-9174-37A6-F0912363E525}"/>
-              </a:ext>
-            </a:extLst>
-          </p:cNvPr>
-          <p:cNvSpPr>
-            <a:spLocks noGrp="1"/>
-          </p:cNvSpPr>
-          <p:nvPr/>
-        </p:nvSpPr>
-        <p:spPr>
-          <a:xfrm>
-            <a:off x="1333500" y="4324350"/>
-            <a:ext cx="4619625" cy="1047750"/>
-          </a:xfrm>
-          <a:prstGeom prst="rect">
-            <a:avLst/>
-          </a:prstGeom>
-          <a:noFill/>
-          <a:ln w="0">
-            <a:noFill/>
-          </a:ln>
-        </p:spPr>
-        <p:txBody>
-          <a:bodyPr wrap="square" lIns="0" tIns="0" rIns="0" bIns="0" anchor="t">
-            <a:noAutofit/>
-          </a:bodyPr>
-          <a:lstStyle/>
-          <a:p>
-            <a:pPr algn="l">
-              <a:spcBef>
-                <a:spcPts val="0"/>
-              </a:spcBef>
-              <a:spcAft>
-                <a:spcPts val="0"/>
-              </a:spcAft>
-              <a:defRPr sz="1875" b="0">
-                <a:solidFill>
-                  <a:srgbClr val="152B37"/>
-                </a:solidFill>
-                <a:latin typeface="Calibri"/>
-                <a:ea typeface="Calibri"/>
-                <a:cs typeface="Calibri"/>
-              </a:defRPr>
-            </a:pPr>
-            <a:r>
-              <a:rPr sz="1875" b="0">
-                <a:solidFill>
-                  <a:srgbClr val="152B37"/>
-                </a:solidFill>
-                <a:latin typeface="Calibri"/>
-                <a:ea typeface="Calibri"/>
-                <a:cs typeface="Calibri"/>
-              </a:rPr>
-              <a:t>Ekrany odczytują wspólny stan</a:t>
-            </a:r>
-          </a:p>
-          <a:p>
-            <a:pPr algn="l">
-              <a:spcBef>
-                <a:spcPts val="0"/>
-              </a:spcBef>
-              <a:spcAft>
-                <a:spcPts val="0"/>
-              </a:spcAft>
-              <a:defRPr sz="1875" b="0">
-                <a:solidFill>
-                  <a:srgbClr val="152B37"/>
-                </a:solidFill>
-                <a:latin typeface="Calibri"/>
-                <a:ea typeface="Calibri"/>
-                <a:cs typeface="Calibri"/>
-              </a:defRPr>
-            </a:pPr>
-            <a:r>
-              <a:rPr sz="1875" b="0">
-                <a:solidFill>
-                  <a:srgbClr val="152B37"/>
-                </a:solidFill>
-                <a:latin typeface="Calibri"/>
-                <a:ea typeface="Calibri"/>
-                <a:cs typeface="Calibri"/>
-              </a:rPr>
-              <a:t>i zgłaszają jego zmiany.</a:t>
-            </a:r>
-          </a:p>
-        </p:txBody>
-      </p:sp>
-      <p:sp>
-        <p:nvSpPr>
-          <p:cNvPr id="21" name="Powrót do poprzedniego kroku&#10;nie kasuje danych. ">
-            <a:extLst>
-              <a:ext uri="{FF2B5EF4-FFF2-40B4-BE49-F238E27FC236}">
-                <a16:creationId xmlns:a16="http://schemas.microsoft.com/office/drawing/2014/main" id="{0CE24C6A-C524-7347-ADF6-45F7C9F22592}"/>
-              </a:ext>
-            </a:extLst>
-          </p:cNvPr>
-          <p:cNvSpPr>
-            <a:spLocks noGrp="1"/>
-          </p:cNvSpPr>
-          <p:nvPr/>
-        </p:nvSpPr>
-        <p:spPr>
-          <a:xfrm>
-            <a:off x="1333500" y="5781675"/>
-            <a:ext cx="4648200" cy="790575"/>
-          </a:xfrm>
-          <a:prstGeom prst="rect">
-            <a:avLst/>
-          </a:prstGeom>
-          <a:noFill/>
-          <a:ln w="0">
-            <a:noFill/>
-          </a:ln>
-        </p:spPr>
-        <p:txBody>
-          <a:bodyPr wrap="square" lIns="0" tIns="0" rIns="0" bIns="0" anchor="t">
-            <a:noAutofit/>
-          </a:bodyPr>
-          <a:lstStyle/>
-          <a:p>
-            <a:pPr algn="l">
-              <a:spcBef>
-                <a:spcPts val="0"/>
-              </a:spcBef>
-              <a:spcAft>
-                <a:spcPts val="0"/>
-              </a:spcAft>
-              <a:defRPr sz="1650" b="0">
-                <a:solidFill>
-                  <a:srgbClr val="455661"/>
-                </a:solidFill>
-                <a:latin typeface="Calibri"/>
-                <a:ea typeface="Calibri"/>
-                <a:cs typeface="Calibri"/>
-              </a:defRPr>
-            </a:pPr>
-            <a:r>
-              <a:rPr sz="2000" b="0" dirty="0" err="1">
-                <a:solidFill>
-                  <a:srgbClr val="455661"/>
-                </a:solidFill>
-                <a:latin typeface="Calibri"/>
-                <a:ea typeface="Calibri"/>
-                <a:cs typeface="Calibri"/>
-              </a:rPr>
-              <a:t>Powrót</a:t>
-            </a:r>
-            <a:r>
-              <a:rPr sz="2000" b="0" dirty="0">
-                <a:solidFill>
-                  <a:srgbClr val="455661"/>
-                </a:solidFill>
-                <a:latin typeface="Calibri"/>
-                <a:ea typeface="Calibri"/>
-                <a:cs typeface="Calibri"/>
-              </a:rPr>
-              <a:t> do </a:t>
-            </a:r>
-            <a:r>
-              <a:rPr sz="2000" b="0" dirty="0" err="1">
-                <a:solidFill>
-                  <a:srgbClr val="455661"/>
-                </a:solidFill>
-                <a:latin typeface="Calibri"/>
-                <a:ea typeface="Calibri"/>
-                <a:cs typeface="Calibri"/>
-              </a:rPr>
-              <a:t>poprzedniego</a:t>
-            </a:r>
-            <a:r>
-              <a:rPr sz="2000" b="0" dirty="0">
-                <a:solidFill>
-                  <a:srgbClr val="455661"/>
-                </a:solidFill>
-                <a:latin typeface="Calibri"/>
-                <a:ea typeface="Calibri"/>
-                <a:cs typeface="Calibri"/>
-              </a:rPr>
-              <a:t> </a:t>
-            </a:r>
-            <a:r>
-              <a:rPr sz="2000" b="0" dirty="0" err="1">
-                <a:solidFill>
-                  <a:srgbClr val="455661"/>
-                </a:solidFill>
-                <a:latin typeface="Calibri"/>
-                <a:ea typeface="Calibri"/>
-                <a:cs typeface="Calibri"/>
-              </a:rPr>
-              <a:t>kroku</a:t>
-            </a:r>
-            <a:endParaRPr sz="2000" b="0" dirty="0">
-              <a:solidFill>
-                <a:srgbClr val="455661"/>
-              </a:solidFill>
-              <a:latin typeface="Calibri"/>
-              <a:ea typeface="Calibri"/>
-              <a:cs typeface="Calibri"/>
-            </a:endParaRPr>
-          </a:p>
-          <a:p>
-            <a:pPr algn="l">
-              <a:spcBef>
-                <a:spcPts val="0"/>
-              </a:spcBef>
-              <a:spcAft>
-                <a:spcPts val="0"/>
-              </a:spcAft>
-              <a:defRPr sz="1650" b="0">
-                <a:solidFill>
-                  <a:srgbClr val="455661"/>
-                </a:solidFill>
-                <a:latin typeface="Calibri"/>
-                <a:ea typeface="Calibri"/>
-                <a:cs typeface="Calibri"/>
-              </a:defRPr>
-            </a:pPr>
-            <a:r>
-              <a:rPr sz="2000" b="0" dirty="0" err="1">
-                <a:solidFill>
-                  <a:srgbClr val="455661"/>
-                </a:solidFill>
-                <a:latin typeface="Calibri"/>
-                <a:ea typeface="Calibri"/>
-                <a:cs typeface="Calibri"/>
-              </a:rPr>
-              <a:t>nie</a:t>
-            </a:r>
-            <a:r>
-              <a:rPr sz="2000" b="0" dirty="0">
-                <a:solidFill>
-                  <a:srgbClr val="455661"/>
-                </a:solidFill>
-                <a:latin typeface="Calibri"/>
-                <a:ea typeface="Calibri"/>
-                <a:cs typeface="Calibri"/>
-              </a:rPr>
-              <a:t> </a:t>
-            </a:r>
-            <a:r>
-              <a:rPr sz="2000" b="0" dirty="0" err="1">
-                <a:solidFill>
-                  <a:srgbClr val="455661"/>
-                </a:solidFill>
-                <a:latin typeface="Calibri"/>
-                <a:ea typeface="Calibri"/>
-                <a:cs typeface="Calibri"/>
-              </a:rPr>
-              <a:t>kasuje</a:t>
-            </a:r>
-            <a:r>
-              <a:rPr sz="2000" b="0" dirty="0">
-                <a:solidFill>
-                  <a:srgbClr val="455661"/>
-                </a:solidFill>
-                <a:latin typeface="Calibri"/>
-                <a:ea typeface="Calibri"/>
-                <a:cs typeface="Calibri"/>
-              </a:rPr>
-              <a:t> </a:t>
-            </a:r>
-            <a:r>
-              <a:rPr sz="2000" b="0" dirty="0" err="1">
-                <a:solidFill>
-                  <a:srgbClr val="455661"/>
-                </a:solidFill>
-                <a:latin typeface="Calibri"/>
-                <a:ea typeface="Calibri"/>
-                <a:cs typeface="Calibri"/>
-              </a:rPr>
-              <a:t>danych</a:t>
-            </a:r>
-            <a:r>
-              <a:rPr sz="2000" b="0" dirty="0">
-                <a:solidFill>
-                  <a:srgbClr val="455661"/>
-                </a:solidFill>
-                <a:latin typeface="Calibri"/>
-                <a:ea typeface="Calibri"/>
-                <a:cs typeface="Calibri"/>
-              </a:rPr>
-              <a:t>. Po </a:t>
-            </a:r>
-            <a:r>
-              <a:rPr sz="2000" b="0" dirty="0" err="1">
-                <a:solidFill>
-                  <a:srgbClr val="455661"/>
-                </a:solidFill>
-                <a:latin typeface="Calibri"/>
-                <a:ea typeface="Calibri"/>
-                <a:cs typeface="Calibri"/>
-              </a:rPr>
-              <a:t>potwierdzeniu</a:t>
-            </a:r>
-            <a:endParaRPr sz="2000" b="0" dirty="0">
-              <a:solidFill>
-                <a:srgbClr val="455661"/>
-              </a:solidFill>
-              <a:latin typeface="Calibri"/>
-              <a:ea typeface="Calibri"/>
-              <a:cs typeface="Calibri"/>
-            </a:endParaRPr>
-          </a:p>
-          <a:p>
-            <a:pPr algn="l">
-              <a:spcBef>
-                <a:spcPts val="0"/>
-              </a:spcBef>
-              <a:spcAft>
-                <a:spcPts val="0"/>
-              </a:spcAft>
-              <a:defRPr sz="1650" b="0">
-                <a:solidFill>
-                  <a:srgbClr val="455661"/>
-                </a:solidFill>
-                <a:latin typeface="Calibri"/>
-                <a:ea typeface="Calibri"/>
-                <a:cs typeface="Calibri"/>
-              </a:defRPr>
-            </a:pPr>
-            <a:r>
-              <a:rPr sz="2000" b="0" dirty="0" err="1">
-                <a:solidFill>
-                  <a:srgbClr val="455661"/>
-                </a:solidFill>
-                <a:latin typeface="Calibri"/>
-                <a:ea typeface="Calibri"/>
-                <a:cs typeface="Calibri"/>
-              </a:rPr>
-              <a:t>zamówienia</a:t>
-            </a:r>
-            <a:r>
-              <a:rPr sz="2000" b="0" dirty="0">
-                <a:solidFill>
-                  <a:srgbClr val="455661"/>
-                </a:solidFill>
-                <a:latin typeface="Calibri"/>
-                <a:ea typeface="Calibri"/>
-                <a:cs typeface="Calibri"/>
-              </a:rPr>
-              <a:t> </a:t>
-            </a:r>
-            <a:r>
-              <a:rPr sz="2000" b="0" dirty="0" err="1">
-                <a:solidFill>
-                  <a:srgbClr val="455661"/>
-                </a:solidFill>
-                <a:latin typeface="Calibri"/>
-                <a:ea typeface="Calibri"/>
-                <a:cs typeface="Calibri"/>
-              </a:rPr>
-              <a:t>czyścimy</a:t>
-            </a:r>
-            <a:r>
-              <a:rPr sz="2000" b="0" dirty="0">
-                <a:solidFill>
-                  <a:srgbClr val="455661"/>
-                </a:solidFill>
-                <a:latin typeface="Calibri"/>
-                <a:ea typeface="Calibri"/>
-                <a:cs typeface="Calibri"/>
-              </a:rPr>
-              <a:t> </a:t>
-            </a:r>
-            <a:r>
-              <a:rPr sz="2000" b="0" dirty="0" err="1">
-                <a:solidFill>
-                  <a:srgbClr val="455661"/>
-                </a:solidFill>
-                <a:latin typeface="Calibri"/>
-                <a:ea typeface="Calibri"/>
-                <a:cs typeface="Calibri"/>
-              </a:rPr>
-              <a:t>formularz</a:t>
-            </a:r>
-            <a:r>
-              <a:rPr sz="2000" b="0" dirty="0">
-                <a:solidFill>
-                  <a:srgbClr val="455661"/>
-                </a:solidFill>
-                <a:latin typeface="Calibri"/>
-                <a:ea typeface="Calibri"/>
-                <a:cs typeface="Calibri"/>
-              </a:rPr>
-              <a:t>.</a:t>
-            </a:r>
-          </a:p>
-        </p:txBody>
-      </p:sp>
-      <p:pic>
-        <p:nvPicPr>
-          <p:cNvPr id="23" name="Obraz 22">
-            <a:extLst>
-              <a:ext uri="{FF2B5EF4-FFF2-40B4-BE49-F238E27FC236}">
-                <a16:creationId xmlns:a16="http://schemas.microsoft.com/office/drawing/2014/main" id="{C5E739C0-C981-427F-D0E4-2C7DCF60082B}"/>
-              </a:ext>
-            </a:extLst>
-          </p:cNvPr>
-          <p:cNvPicPr>
-            <a:picLocks noChangeAspect="1"/>
-          </p:cNvPicPr>
-          <p:nvPr/>
-        </p:nvPicPr>
-        <p:blipFill>
-          <a:blip r:embed="rId4"/>
-          <a:stretch/>
-        </p:blipFill>
-        <p:spPr>
-          <a:xfrm>
-            <a:off x="6229350" y="1304925"/>
-            <a:ext cx="2571750" cy="4572000"/>
-          </a:xfrm>
-          <a:prstGeom prst="rect">
-            <a:avLst/>
-          </a:prstGeom>
-        </p:spPr>
-      </p:pic>
-      <p:sp>
-        <p:nvSpPr>
-          <p:cNvPr id="25" name="Adres zachowany po powrocie z płatności">
-            <a:extLst>
-              <a:ext uri="{FF2B5EF4-FFF2-40B4-BE49-F238E27FC236}">
-                <a16:creationId xmlns:a16="http://schemas.microsoft.com/office/drawing/2014/main" id="{5A999EB7-73BD-4D68-8D73-4D1077ED01FA}"/>
-              </a:ext>
-            </a:extLst>
-          </p:cNvPr>
-          <p:cNvSpPr>
-            <a:spLocks noGrp="1"/>
-          </p:cNvSpPr>
-          <p:nvPr/>
-        </p:nvSpPr>
-        <p:spPr>
-          <a:xfrm>
-            <a:off x="6229350" y="6038850"/>
-            <a:ext cx="2571750" cy="552450"/>
-          </a:xfrm>
-          <a:prstGeom prst="rect">
-            <a:avLst/>
-          </a:prstGeom>
-          <a:noFill/>
-          <a:ln w="0">
-            <a:noFill/>
-          </a:ln>
-        </p:spPr>
-        <p:txBody>
-          <a:bodyPr wrap="square" lIns="0" tIns="0" rIns="0" bIns="0" anchor="t">
-            <a:noAutofit/>
-          </a:bodyPr>
-          <a:lstStyle/>
-          <a:p>
-            <a:pPr algn="ctr">
-              <a:spcBef>
-                <a:spcPts val="0"/>
-              </a:spcBef>
-              <a:spcAft>
-                <a:spcPts val="0"/>
-              </a:spcAft>
-              <a:defRPr sz="1575" b="0">
-                <a:solidFill>
-                  <a:srgbClr val="455661"/>
-                </a:solidFill>
-                <a:latin typeface="Calibri"/>
-                <a:ea typeface="Calibri"/>
-                <a:cs typeface="Calibri"/>
-              </a:defRPr>
-            </a:pPr>
-            <a:r>
-              <a:rPr sz="1575" b="0">
-                <a:solidFill>
-                  <a:srgbClr val="455661"/>
-                </a:solidFill>
-                <a:latin typeface="Calibri"/>
-                <a:ea typeface="Calibri"/>
-                <a:cs typeface="Calibri"/>
-              </a:rPr>
-              <a:t>Adres zachowany po powrocie z płatności</a:t>
-            </a:r>
-          </a:p>
-        </p:txBody>
-      </p:sp>
-    </p:spTree>
-    <p:extLst>
-      <p:ext uri="{BB962C8B-B14F-4D97-AF65-F5344CB8AC3E}">
-        <p14:creationId xmlns:p14="http://schemas.microsoft.com/office/powerpoint/2010/main" val="680991283"/>
       </p:ext>
     </p:extLst>
   </p:cSld>
@@ -30942,7 +28735,7 @@
     <p:bg>
       <p:bgPr>
         <a:blipFill dpi="0" rotWithShape="0">
-          <a:blip r:embed="rId5" cstate="print"/>
+          <a:blip r:embed="rId3" cstate="print"/>
           <a:srcRect/>
           <a:stretch>
             <a:fillRect/>
@@ -31008,242 +28801,964 @@
                 <a:ea typeface="Verdana" panose="020B0604030504040204" pitchFamily="34" charset="0"/>
                 <a:cs typeface="Verdana" panose="020B0604030504040204" pitchFamily="34" charset="0"/>
               </a:rPr>
-              <a:t>Zaawansowana Nawigacja - Szuflada</a:t>
+              <a:t>Konfiguracja Projektu</a:t>
             </a:r>
           </a:p>
         </p:txBody>
       </p:sp>
       <p:sp>
         <p:nvSpPr>
-          <p:cNvPr id="3" name="pole tekstowe 2">
+          <p:cNvPr id="5" name="Android Studio: Empty Activity&#10;Projekt Kotlin z ">
             <a:extLst>
               <a:ext uri="{FF2B5EF4-FFF2-40B4-BE49-F238E27FC236}">
-                <a16:creationId xmlns:a16="http://schemas.microsoft.com/office/drawing/2014/main" id="{D11E4D2F-D6F9-065C-1D87-1026D1FB4B25}"/>
+                <a16:creationId xmlns:a16="http://schemas.microsoft.com/office/drawing/2014/main" id="{B137BD04-70B9-C23D-8936-C4AD7A9C5424}"/>
               </a:ext>
             </a:extLst>
           </p:cNvPr>
-          <p:cNvSpPr txBox="1"/>
+          <p:cNvSpPr>
+            <a:spLocks noGrp="1"/>
+          </p:cNvSpPr>
           <p:nvPr/>
         </p:nvSpPr>
         <p:spPr>
           <a:xfrm>
-            <a:off x="1033753" y="796886"/>
-            <a:ext cx="7848872" cy="584775"/>
+            <a:off x="1333500" y="1171575"/>
+            <a:ext cx="7381875" cy="704850"/>
           </a:xfrm>
           <a:prstGeom prst="rect">
             <a:avLst/>
           </a:prstGeom>
           <a:noFill/>
+          <a:ln w="0">
+            <a:noFill/>
+          </a:ln>
         </p:spPr>
         <p:txBody>
-          <a:bodyPr wrap="square" rtlCol="0">
-            <a:spAutoFit/>
+          <a:bodyPr wrap="square" lIns="0" tIns="0" rIns="0" bIns="0" anchor="t">
+            <a:noAutofit/>
           </a:bodyPr>
           <a:lstStyle/>
           <a:p>
-            <a:pPr algn="just"/>
-            <a:r>
-              <a:rPr lang="pl-PL" sz="1600" b="1" dirty="0"/>
-              <a:t>Drawer</a:t>
-            </a:r>
-            <a:r>
-              <a:rPr lang="pl-PL" sz="1600" dirty="0"/>
-              <a:t> (</a:t>
-            </a:r>
-            <a:r>
-              <a:rPr lang="pl-PL" sz="1600" b="1" dirty="0"/>
-              <a:t>szuflada nawigacyjna</a:t>
-            </a:r>
-            <a:r>
-              <a:rPr lang="pl-PL" sz="1600" dirty="0"/>
-              <a:t>) to element interfejsu użytkownika, który działa jak wysuwane z boku (najczęściej z lewej krawędzi ekranu) menu.</a:t>
+            <a:pPr algn="l">
+              <a:spcBef>
+                <a:spcPts val="0"/>
+              </a:spcBef>
+              <a:spcAft>
+                <a:spcPts val="0"/>
+              </a:spcAft>
+              <a:defRPr sz="2100" b="0">
+                <a:solidFill>
+                  <a:srgbClr val="152B37"/>
+                </a:solidFill>
+                <a:latin typeface="Calibri"/>
+                <a:ea typeface="Calibri"/>
+                <a:cs typeface="Calibri"/>
+              </a:defRPr>
+            </a:pPr>
+            <a:r>
+              <a:rPr sz="2400" b="0" dirty="0">
+                <a:solidFill>
+                  <a:srgbClr val="152B37"/>
+                </a:solidFill>
+                <a:latin typeface="Calibri"/>
+                <a:ea typeface="Calibri"/>
+                <a:cs typeface="Calibri"/>
+              </a:rPr>
+              <a:t>Android Studio: Empty Activity</a:t>
+            </a:r>
+          </a:p>
+          <a:p>
+            <a:pPr algn="l">
+              <a:spcBef>
+                <a:spcPts val="0"/>
+              </a:spcBef>
+              <a:spcAft>
+                <a:spcPts val="0"/>
+              </a:spcAft>
+              <a:defRPr sz="2100" b="0">
+                <a:solidFill>
+                  <a:srgbClr val="152B37"/>
+                </a:solidFill>
+                <a:latin typeface="Calibri"/>
+                <a:ea typeface="Calibri"/>
+                <a:cs typeface="Calibri"/>
+              </a:defRPr>
+            </a:pPr>
+            <a:r>
+              <a:rPr sz="2400" b="0" dirty="0">
+                <a:solidFill>
+                  <a:srgbClr val="152B37"/>
+                </a:solidFill>
+                <a:latin typeface="Calibri"/>
+                <a:ea typeface="Calibri"/>
+                <a:cs typeface="Calibri"/>
+              </a:rPr>
+              <a:t>Projekt Kotlin z </a:t>
+            </a:r>
+            <a:r>
+              <a:rPr sz="2400" b="0" dirty="0" err="1">
+                <a:solidFill>
+                  <a:srgbClr val="152B37"/>
+                </a:solidFill>
+                <a:latin typeface="Calibri"/>
+                <a:ea typeface="Calibri"/>
+                <a:cs typeface="Calibri"/>
+              </a:rPr>
+              <a:t>interfejsem</a:t>
+            </a:r>
+            <a:r>
+              <a:rPr sz="2400" b="0" dirty="0">
+                <a:solidFill>
+                  <a:srgbClr val="152B37"/>
+                </a:solidFill>
+                <a:latin typeface="Calibri"/>
+                <a:ea typeface="Calibri"/>
+                <a:cs typeface="Calibri"/>
+              </a:rPr>
+              <a:t> Jetpack Compose</a:t>
             </a:r>
           </a:p>
         </p:txBody>
       </p:sp>
-      <p:pic>
-        <p:nvPicPr>
-          <p:cNvPr id="8" name="bandicam 2025-07-19 16-41-36-897">
-            <a:hlinkClick r:id="" action="ppaction://media"/>
+      <p:graphicFrame>
+        <p:nvGraphicFramePr>
+          <p:cNvPr id="7" name="Tabela 6">
             <a:extLst>
               <a:ext uri="{FF2B5EF4-FFF2-40B4-BE49-F238E27FC236}">
-                <a16:creationId xmlns:a16="http://schemas.microsoft.com/office/drawing/2014/main" id="{836B052C-106D-FCEB-0A96-C39381F3DD60}"/>
+                <a16:creationId xmlns:a16="http://schemas.microsoft.com/office/drawing/2014/main" id="{85BFF9E0-2E1A-12BD-A901-83B68005EA0C}"/>
               </a:ext>
             </a:extLst>
           </p:cNvPr>
-          <p:cNvPicPr>
-            <a:picLocks noChangeAspect="1"/>
-          </p:cNvPicPr>
+          <p:cNvGraphicFramePr/>
           <p:nvPr>
-            <a:videoFile r:link="rId2"/>
             <p:extLst>
-              <p:ext uri="{DAA4B4D4-6D71-4841-9C94-3DE7FCFB9230}">
-                <p14:media xmlns:p14="http://schemas.microsoft.com/office/powerpoint/2010/main" r:embed="rId1"/>
+              <p:ext uri="{D42A27DB-BD31-4B8C-83A1-F6EECF244321}">
+                <p14:modId xmlns:p14="http://schemas.microsoft.com/office/powerpoint/2010/main" val="2981709760"/>
               </p:ext>
             </p:extLst>
           </p:nvPr>
-        </p:nvPicPr>
-        <p:blipFill>
-          <a:blip r:embed="rId6"/>
-          <a:stretch>
-            <a:fillRect/>
-          </a:stretch>
-        </p:blipFill>
+        </p:nvGraphicFramePr>
+        <p:xfrm>
+          <a:off x="1333500" y="2324100"/>
+          <a:ext cx="7381875" cy="2952752"/>
+        </p:xfrm>
+        <a:graphic>
+          <a:graphicData uri="http://schemas.openxmlformats.org/drawingml/2006/table">
+            <a:tbl>
+              <a:tblPr/>
+              <a:tblGrid>
+                <a:gridCol w="3333750">
+                  <a:extLst>
+                    <a:ext uri="{9D8B030D-6E8A-4147-A177-3AD203B41FA5}">
+                      <a16:colId xmlns:a16="http://schemas.microsoft.com/office/drawing/2014/main" val="20000"/>
+                    </a:ext>
+                  </a:extLst>
+                </a:gridCol>
+                <a:gridCol w="4048125">
+                  <a:extLst>
+                    <a:ext uri="{9D8B030D-6E8A-4147-A177-3AD203B41FA5}">
+                      <a16:colId xmlns:a16="http://schemas.microsoft.com/office/drawing/2014/main" val="20001"/>
+                    </a:ext>
+                  </a:extLst>
+                </a:gridCol>
+              </a:tblGrid>
+              <a:tr h="738188">
+                <a:tc>
+                  <a:txBody>
+                    <a:bodyPr/>
+                    <a:lstStyle/>
+                    <a:p>
+                      <a:pPr algn="ctr"/>
+                      <a:r>
+                        <a:rPr sz="2800" b="1" dirty="0">
+                          <a:solidFill>
+                            <a:srgbClr val="FFFFFF"/>
+                          </a:solidFill>
+                          <a:latin typeface="Calibri"/>
+                          <a:ea typeface="Calibri"/>
+                          <a:cs typeface="Calibri"/>
+                        </a:rPr>
+                        <a:t>Plik</a:t>
+                      </a:r>
+                    </a:p>
+                  </a:txBody>
+                  <a:tcPr anchor="ctr">
+                    <a:solidFill>
+                      <a:srgbClr val="005F88"/>
+                    </a:solidFill>
+                  </a:tcPr>
+                </a:tc>
+                <a:tc>
+                  <a:txBody>
+                    <a:bodyPr/>
+                    <a:lstStyle/>
+                    <a:p>
+                      <a:pPr algn="ctr"/>
+                      <a:r>
+                        <a:rPr sz="2800" b="1" dirty="0">
+                          <a:solidFill>
+                            <a:srgbClr val="FFFFFF"/>
+                          </a:solidFill>
+                          <a:latin typeface="Calibri"/>
+                          <a:ea typeface="Calibri"/>
+                          <a:cs typeface="Calibri"/>
+                        </a:rPr>
+                        <a:t>Rola</a:t>
+                      </a:r>
+                    </a:p>
+                  </a:txBody>
+                  <a:tcPr anchor="ctr">
+                    <a:solidFill>
+                      <a:srgbClr val="005F88"/>
+                    </a:solidFill>
+                  </a:tcPr>
+                </a:tc>
+                <a:extLst>
+                  <a:ext uri="{0D108BD9-81ED-4DB2-BD59-A6C34878D82A}">
+                    <a16:rowId xmlns:a16="http://schemas.microsoft.com/office/drawing/2014/main" val="10000"/>
+                  </a:ext>
+                </a:extLst>
+              </a:tr>
+              <a:tr h="738188">
+                <a:tc>
+                  <a:txBody>
+                    <a:bodyPr/>
+                    <a:lstStyle/>
+                    <a:p>
+                      <a:r>
+                        <a:rPr sz="2000" b="0" dirty="0" err="1">
+                          <a:solidFill>
+                            <a:srgbClr val="152B37"/>
+                          </a:solidFill>
+                          <a:latin typeface="Calibri"/>
+                          <a:ea typeface="Calibri"/>
+                          <a:cs typeface="Calibri"/>
+                        </a:rPr>
+                        <a:t>gradle</a:t>
+                      </a:r>
+                      <a:r>
+                        <a:rPr sz="2000" b="0" dirty="0">
+                          <a:solidFill>
+                            <a:srgbClr val="152B37"/>
+                          </a:solidFill>
+                          <a:latin typeface="Calibri"/>
+                          <a:ea typeface="Calibri"/>
+                          <a:cs typeface="Calibri"/>
+                        </a:rPr>
+                        <a:t>/</a:t>
+                      </a:r>
+                      <a:r>
+                        <a:rPr sz="2000" b="0" dirty="0" err="1">
+                          <a:solidFill>
+                            <a:srgbClr val="152B37"/>
+                          </a:solidFill>
+                          <a:latin typeface="Calibri"/>
+                          <a:ea typeface="Calibri"/>
+                          <a:cs typeface="Calibri"/>
+                        </a:rPr>
+                        <a:t>libs.versions.toml</a:t>
+                      </a:r>
+                      <a:endParaRPr sz="2000" b="0" dirty="0">
+                        <a:solidFill>
+                          <a:srgbClr val="152B37"/>
+                        </a:solidFill>
+                        <a:latin typeface="Calibri"/>
+                        <a:ea typeface="Calibri"/>
+                        <a:cs typeface="Calibri"/>
+                      </a:endParaRPr>
+                    </a:p>
+                  </a:txBody>
+                  <a:tcPr anchor="ctr">
+                    <a:solidFill>
+                      <a:srgbClr val="FFFFFF"/>
+                    </a:solidFill>
+                  </a:tcPr>
+                </a:tc>
+                <a:tc>
+                  <a:txBody>
+                    <a:bodyPr/>
+                    <a:lstStyle/>
+                    <a:p>
+                      <a:r>
+                        <a:rPr sz="2000" b="0" dirty="0" err="1">
+                          <a:solidFill>
+                            <a:srgbClr val="152B37"/>
+                          </a:solidFill>
+                          <a:latin typeface="Calibri"/>
+                          <a:ea typeface="Calibri"/>
+                          <a:cs typeface="Calibri"/>
+                        </a:rPr>
+                        <a:t>Wersje</a:t>
+                      </a:r>
+                      <a:r>
+                        <a:rPr sz="2000" b="0" dirty="0">
+                          <a:solidFill>
+                            <a:srgbClr val="152B37"/>
+                          </a:solidFill>
+                          <a:latin typeface="Calibri"/>
+                          <a:ea typeface="Calibri"/>
+                          <a:cs typeface="Calibri"/>
+                        </a:rPr>
+                        <a:t> </a:t>
+                      </a:r>
+                      <a:r>
+                        <a:rPr sz="2000" b="0" dirty="0" err="1">
+                          <a:solidFill>
+                            <a:srgbClr val="152B37"/>
+                          </a:solidFill>
+                          <a:latin typeface="Calibri"/>
+                          <a:ea typeface="Calibri"/>
+                          <a:cs typeface="Calibri"/>
+                        </a:rPr>
+                        <a:t>i</a:t>
+                      </a:r>
+                      <a:r>
+                        <a:rPr sz="2000" b="0" dirty="0">
+                          <a:solidFill>
+                            <a:srgbClr val="152B37"/>
+                          </a:solidFill>
+                          <a:latin typeface="Calibri"/>
+                          <a:ea typeface="Calibri"/>
+                          <a:cs typeface="Calibri"/>
+                        </a:rPr>
+                        <a:t> </a:t>
+                      </a:r>
+                      <a:r>
+                        <a:rPr sz="2000" b="0" dirty="0" err="1">
+                          <a:solidFill>
+                            <a:srgbClr val="152B37"/>
+                          </a:solidFill>
+                          <a:latin typeface="Calibri"/>
+                          <a:ea typeface="Calibri"/>
+                          <a:cs typeface="Calibri"/>
+                        </a:rPr>
+                        <a:t>aliasy</a:t>
+                      </a:r>
+                      <a:r>
+                        <a:rPr sz="2000" b="0" dirty="0">
+                          <a:solidFill>
+                            <a:srgbClr val="152B37"/>
+                          </a:solidFill>
+                          <a:latin typeface="Calibri"/>
+                          <a:ea typeface="Calibri"/>
+                          <a:cs typeface="Calibri"/>
+                        </a:rPr>
+                        <a:t> </a:t>
+                      </a:r>
+                      <a:r>
+                        <a:rPr sz="2000" b="0" dirty="0" err="1">
+                          <a:solidFill>
+                            <a:srgbClr val="152B37"/>
+                          </a:solidFill>
+                          <a:latin typeface="Calibri"/>
+                          <a:ea typeface="Calibri"/>
+                          <a:cs typeface="Calibri"/>
+                        </a:rPr>
+                        <a:t>bibliotek</a:t>
+                      </a:r>
+                      <a:r>
+                        <a:rPr sz="2000" b="0" dirty="0">
+                          <a:solidFill>
+                            <a:srgbClr val="152B37"/>
+                          </a:solidFill>
+                          <a:latin typeface="Calibri"/>
+                          <a:ea typeface="Calibri"/>
+                          <a:cs typeface="Calibri"/>
+                        </a:rPr>
+                        <a:t> </a:t>
+                      </a:r>
+                      <a:r>
+                        <a:rPr sz="2000" b="0" dirty="0" err="1">
+                          <a:solidFill>
+                            <a:srgbClr val="152B37"/>
+                          </a:solidFill>
+                          <a:latin typeface="Calibri"/>
+                          <a:ea typeface="Calibri"/>
+                          <a:cs typeface="Calibri"/>
+                        </a:rPr>
+                        <a:t>oraz</a:t>
+                      </a:r>
+                      <a:r>
+                        <a:rPr sz="2000" b="0" dirty="0">
+                          <a:solidFill>
+                            <a:srgbClr val="152B37"/>
+                          </a:solidFill>
+                          <a:latin typeface="Calibri"/>
+                          <a:ea typeface="Calibri"/>
+                          <a:cs typeface="Calibri"/>
+                        </a:rPr>
+                        <a:t> </a:t>
+                      </a:r>
+                      <a:r>
+                        <a:rPr sz="2000" b="0" dirty="0" err="1">
+                          <a:solidFill>
+                            <a:srgbClr val="152B37"/>
+                          </a:solidFill>
+                          <a:latin typeface="Calibri"/>
+                          <a:ea typeface="Calibri"/>
+                          <a:cs typeface="Calibri"/>
+                        </a:rPr>
+                        <a:t>pluginów</a:t>
+                      </a:r>
+                      <a:endParaRPr sz="2000" b="0" dirty="0">
+                        <a:solidFill>
+                          <a:srgbClr val="152B37"/>
+                        </a:solidFill>
+                        <a:latin typeface="Calibri"/>
+                        <a:ea typeface="Calibri"/>
+                        <a:cs typeface="Calibri"/>
+                      </a:endParaRPr>
+                    </a:p>
+                  </a:txBody>
+                  <a:tcPr anchor="ctr">
+                    <a:solidFill>
+                      <a:srgbClr val="FFFFFF"/>
+                    </a:solidFill>
+                  </a:tcPr>
+                </a:tc>
+                <a:extLst>
+                  <a:ext uri="{0D108BD9-81ED-4DB2-BD59-A6C34878D82A}">
+                    <a16:rowId xmlns:a16="http://schemas.microsoft.com/office/drawing/2014/main" val="10001"/>
+                  </a:ext>
+                </a:extLst>
+              </a:tr>
+              <a:tr h="738188">
+                <a:tc>
+                  <a:txBody>
+                    <a:bodyPr/>
+                    <a:lstStyle/>
+                    <a:p>
+                      <a:r>
+                        <a:rPr sz="2000" b="0" dirty="0" err="1">
+                          <a:solidFill>
+                            <a:srgbClr val="152B37"/>
+                          </a:solidFill>
+                          <a:latin typeface="Calibri"/>
+                          <a:ea typeface="Calibri"/>
+                          <a:cs typeface="Calibri"/>
+                        </a:rPr>
+                        <a:t>build.gradle.kts</a:t>
+                      </a:r>
+                      <a:endParaRPr sz="2000" b="0" dirty="0">
+                        <a:solidFill>
+                          <a:srgbClr val="152B37"/>
+                        </a:solidFill>
+                        <a:latin typeface="Calibri"/>
+                        <a:ea typeface="Calibri"/>
+                        <a:cs typeface="Calibri"/>
+                      </a:endParaRPr>
+                    </a:p>
+                  </a:txBody>
+                  <a:tcPr anchor="ctr">
+                    <a:solidFill>
+                      <a:srgbClr val="EEF4F7"/>
+                    </a:solidFill>
+                  </a:tcPr>
+                </a:tc>
+                <a:tc>
+                  <a:txBody>
+                    <a:bodyPr/>
+                    <a:lstStyle/>
+                    <a:p>
+                      <a:r>
+                        <a:rPr sz="2000" b="0" dirty="0" err="1">
+                          <a:solidFill>
+                            <a:srgbClr val="152B37"/>
+                          </a:solidFill>
+                          <a:latin typeface="Calibri"/>
+                          <a:ea typeface="Calibri"/>
+                          <a:cs typeface="Calibri"/>
+                        </a:rPr>
+                        <a:t>Deklaracje</a:t>
+                      </a:r>
+                      <a:r>
+                        <a:rPr sz="2000" b="0" dirty="0">
+                          <a:solidFill>
+                            <a:srgbClr val="152B37"/>
+                          </a:solidFill>
+                          <a:latin typeface="Calibri"/>
+                          <a:ea typeface="Calibri"/>
+                          <a:cs typeface="Calibri"/>
+                        </a:rPr>
+                        <a:t> </a:t>
+                      </a:r>
+                      <a:r>
+                        <a:rPr sz="2000" b="0" dirty="0" err="1">
+                          <a:solidFill>
+                            <a:srgbClr val="152B37"/>
+                          </a:solidFill>
+                          <a:latin typeface="Calibri"/>
+                          <a:ea typeface="Calibri"/>
+                          <a:cs typeface="Calibri"/>
+                        </a:rPr>
+                        <a:t>pluginów</a:t>
+                      </a:r>
+                      <a:r>
+                        <a:rPr sz="2000" b="0" dirty="0">
+                          <a:solidFill>
+                            <a:srgbClr val="152B37"/>
+                          </a:solidFill>
+                          <a:latin typeface="Calibri"/>
+                          <a:ea typeface="Calibri"/>
+                          <a:cs typeface="Calibri"/>
+                        </a:rPr>
+                        <a:t> </a:t>
+                      </a:r>
+                      <a:r>
+                        <a:rPr sz="2000" b="0" dirty="0" err="1">
+                          <a:solidFill>
+                            <a:srgbClr val="152B37"/>
+                          </a:solidFill>
+                          <a:latin typeface="Calibri"/>
+                          <a:ea typeface="Calibri"/>
+                          <a:cs typeface="Calibri"/>
+                        </a:rPr>
+                        <a:t>projektu</a:t>
+                      </a:r>
+                      <a:endParaRPr sz="2000" b="0" dirty="0">
+                        <a:solidFill>
+                          <a:srgbClr val="152B37"/>
+                        </a:solidFill>
+                        <a:latin typeface="Calibri"/>
+                        <a:ea typeface="Calibri"/>
+                        <a:cs typeface="Calibri"/>
+                      </a:endParaRPr>
+                    </a:p>
+                  </a:txBody>
+                  <a:tcPr anchor="ctr">
+                    <a:solidFill>
+                      <a:srgbClr val="EEF4F7"/>
+                    </a:solidFill>
+                  </a:tcPr>
+                </a:tc>
+                <a:extLst>
+                  <a:ext uri="{0D108BD9-81ED-4DB2-BD59-A6C34878D82A}">
+                    <a16:rowId xmlns:a16="http://schemas.microsoft.com/office/drawing/2014/main" val="10002"/>
+                  </a:ext>
+                </a:extLst>
+              </a:tr>
+              <a:tr h="738188">
+                <a:tc>
+                  <a:txBody>
+                    <a:bodyPr/>
+                    <a:lstStyle/>
+                    <a:p>
+                      <a:r>
+                        <a:rPr sz="2000" b="0" dirty="0">
+                          <a:solidFill>
+                            <a:srgbClr val="152B37"/>
+                          </a:solidFill>
+                          <a:latin typeface="Calibri"/>
+                          <a:ea typeface="Calibri"/>
+                          <a:cs typeface="Calibri"/>
+                        </a:rPr>
+                        <a:t>app/</a:t>
+                      </a:r>
+                      <a:r>
+                        <a:rPr sz="2000" b="0" dirty="0" err="1">
+                          <a:solidFill>
+                            <a:srgbClr val="152B37"/>
+                          </a:solidFill>
+                          <a:latin typeface="Calibri"/>
+                          <a:ea typeface="Calibri"/>
+                          <a:cs typeface="Calibri"/>
+                        </a:rPr>
+                        <a:t>build.gradle.kts</a:t>
+                      </a:r>
+                      <a:endParaRPr sz="2000" b="0" dirty="0">
+                        <a:solidFill>
+                          <a:srgbClr val="152B37"/>
+                        </a:solidFill>
+                        <a:latin typeface="Calibri"/>
+                        <a:ea typeface="Calibri"/>
+                        <a:cs typeface="Calibri"/>
+                      </a:endParaRPr>
+                    </a:p>
+                  </a:txBody>
+                  <a:tcPr anchor="ctr">
+                    <a:solidFill>
+                      <a:srgbClr val="FFFFFF"/>
+                    </a:solidFill>
+                  </a:tcPr>
+                </a:tc>
+                <a:tc>
+                  <a:txBody>
+                    <a:bodyPr/>
+                    <a:lstStyle/>
+                    <a:p>
+                      <a:r>
+                        <a:rPr sz="2000" b="0" dirty="0" err="1">
+                          <a:solidFill>
+                            <a:srgbClr val="152B37"/>
+                          </a:solidFill>
+                          <a:latin typeface="Calibri"/>
+                          <a:ea typeface="Calibri"/>
+                          <a:cs typeface="Calibri"/>
+                        </a:rPr>
+                        <a:t>Pluginy</a:t>
+                      </a:r>
+                      <a:r>
+                        <a:rPr sz="2000" b="0" dirty="0">
+                          <a:solidFill>
+                            <a:srgbClr val="152B37"/>
+                          </a:solidFill>
+                          <a:latin typeface="Calibri"/>
+                          <a:ea typeface="Calibri"/>
+                          <a:cs typeface="Calibri"/>
+                        </a:rPr>
+                        <a:t> </a:t>
+                      </a:r>
+                      <a:r>
+                        <a:rPr sz="2000" b="0" dirty="0" err="1">
+                          <a:solidFill>
+                            <a:srgbClr val="152B37"/>
+                          </a:solidFill>
+                          <a:latin typeface="Calibri"/>
+                          <a:ea typeface="Calibri"/>
+                          <a:cs typeface="Calibri"/>
+                        </a:rPr>
+                        <a:t>i</a:t>
+                      </a:r>
+                      <a:r>
+                        <a:rPr sz="2000" b="0" dirty="0">
+                          <a:solidFill>
+                            <a:srgbClr val="152B37"/>
+                          </a:solidFill>
+                          <a:latin typeface="Calibri"/>
+                          <a:ea typeface="Calibri"/>
+                          <a:cs typeface="Calibri"/>
+                        </a:rPr>
+                        <a:t> </a:t>
+                      </a:r>
+                      <a:r>
+                        <a:rPr sz="2000" b="0" dirty="0" err="1">
+                          <a:solidFill>
+                            <a:srgbClr val="152B37"/>
+                          </a:solidFill>
+                          <a:latin typeface="Calibri"/>
+                          <a:ea typeface="Calibri"/>
+                          <a:cs typeface="Calibri"/>
+                        </a:rPr>
+                        <a:t>zależności</a:t>
+                      </a:r>
+                      <a:r>
+                        <a:rPr sz="2000" b="0" dirty="0">
+                          <a:solidFill>
+                            <a:srgbClr val="152B37"/>
+                          </a:solidFill>
+                          <a:latin typeface="Calibri"/>
+                          <a:ea typeface="Calibri"/>
+                          <a:cs typeface="Calibri"/>
+                        </a:rPr>
+                        <a:t> </a:t>
+                      </a:r>
+                      <a:r>
+                        <a:rPr sz="2000" b="0" dirty="0" err="1">
+                          <a:solidFill>
+                            <a:srgbClr val="152B37"/>
+                          </a:solidFill>
+                          <a:latin typeface="Calibri"/>
+                          <a:ea typeface="Calibri"/>
+                          <a:cs typeface="Calibri"/>
+                        </a:rPr>
+                        <a:t>modułu</a:t>
+                      </a:r>
+                      <a:r>
+                        <a:rPr sz="2000" b="0" dirty="0">
+                          <a:solidFill>
+                            <a:srgbClr val="152B37"/>
+                          </a:solidFill>
+                          <a:latin typeface="Calibri"/>
+                          <a:ea typeface="Calibri"/>
+                          <a:cs typeface="Calibri"/>
+                        </a:rPr>
+                        <a:t> app</a:t>
+                      </a:r>
+                    </a:p>
+                  </a:txBody>
+                  <a:tcPr anchor="ctr">
+                    <a:solidFill>
+                      <a:srgbClr val="FFFFFF"/>
+                    </a:solidFill>
+                  </a:tcPr>
+                </a:tc>
+                <a:extLst>
+                  <a:ext uri="{0D108BD9-81ED-4DB2-BD59-A6C34878D82A}">
+                    <a16:rowId xmlns:a16="http://schemas.microsoft.com/office/drawing/2014/main" val="10003"/>
+                  </a:ext>
+                </a:extLst>
+              </a:tr>
+            </a:tbl>
+          </a:graphicData>
+        </a:graphic>
+      </p:graphicFrame>
+      <p:sp>
+        <p:nvSpPr>
+          <p:cNvPr id="10" name="Dopisuj wpisy do istniejących sekcji.&#10;Po zmianac">
+            <a:extLst>
+              <a:ext uri="{FF2B5EF4-FFF2-40B4-BE49-F238E27FC236}">
+                <a16:creationId xmlns:a16="http://schemas.microsoft.com/office/drawing/2014/main" id="{7144A50C-184A-6ECF-5723-D6B97372AF21}"/>
+              </a:ext>
+            </a:extLst>
+          </p:cNvPr>
+          <p:cNvSpPr>
+            <a:spLocks noGrp="1"/>
+          </p:cNvSpPr>
+          <p:nvPr/>
+        </p:nvSpPr>
         <p:spPr>
           <a:xfrm>
-            <a:off x="3635896" y="1493001"/>
-            <a:ext cx="2165442" cy="5265286"/>
+            <a:off x="1333500" y="5886450"/>
+            <a:ext cx="7381875" cy="619125"/>
           </a:xfrm>
           <a:prstGeom prst="rect">
             <a:avLst/>
           </a:prstGeom>
+          <a:noFill/>
+          <a:ln w="0">
+            <a:noFill/>
+          </a:ln>
         </p:spPr>
-      </p:pic>
+        <p:txBody>
+          <a:bodyPr wrap="square" lIns="0" tIns="0" rIns="0" bIns="0" anchor="t">
+            <a:noAutofit/>
+          </a:bodyPr>
+          <a:lstStyle/>
+          <a:p>
+            <a:pPr algn="l">
+              <a:spcBef>
+                <a:spcPts val="0"/>
+              </a:spcBef>
+              <a:spcAft>
+                <a:spcPts val="0"/>
+              </a:spcAft>
+              <a:defRPr sz="1725" b="0">
+                <a:solidFill>
+                  <a:srgbClr val="455661"/>
+                </a:solidFill>
+                <a:latin typeface="Calibri"/>
+                <a:ea typeface="Calibri"/>
+                <a:cs typeface="Calibri"/>
+              </a:defRPr>
+            </a:pPr>
+            <a:r>
+              <a:rPr sz="2000" b="0" dirty="0" err="1">
+                <a:solidFill>
+                  <a:srgbClr val="455661"/>
+                </a:solidFill>
+                <a:latin typeface="Calibri"/>
+                <a:ea typeface="Calibri"/>
+                <a:cs typeface="Calibri"/>
+              </a:rPr>
+              <a:t>Dopisuj</a:t>
+            </a:r>
+            <a:r>
+              <a:rPr sz="2000" b="0" dirty="0">
+                <a:solidFill>
+                  <a:srgbClr val="455661"/>
+                </a:solidFill>
+                <a:latin typeface="Calibri"/>
+                <a:ea typeface="Calibri"/>
+                <a:cs typeface="Calibri"/>
+              </a:rPr>
+              <a:t> </a:t>
+            </a:r>
+            <a:r>
+              <a:rPr sz="2000" b="0" dirty="0" err="1">
+                <a:solidFill>
+                  <a:srgbClr val="455661"/>
+                </a:solidFill>
+                <a:latin typeface="Calibri"/>
+                <a:ea typeface="Calibri"/>
+                <a:cs typeface="Calibri"/>
+              </a:rPr>
+              <a:t>wpisy</a:t>
+            </a:r>
+            <a:r>
+              <a:rPr sz="2000" b="0" dirty="0">
+                <a:solidFill>
+                  <a:srgbClr val="455661"/>
+                </a:solidFill>
+                <a:latin typeface="Calibri"/>
+                <a:ea typeface="Calibri"/>
+                <a:cs typeface="Calibri"/>
+              </a:rPr>
+              <a:t> do </a:t>
+            </a:r>
+            <a:r>
+              <a:rPr sz="2000" b="0" dirty="0" err="1">
+                <a:solidFill>
+                  <a:srgbClr val="455661"/>
+                </a:solidFill>
+                <a:latin typeface="Calibri"/>
+                <a:ea typeface="Calibri"/>
+                <a:cs typeface="Calibri"/>
+              </a:rPr>
+              <a:t>istniejących</a:t>
+            </a:r>
+            <a:r>
+              <a:rPr sz="2000" b="0" dirty="0">
+                <a:solidFill>
+                  <a:srgbClr val="455661"/>
+                </a:solidFill>
+                <a:latin typeface="Calibri"/>
+                <a:ea typeface="Calibri"/>
+                <a:cs typeface="Calibri"/>
+              </a:rPr>
+              <a:t> </a:t>
+            </a:r>
+            <a:r>
+              <a:rPr sz="2000" b="0" dirty="0" err="1">
+                <a:solidFill>
+                  <a:srgbClr val="455661"/>
+                </a:solidFill>
+                <a:latin typeface="Calibri"/>
+                <a:ea typeface="Calibri"/>
+                <a:cs typeface="Calibri"/>
+              </a:rPr>
+              <a:t>sekcji</a:t>
+            </a:r>
+            <a:r>
+              <a:rPr sz="2000" b="0" dirty="0">
+                <a:solidFill>
+                  <a:srgbClr val="455661"/>
+                </a:solidFill>
+                <a:latin typeface="Calibri"/>
+                <a:ea typeface="Calibri"/>
+                <a:cs typeface="Calibri"/>
+              </a:rPr>
+              <a:t>.</a:t>
+            </a:r>
+          </a:p>
+          <a:p>
+            <a:pPr algn="l">
+              <a:spcBef>
+                <a:spcPts val="0"/>
+              </a:spcBef>
+              <a:spcAft>
+                <a:spcPts val="0"/>
+              </a:spcAft>
+              <a:defRPr sz="1725" b="0">
+                <a:solidFill>
+                  <a:srgbClr val="455661"/>
+                </a:solidFill>
+                <a:latin typeface="Calibri"/>
+                <a:ea typeface="Calibri"/>
+                <a:cs typeface="Calibri"/>
+              </a:defRPr>
+            </a:pPr>
+            <a:r>
+              <a:rPr sz="2400" b="0" dirty="0">
+                <a:solidFill>
+                  <a:srgbClr val="455661"/>
+                </a:solidFill>
+                <a:latin typeface="Calibri"/>
+                <a:ea typeface="Calibri"/>
+                <a:cs typeface="Calibri"/>
+              </a:rPr>
+              <a:t>Po </a:t>
+            </a:r>
+            <a:r>
+              <a:rPr sz="2400" b="0" dirty="0" err="1">
+                <a:solidFill>
+                  <a:srgbClr val="455661"/>
+                </a:solidFill>
+                <a:latin typeface="Calibri"/>
+                <a:ea typeface="Calibri"/>
+                <a:cs typeface="Calibri"/>
+              </a:rPr>
+              <a:t>zmianach</a:t>
+            </a:r>
+            <a:r>
+              <a:rPr sz="2400" b="0" dirty="0">
+                <a:solidFill>
+                  <a:srgbClr val="455661"/>
+                </a:solidFill>
+                <a:latin typeface="Calibri"/>
+                <a:ea typeface="Calibri"/>
+                <a:cs typeface="Calibri"/>
+              </a:rPr>
+              <a:t> </a:t>
+            </a:r>
+            <a:r>
+              <a:rPr sz="2400" b="0" dirty="0" err="1">
+                <a:solidFill>
+                  <a:srgbClr val="455661"/>
+                </a:solidFill>
+                <a:latin typeface="Calibri"/>
+                <a:ea typeface="Calibri"/>
+                <a:cs typeface="Calibri"/>
+              </a:rPr>
+              <a:t>wykonaj</a:t>
+            </a:r>
+            <a:r>
+              <a:rPr sz="2400" b="0" dirty="0">
+                <a:solidFill>
+                  <a:srgbClr val="455661"/>
+                </a:solidFill>
+                <a:latin typeface="Calibri"/>
+                <a:ea typeface="Calibri"/>
+                <a:cs typeface="Calibri"/>
+              </a:rPr>
+              <a:t> </a:t>
+            </a:r>
+            <a:r>
+              <a:rPr sz="2400" b="0" dirty="0" err="1">
+                <a:solidFill>
+                  <a:srgbClr val="455661"/>
+                </a:solidFill>
+                <a:latin typeface="Calibri"/>
+                <a:ea typeface="Calibri"/>
+                <a:cs typeface="Calibri"/>
+              </a:rPr>
+              <a:t>synchronizację</a:t>
+            </a:r>
+            <a:r>
+              <a:rPr sz="2400" b="0" dirty="0">
+                <a:solidFill>
+                  <a:srgbClr val="455661"/>
+                </a:solidFill>
+                <a:latin typeface="Calibri"/>
+                <a:ea typeface="Calibri"/>
+                <a:cs typeface="Calibri"/>
+              </a:rPr>
+              <a:t> </a:t>
+            </a:r>
+            <a:r>
+              <a:rPr sz="2400" b="0" dirty="0" err="1">
+                <a:solidFill>
+                  <a:srgbClr val="455661"/>
+                </a:solidFill>
+                <a:latin typeface="Calibri"/>
+                <a:ea typeface="Calibri"/>
+                <a:cs typeface="Calibri"/>
+              </a:rPr>
+              <a:t>projektu</a:t>
+            </a:r>
+            <a:r>
+              <a:rPr sz="2400" b="0" dirty="0">
+                <a:solidFill>
+                  <a:srgbClr val="455661"/>
+                </a:solidFill>
+                <a:latin typeface="Calibri"/>
+                <a:ea typeface="Calibri"/>
+                <a:cs typeface="Calibri"/>
+              </a:rPr>
+              <a:t>.</a:t>
+            </a:r>
+          </a:p>
+        </p:txBody>
+      </p:sp>
     </p:spTree>
     <p:extLst>
       <p:ext uri="{BB962C8B-B14F-4D97-AF65-F5344CB8AC3E}">
-        <p14:creationId xmlns:p14="http://schemas.microsoft.com/office/powerpoint/2010/main" val="3950376491"/>
+        <p14:creationId xmlns:p14="http://schemas.microsoft.com/office/powerpoint/2010/main" val="1741222220"/>
       </p:ext>
     </p:extLst>
   </p:cSld>
   <p:clrMapOvr>
     <a:masterClrMapping/>
   </p:clrMapOvr>
-  <p:timing>
-    <p:tnLst>
-      <p:par>
-        <p:cTn id="1" dur="indefinite" restart="never" nodeType="tmRoot">
-          <p:childTnLst>
-            <p:seq concurrent="1" nextAc="seek">
-              <p:cTn id="2" dur="indefinite" nodeType="mainSeq">
-                <p:childTnLst>
-                  <p:par>
-                    <p:cTn id="3" fill="hold">
-                      <p:stCondLst>
-                        <p:cond delay="indefinite"/>
-                      </p:stCondLst>
-                      <p:childTnLst>
-                        <p:par>
-                          <p:cTn id="4" fill="hold">
-                            <p:stCondLst>
-                              <p:cond delay="0"/>
-                            </p:stCondLst>
-                            <p:childTnLst>
-                              <p:par>
-                                <p:cTn id="5" presetID="1" presetClass="mediacall" presetSubtype="0" fill="hold" nodeType="clickEffect">
-                                  <p:stCondLst>
-                                    <p:cond delay="0"/>
-                                  </p:stCondLst>
-                                  <p:childTnLst>
-                                    <p:cmd type="call" cmd="playFrom(0.0)">
-                                      <p:cBhvr>
-                                        <p:cTn id="6" dur="8900" fill="hold"/>
-                                        <p:tgtEl>
-                                          <p:spTgt spid="8"/>
-                                        </p:tgtEl>
-                                      </p:cBhvr>
-                                    </p:cmd>
-                                  </p:childTnLst>
-                                </p:cTn>
-                              </p:par>
-                            </p:childTnLst>
-                          </p:cTn>
-                        </p:par>
-                      </p:childTnLst>
-                    </p:cTn>
-                  </p:par>
-                </p:childTnLst>
-              </p:cTn>
-              <p:prevCondLst>
-                <p:cond evt="onPrev" delay="0">
-                  <p:tgtEl>
-                    <p:sldTgt/>
-                  </p:tgtEl>
-                </p:cond>
-              </p:prevCondLst>
-              <p:nextCondLst>
-                <p:cond evt="onNext" delay="0">
-                  <p:tgtEl>
-                    <p:sldTgt/>
-                  </p:tgtEl>
-                </p:cond>
-              </p:nextCondLst>
-            </p:seq>
-            <p:video>
-              <p:cMediaNode vol="80000">
-                <p:cTn id="7" fill="hold" display="0">
-                  <p:stCondLst>
-                    <p:cond delay="indefinite"/>
-                  </p:stCondLst>
-                </p:cTn>
-                <p:tgtEl>
-                  <p:spTgt spid="8"/>
-                </p:tgtEl>
-              </p:cMediaNode>
-            </p:video>
-            <p:seq concurrent="1" nextAc="seek">
-              <p:cTn id="8" restart="whenNotActive" fill="hold" evtFilter="cancelBubble" nodeType="interactiveSeq">
-                <p:stCondLst>
-                  <p:cond evt="onClick" delay="0">
-                    <p:tgtEl>
-                      <p:spTgt spid="8"/>
-                    </p:tgtEl>
-                  </p:cond>
-                </p:stCondLst>
-                <p:endSync evt="end" delay="0">
-                  <p:rtn val="all"/>
-                </p:endSync>
-                <p:childTnLst>
-                  <p:par>
-                    <p:cTn id="9" fill="hold">
-                      <p:stCondLst>
-                        <p:cond delay="0"/>
-                      </p:stCondLst>
-                      <p:childTnLst>
-                        <p:par>
-                          <p:cTn id="10" fill="hold">
-                            <p:stCondLst>
-                              <p:cond delay="0"/>
-                            </p:stCondLst>
-                            <p:childTnLst>
-                              <p:par>
-                                <p:cTn id="11" presetID="2" presetClass="mediacall" presetSubtype="0" fill="hold" nodeType="clickEffect">
-                                  <p:stCondLst>
-                                    <p:cond delay="0"/>
-                                  </p:stCondLst>
-                                  <p:childTnLst>
-                                    <p:cmd type="call" cmd="togglePause">
-                                      <p:cBhvr>
-                                        <p:cTn id="12" dur="1" fill="hold"/>
-                                        <p:tgtEl>
-                                          <p:spTgt spid="8"/>
-                                        </p:tgtEl>
-                                      </p:cBhvr>
-                                    </p:cmd>
-                                  </p:childTnLst>
-                                </p:cTn>
-                              </p:par>
-                            </p:childTnLst>
-                          </p:cTn>
-                        </p:par>
-                      </p:childTnLst>
-                    </p:cTn>
-                  </p:par>
-                </p:childTnLst>
-              </p:cTn>
-              <p:nextCondLst>
-                <p:cond evt="onClick" delay="0">
-                  <p:tgtEl>
-                    <p:spTgt spid="8"/>
-                  </p:tgtEl>
-                </p:cond>
-              </p:nextCondLst>
-            </p:seq>
-          </p:childTnLst>
-        </p:cTn>
-      </p:par>
-    </p:tnLst>
-  </p:timing>
 </p:sld>
 </file>
 

--- a/PUM2/Aktualne/Wykłady/Wyklad1.pptx
+++ b/PUM2/Aktualne/Wykłady/Wyklad1.pptx
@@ -24797,7 +24797,7 @@
           <p:nvPr>
             <p:extLst>
               <p:ext uri="{D42A27DB-BD31-4B8C-83A1-F6EECF244321}">
-                <p14:modId xmlns:p14="http://schemas.microsoft.com/office/powerpoint/2010/main" val="3840616838"/>
+                <p14:modId xmlns:p14="http://schemas.microsoft.com/office/powerpoint/2010/main" val="98798662"/>
               </p:ext>
             </p:extLst>
           </p:nvPr>
@@ -24973,7 +24973,7 @@
                     <a:p>
                       <a:pPr algn="ctr"/>
                       <a:r>
-                        <a:rPr sz="2400" b="1" dirty="0">
+                        <a:rPr lang="pl-PL" sz="2400" b="1" dirty="0">
                           <a:solidFill>
                             <a:srgbClr val="152B37"/>
                           </a:solidFill>
@@ -24981,8 +24981,16 @@
                           <a:ea typeface="Calibri"/>
                           <a:cs typeface="Calibri"/>
                         </a:rPr>
-                        <a:t>7</a:t>
+                        <a:t>6</a:t>
                       </a:r>
+                      <a:endParaRPr sz="2400" b="1" dirty="0">
+                        <a:solidFill>
+                          <a:srgbClr val="152B37"/>
+                        </a:solidFill>
+                        <a:latin typeface="Calibri"/>
+                        <a:ea typeface="Calibri"/>
+                        <a:cs typeface="Calibri"/>
+                      </a:endParaRPr>
                     </a:p>
                   </a:txBody>
                   <a:tcPr anchor="ctr">
@@ -25030,7 +25038,7 @@
                     <a:p>
                       <a:pPr algn="ctr"/>
                       <a:r>
-                        <a:rPr sz="2400" b="1" dirty="0">
+                        <a:rPr lang="pl-PL" sz="2400" b="1" dirty="0">
                           <a:solidFill>
                             <a:srgbClr val="152B37"/>
                           </a:solidFill>
@@ -25038,8 +25046,16 @@
                           <a:ea typeface="Calibri"/>
                           <a:cs typeface="Calibri"/>
                         </a:rPr>
-                        <a:t>8</a:t>
+                        <a:t>7</a:t>
                       </a:r>
+                      <a:endParaRPr sz="2400" b="1" dirty="0">
+                        <a:solidFill>
+                          <a:srgbClr val="152B37"/>
+                        </a:solidFill>
+                        <a:latin typeface="Calibri"/>
+                        <a:ea typeface="Calibri"/>
+                        <a:cs typeface="Calibri"/>
+                      </a:endParaRPr>
                     </a:p>
                   </a:txBody>
                   <a:tcPr anchor="ctr">
@@ -25087,7 +25103,7 @@
                     <a:p>
                       <a:pPr algn="ctr"/>
                       <a:r>
-                        <a:rPr sz="2400" b="1" dirty="0">
+                        <a:rPr lang="pl-PL" sz="2400" b="1" dirty="0">
                           <a:solidFill>
                             <a:srgbClr val="152B37"/>
                           </a:solidFill>
@@ -25095,8 +25111,16 @@
                           <a:ea typeface="Calibri"/>
                           <a:cs typeface="Calibri"/>
                         </a:rPr>
-                        <a:t>9</a:t>
+                        <a:t>8</a:t>
                       </a:r>
+                      <a:endParaRPr sz="2400" b="1" dirty="0">
+                        <a:solidFill>
+                          <a:srgbClr val="152B37"/>
+                        </a:solidFill>
+                        <a:latin typeface="Calibri"/>
+                        <a:ea typeface="Calibri"/>
+                        <a:cs typeface="Calibri"/>
+                      </a:endParaRPr>
                     </a:p>
                   </a:txBody>
                   <a:tcPr anchor="ctr">
@@ -25144,7 +25168,7 @@
                     <a:p>
                       <a:pPr algn="ctr"/>
                       <a:r>
-                        <a:rPr sz="2400" b="1" dirty="0">
+                        <a:rPr lang="pl-PL" sz="2400" b="1" dirty="0">
                           <a:solidFill>
                             <a:srgbClr val="152B37"/>
                           </a:solidFill>
@@ -25152,8 +25176,16 @@
                           <a:ea typeface="Calibri"/>
                           <a:cs typeface="Calibri"/>
                         </a:rPr>
-                        <a:t>10</a:t>
+                        <a:t>9</a:t>
                       </a:r>
+                      <a:endParaRPr sz="2400" b="1" dirty="0">
+                        <a:solidFill>
+                          <a:srgbClr val="152B37"/>
+                        </a:solidFill>
+                        <a:latin typeface="Calibri"/>
+                        <a:ea typeface="Calibri"/>
+                        <a:cs typeface="Calibri"/>
+                      </a:endParaRPr>
                     </a:p>
                   </a:txBody>
                   <a:tcPr anchor="ctr">
@@ -25201,7 +25233,7 @@
                     <a:p>
                       <a:pPr algn="ctr"/>
                       <a:r>
-                        <a:rPr sz="2400" b="1">
+                        <a:rPr sz="2400" b="1" dirty="0">
                           <a:solidFill>
                             <a:srgbClr val="152B37"/>
                           </a:solidFill>
